--- a/applications/africa-cdc/documents/africa-cdc_ppt.pptx
+++ b/applications/africa-cdc/documents/africa-cdc_ppt.pptx
@@ -3107,7 +3107,6 @@
         </p:nvPicPr>
         <p:blipFill>
           <a:blip r:embed="rId2"/>
-          <a:srcRect l="33" r="33"/>
           <a:stretch>
             <a:fillRect/>
           </a:stretch>
@@ -3130,8 +3129,8 @@
         </p:nvSpPr>
         <p:spPr>
           <a:xfrm>
-            <a:off x="0" y="3474720"/>
-            <a:ext cx="12191695" cy="3383280"/>
+            <a:off x="0" y="3657600"/>
+            <a:ext cx="12191695" cy="3200400"/>
           </a:xfrm>
           <a:prstGeom prst="rect">
             <a:avLst/>
@@ -3142,7 +3141,6 @@
           <a:ln>
             <a:noFill/>
           </a:ln>
-          <a:effectLst/>
         </p:spPr>
         <p:style>
           <a:lnRef idx="1">
@@ -3174,7 +3172,7 @@
         </p:nvSpPr>
         <p:spPr>
           <a:xfrm>
-            <a:off x="594360" y="3749040"/>
+            <a:off x="548640" y="3931920"/>
             <a:ext cx="10972800" cy="320040"/>
           </a:xfrm>
           <a:prstGeom prst="rect">
@@ -3183,16 +3181,12 @@
           <a:noFill/>
         </p:spPr>
         <p:txBody>
-          <a:bodyPr wrap="square" anchor="t">
+          <a:bodyPr wrap="square">
             <a:spAutoFit/>
           </a:bodyPr>
           <a:lstStyle/>
           <a:p>
-            <a:pPr algn="l">
-              <a:spcAft>
-                <a:spcPts val="0"/>
-              </a:spcAft>
-            </a:pPr>
+            <a:pPr algn="l"/>
             <a:r>
               <a:rPr sz="1300" b="1" i="0">
                 <a:solidFill>
@@ -3213,8 +3207,8 @@
         </p:nvSpPr>
         <p:spPr>
           <a:xfrm>
-            <a:off x="594360" y="4206240"/>
-            <a:ext cx="10972800" cy="640080"/>
+            <a:off x="548640" y="4389120"/>
+            <a:ext cx="10972800" cy="594360"/>
           </a:xfrm>
           <a:prstGeom prst="rect">
             <a:avLst/>
@@ -3222,24 +3216,20 @@
           <a:noFill/>
         </p:spPr>
         <p:txBody>
-          <a:bodyPr wrap="square" anchor="t">
+          <a:bodyPr wrap="square">
             <a:spAutoFit/>
           </a:bodyPr>
           <a:lstStyle/>
           <a:p>
-            <a:pPr algn="l">
-              <a:spcAft>
-                <a:spcPts val="0"/>
-              </a:spcAft>
-            </a:pPr>
-            <a:r>
-              <a:rPr sz="2600" b="1" i="0">
+            <a:pPr algn="l"/>
+            <a:r>
+              <a:rPr sz="2400" b="1" i="0">
                 <a:solidFill>
                   <a:srgbClr val="FFFFFF"/>
                 </a:solidFill>
                 <a:latin typeface="Calibri"/>
               </a:rPr>
-              <a:t>Epidemiology &amp; Informatics Talent for FCHIP</a:t>
+              <a:t>Fellowship Nomination — Surveillance Science for Community Health</a:t>
             </a:r>
           </a:p>
         </p:txBody>
@@ -3252,7 +3242,7 @@
         </p:nvSpPr>
         <p:spPr>
           <a:xfrm>
-            <a:off x="594360" y="4983481"/>
+            <a:off x="548640" y="5166360"/>
             <a:ext cx="10972800" cy="365760"/>
           </a:xfrm>
           <a:prstGeom prst="rect">
@@ -3261,57 +3251,14 @@
           <a:noFill/>
         </p:spPr>
         <p:txBody>
-          <a:bodyPr wrap="square" anchor="t">
+          <a:bodyPr wrap="square">
             <a:spAutoFit/>
           </a:bodyPr>
           <a:lstStyle/>
           <a:p>
-            <a:pPr algn="l">
-              <a:spcAft>
-                <a:spcPts val="0"/>
-              </a:spcAft>
-            </a:pPr>
-            <a:r>
-              <a:rPr sz="1500" b="0" i="1">
-                <a:solidFill>
-                  <a:srgbClr val="F2C79B"/>
-                </a:solidFill>
-                <a:latin typeface="Calibri"/>
-              </a:rPr>
-              <a:t>Fully funded fellowship strengthening outbreak intelligence capacity</a:t>
-            </a:r>
-          </a:p>
-        </p:txBody>
-      </p:sp>
-      <p:sp>
-        <p:nvSpPr>
-          <p:cNvPr id="7" name="TextBox 6"/>
-          <p:cNvSpPr txBox="1"/>
-          <p:nvPr/>
-        </p:nvSpPr>
-        <p:spPr>
-          <a:xfrm>
-            <a:off x="594360" y="5532120"/>
-            <a:ext cx="10972800" cy="274320"/>
-          </a:xfrm>
-          <a:prstGeom prst="rect">
-            <a:avLst/>
-          </a:prstGeom>
-          <a:noFill/>
-        </p:spPr>
-        <p:txBody>
-          <a:bodyPr wrap="square" anchor="t">
-            <a:spAutoFit/>
-          </a:bodyPr>
-          <a:lstStyle/>
-          <a:p>
-            <a:pPr algn="l">
-              <a:spcAft>
-                <a:spcPts val="0"/>
-              </a:spcAft>
-            </a:pPr>
-            <a:r>
-              <a:rPr sz="1300" b="1" i="0">
+            <a:pPr algn="l"/>
+            <a:r>
+              <a:rPr sz="1400" b="1" i="0">
                 <a:solidFill>
                   <a:srgbClr val="FFFFFF"/>
                 </a:solidFill>
@@ -3324,14 +3271,14 @@
       </p:sp>
       <p:sp>
         <p:nvSpPr>
-          <p:cNvPr id="8" name="TextBox 7"/>
+          <p:cNvPr id="7" name="TextBox 6"/>
           <p:cNvSpPr txBox="1"/>
           <p:nvPr/>
         </p:nvSpPr>
         <p:spPr>
           <a:xfrm>
-            <a:off x="594360" y="5989320"/>
-            <a:ext cx="10972800" cy="365760"/>
+            <a:off x="548640" y="5760720"/>
+            <a:ext cx="10972800" cy="320040"/>
           </a:xfrm>
           <a:prstGeom prst="rect">
             <a:avLst/>
@@ -3339,16 +3286,12 @@
           <a:noFill/>
         </p:spPr>
         <p:txBody>
-          <a:bodyPr wrap="square" anchor="t">
+          <a:bodyPr wrap="square">
             <a:spAutoFit/>
           </a:bodyPr>
           <a:lstStyle/>
           <a:p>
-            <a:pPr algn="l">
-              <a:spcAft>
-                <a:spcPts val="0"/>
-              </a:spcAft>
-            </a:pPr>
+            <a:pPr algn="l"/>
             <a:r>
               <a:rPr sz="1200" b="0" i="0">
                 <a:solidFill>
@@ -3356,7 +3299,7 @@
                 </a:solidFill>
                 <a:latin typeface="Calibri"/>
               </a:rPr>
-              <a:t>Select a FairBanks public-health professional for the AES Epidemiology (or Informatics) track.</a:t>
+              <a:t>3 months training in Addis Ababa · 21 months field placement · fully funded</a:t>
             </a:r>
           </a:p>
         </p:txBody>
@@ -3389,7 +3332,6 @@
         </p:nvPicPr>
         <p:blipFill>
           <a:blip r:embed="rId2"/>
-          <a:srcRect t="7796" b="7796"/>
           <a:stretch>
             <a:fillRect/>
           </a:stretch>
@@ -3412,8 +3354,8 @@
         </p:nvSpPr>
         <p:spPr>
           <a:xfrm>
-            <a:off x="0" y="3657600"/>
-            <a:ext cx="12191695" cy="3200400"/>
+            <a:off x="0" y="4297680"/>
+            <a:ext cx="12191695" cy="2560320"/>
           </a:xfrm>
           <a:prstGeom prst="rect">
             <a:avLst/>
@@ -3424,7 +3366,6 @@
           <a:ln>
             <a:noFill/>
           </a:ln>
-          <a:effectLst/>
         </p:spPr>
         <p:style>
           <a:lnRef idx="1">
@@ -3456,8 +3397,8 @@
         </p:nvSpPr>
         <p:spPr>
           <a:xfrm>
-            <a:off x="594360" y="3931920"/>
-            <a:ext cx="10972800" cy="274320"/>
+            <a:off x="548640" y="4663440"/>
+            <a:ext cx="10972800" cy="502920"/>
           </a:xfrm>
           <a:prstGeom prst="rect">
             <a:avLst/>
@@ -3465,24 +3406,20 @@
           <a:noFill/>
         </p:spPr>
         <p:txBody>
-          <a:bodyPr wrap="square" anchor="t">
+          <a:bodyPr wrap="square">
             <a:spAutoFit/>
           </a:bodyPr>
           <a:lstStyle/>
           <a:p>
-            <a:pPr algn="l">
-              <a:spcAft>
-                <a:spcPts val="0"/>
-              </a:spcAft>
-            </a:pPr>
-            <a:r>
-              <a:rPr sz="1300" b="1" i="0">
-                <a:solidFill>
-                  <a:srgbClr val="14A3A3"/>
+            <a:pPr algn="l"/>
+            <a:r>
+              <a:rPr sz="2400" b="1" i="0">
+                <a:solidFill>
+                  <a:srgbClr val="FFFFFF"/>
                 </a:solidFill>
                 <a:latin typeface="Calibri"/>
               </a:rPr>
-              <a:t>The ask</a:t>
+              <a:t>Select our fellow — skills that return to FCHIP and Uganda's communities.</a:t>
             </a:r>
           </a:p>
         </p:txBody>
@@ -3495,8 +3432,8 @@
         </p:nvSpPr>
         <p:spPr>
           <a:xfrm>
-            <a:off x="594360" y="4389120"/>
-            <a:ext cx="10972800" cy="822960"/>
+            <a:off x="548640" y="5486400"/>
+            <a:ext cx="10972800" cy="320040"/>
           </a:xfrm>
           <a:prstGeom prst="rect">
             <a:avLst/>
@@ -3504,94 +3441,12 @@
           <a:noFill/>
         </p:spPr>
         <p:txBody>
-          <a:bodyPr wrap="square" anchor="t">
+          <a:bodyPr wrap="square">
             <a:spAutoFit/>
           </a:bodyPr>
           <a:lstStyle/>
           <a:p>
-            <a:pPr algn="l">
-              <a:spcAft>
-                <a:spcPts val="0"/>
-              </a:spcAft>
-            </a:pPr>
-            <a:r>
-              <a:rPr sz="2200" b="1" i="0">
-                <a:solidFill>
-                  <a:srgbClr val="FFFFFF"/>
-                </a:solidFill>
-                <a:latin typeface="Calibri"/>
-              </a:rPr>
-              <a:t>Select a FairBanks public-health professional for the AES Epidemiology (or Informatics) track.</a:t>
-            </a:r>
-          </a:p>
-        </p:txBody>
-      </p:sp>
-      <p:sp>
-        <p:nvSpPr>
-          <p:cNvPr id="6" name="TextBox 5"/>
-          <p:cNvSpPr txBox="1"/>
-          <p:nvPr/>
-        </p:nvSpPr>
-        <p:spPr>
-          <a:xfrm>
-            <a:off x="594360" y="5394960"/>
-            <a:ext cx="10972800" cy="365760"/>
-          </a:xfrm>
-          <a:prstGeom prst="rect">
-            <a:avLst/>
-          </a:prstGeom>
-          <a:noFill/>
-        </p:spPr>
-        <p:txBody>
-          <a:bodyPr wrap="square" anchor="t">
-            <a:spAutoFit/>
-          </a:bodyPr>
-          <a:lstStyle/>
-          <a:p>
-            <a:pPr algn="l">
-              <a:spcAft>
-                <a:spcPts val="0"/>
-              </a:spcAft>
-            </a:pPr>
-            <a:r>
-              <a:rPr sz="1400" b="0" i="1">
-                <a:solidFill>
-                  <a:srgbClr val="F2C79B"/>
-                </a:solidFill>
-                <a:latin typeface="Calibri"/>
-              </a:rPr>
-              <a:t>Fully funded fellowship strengthening outbreak intelligence capacity</a:t>
-            </a:r>
-          </a:p>
-        </p:txBody>
-      </p:sp>
-      <p:sp>
-        <p:nvSpPr>
-          <p:cNvPr id="7" name="TextBox 6"/>
-          <p:cNvSpPr txBox="1"/>
-          <p:nvPr/>
-        </p:nvSpPr>
-        <p:spPr>
-          <a:xfrm>
-            <a:off x="594360" y="5943600"/>
-            <a:ext cx="10972800" cy="320040"/>
-          </a:xfrm>
-          <a:prstGeom prst="rect">
-            <a:avLst/>
-          </a:prstGeom>
-          <a:noFill/>
-        </p:spPr>
-        <p:txBody>
-          <a:bodyPr wrap="square" anchor="t">
-            <a:spAutoFit/>
-          </a:bodyPr>
-          <a:lstStyle/>
-          <a:p>
-            <a:pPr algn="l">
-              <a:spcAft>
-                <a:spcPts val="0"/>
-              </a:spcAft>
-            </a:pPr>
+            <a:pPr algn="l"/>
             <a:r>
               <a:rPr sz="1400" b="1" i="0">
                 <a:solidFill>
@@ -3600,6 +3455,41 @@
                 <a:latin typeface="Calibri"/>
               </a:rPr>
               <a:t>Your health, our mission.</a:t>
+            </a:r>
+          </a:p>
+        </p:txBody>
+      </p:sp>
+      <p:sp>
+        <p:nvSpPr>
+          <p:cNvPr id="6" name="TextBox 5"/>
+          <p:cNvSpPr txBox="1"/>
+          <p:nvPr/>
+        </p:nvSpPr>
+        <p:spPr>
+          <a:xfrm>
+            <a:off x="548640" y="6035040"/>
+            <a:ext cx="10972800" cy="274320"/>
+          </a:xfrm>
+          <a:prstGeom prst="rect">
+            <a:avLst/>
+          </a:prstGeom>
+          <a:noFill/>
+        </p:spPr>
+        <p:txBody>
+          <a:bodyPr wrap="square">
+            <a:spAutoFit/>
+          </a:bodyPr>
+          <a:lstStyle/>
+          <a:p>
+            <a:pPr algn="l"/>
+            <a:r>
+              <a:rPr sz="1200" b="0" i="0">
+                <a:solidFill>
+                  <a:srgbClr val="D0E8E8"/>
+                </a:solidFill>
+                <a:latin typeface="Calibri"/>
+              </a:rPr>
+              <a:t>Apply by 26 August 2026</a:t>
             </a:r>
           </a:p>
         </p:txBody>
@@ -3631,7 +3521,7 @@
         <p:spPr>
           <a:xfrm>
             <a:off x="0" y="0"/>
-            <a:ext cx="12191695" cy="960120"/>
+            <a:ext cx="12191695" cy="914400"/>
           </a:xfrm>
           <a:prstGeom prst="rect">
             <a:avLst/>
@@ -3642,7 +3532,6 @@
           <a:ln>
             <a:noFill/>
           </a:ln>
-          <a:effectLst/>
         </p:spPr>
         <p:style>
           <a:lnRef idx="1">
@@ -3675,7 +3564,7 @@
         <p:spPr>
           <a:xfrm>
             <a:off x="0" y="0"/>
-            <a:ext cx="164592" cy="960120"/>
+            <a:ext cx="137160" cy="914400"/>
           </a:xfrm>
           <a:prstGeom prst="rect">
             <a:avLst/>
@@ -3686,7 +3575,6 @@
           <a:ln>
             <a:noFill/>
           </a:ln>
-          <a:effectLst/>
         </p:spPr>
         <p:style>
           <a:lnRef idx="1">
@@ -3718,125 +3606,8 @@
         </p:nvSpPr>
         <p:spPr>
           <a:xfrm>
-            <a:off x="457200" y="109728"/>
-            <a:ext cx="10972800" cy="256032"/>
-          </a:xfrm>
-          <a:prstGeom prst="rect">
-            <a:avLst/>
-          </a:prstGeom>
-          <a:noFill/>
-        </p:spPr>
-        <p:txBody>
-          <a:bodyPr wrap="square" anchor="t">
-            <a:spAutoFit/>
-          </a:bodyPr>
-          <a:lstStyle/>
-          <a:p>
-            <a:pPr algn="l">
-              <a:spcAft>
-                <a:spcPts val="0"/>
-              </a:spcAft>
-            </a:pPr>
-            <a:r>
-              <a:rPr sz="1100" b="1" i="0">
-                <a:solidFill>
-                  <a:srgbClr val="C45C26"/>
-                </a:solidFill>
-                <a:latin typeface="Calibri"/>
-              </a:rPr>
-              <a:t>WIN-WIN</a:t>
-            </a:r>
-          </a:p>
-        </p:txBody>
-      </p:sp>
-      <p:sp>
-        <p:nvSpPr>
-          <p:cNvPr id="5" name="TextBox 4"/>
-          <p:cNvSpPr txBox="1"/>
-          <p:nvPr/>
-        </p:nvSpPr>
-        <p:spPr>
-          <a:xfrm>
-            <a:off x="457200" y="384048"/>
-            <a:ext cx="11247120" cy="475488"/>
-          </a:xfrm>
-          <a:prstGeom prst="rect">
-            <a:avLst/>
-          </a:prstGeom>
-          <a:noFill/>
-        </p:spPr>
-        <p:txBody>
-          <a:bodyPr wrap="square" anchor="t">
-            <a:spAutoFit/>
-          </a:bodyPr>
-          <a:lstStyle/>
-          <a:p>
-            <a:pPr algn="l">
-              <a:spcAft>
-                <a:spcPts val="0"/>
-              </a:spcAft>
-            </a:pPr>
-            <a:r>
-              <a:rPr sz="2200" b="1" i="0">
-                <a:solidFill>
-                  <a:srgbClr val="0A1F2E"/>
-                </a:solidFill>
-                <a:latin typeface="Calibri"/>
-              </a:rPr>
-              <a:t>Mutual value for FairBanks and the programme</a:t>
-            </a:r>
-          </a:p>
-        </p:txBody>
-      </p:sp>
-      <p:sp>
-        <p:nvSpPr>
-          <p:cNvPr id="6" name="TextBox 5"/>
-          <p:cNvSpPr txBox="1"/>
-          <p:nvPr/>
-        </p:nvSpPr>
-        <p:spPr>
-          <a:xfrm>
-            <a:off x="457200" y="1143000"/>
-            <a:ext cx="5486400" cy="320040"/>
-          </a:xfrm>
-          <a:prstGeom prst="rect">
-            <a:avLst/>
-          </a:prstGeom>
-          <a:noFill/>
-        </p:spPr>
-        <p:txBody>
-          <a:bodyPr wrap="square" anchor="t">
-            <a:spAutoFit/>
-          </a:bodyPr>
-          <a:lstStyle/>
-          <a:p>
-            <a:pPr algn="l">
-              <a:spcAft>
-                <a:spcPts val="0"/>
-              </a:spcAft>
-            </a:pPr>
-            <a:r>
-              <a:rPr sz="1600" b="1" i="0">
-                <a:solidFill>
-                  <a:srgbClr val="0D6E6E"/>
-                </a:solidFill>
-                <a:latin typeface="Calibri"/>
-              </a:rPr>
-              <a:t>What we gain</a:t>
-            </a:r>
-          </a:p>
-        </p:txBody>
-      </p:sp>
-      <p:sp>
-        <p:nvSpPr>
-          <p:cNvPr id="7" name="TextBox 6"/>
-          <p:cNvSpPr txBox="1"/>
-          <p:nvPr/>
-        </p:nvSpPr>
-        <p:spPr>
-          <a:xfrm>
-            <a:off x="457200" y="1508760"/>
-            <a:ext cx="5486400" cy="4800600"/>
+            <a:off x="411480" y="91440"/>
+            <a:ext cx="10972800" cy="274320"/>
           </a:xfrm>
           <a:prstGeom prst="rect">
             <a:avLst/>
@@ -3849,120 +3620,29 @@
           </a:bodyPr>
           <a:lstStyle/>
           <a:p>
-            <a:pPr>
-              <a:spcAft>
-                <a:spcPts val="800"/>
-              </a:spcAft>
-            </a:pPr>
-            <a:r>
-              <a:rPr sz="1300">
-                <a:solidFill>
-                  <a:srgbClr val="1E2F38"/>
+            <a:pPr algn="l"/>
+            <a:r>
+              <a:rPr sz="1100" b="1" i="0">
+                <a:solidFill>
+                  <a:srgbClr val="C45C26"/>
                 </a:solidFill>
                 <a:latin typeface="Calibri"/>
               </a:rPr>
-              <a:t>•  World-class epidemiology / informatics training for staff</a:t>
-            </a:r>
-          </a:p>
-          <a:p>
-            <a:pPr>
-              <a:spcAft>
-                <a:spcPts val="800"/>
-              </a:spcAft>
-            </a:pPr>
-            <a:r>
-              <a:rPr sz="1300">
-                <a:solidFill>
-                  <a:srgbClr val="1E2F38"/>
-                </a:solidFill>
-                <a:latin typeface="Calibri"/>
-              </a:rPr>
-              <a:t>•  Stronger outbreak and surveillance modules inside FCHIP</a:t>
-            </a:r>
-          </a:p>
-          <a:p>
-            <a:pPr>
-              <a:spcAft>
-                <a:spcPts val="800"/>
-              </a:spcAft>
-            </a:pPr>
-            <a:r>
-              <a:rPr sz="1300">
-                <a:solidFill>
-                  <a:srgbClr val="1E2F38"/>
-                </a:solidFill>
-                <a:latin typeface="Calibri"/>
-              </a:rPr>
-              <a:t>•  Stipend, travel, insurance, hardware, and software covered</a:t>
-            </a:r>
-          </a:p>
-          <a:p>
-            <a:pPr>
-              <a:spcAft>
-                <a:spcPts val="800"/>
-              </a:spcAft>
-            </a:pPr>
-            <a:r>
-              <a:rPr sz="1300">
-                <a:solidFill>
-                  <a:srgbClr val="1E2F38"/>
-                </a:solidFill>
-                <a:latin typeface="Calibri"/>
-              </a:rPr>
-              <a:t>•  Continental network across African Epidemic Services</a:t>
-            </a:r>
-          </a:p>
-        </p:txBody>
-      </p:sp>
-      <p:sp>
-        <p:nvSpPr>
-          <p:cNvPr id="8" name="TextBox 7"/>
+              <a:t>AES FELLOWSHIP</a:t>
+            </a:r>
+          </a:p>
+        </p:txBody>
+      </p:sp>
+      <p:sp>
+        <p:nvSpPr>
+          <p:cNvPr id="5" name="TextBox 4"/>
           <p:cNvSpPr txBox="1"/>
           <p:nvPr/>
         </p:nvSpPr>
         <p:spPr>
           <a:xfrm>
-            <a:off x="6309360" y="1143000"/>
-            <a:ext cx="5486400" cy="320040"/>
-          </a:xfrm>
-          <a:prstGeom prst="rect">
-            <a:avLst/>
-          </a:prstGeom>
-          <a:noFill/>
-        </p:spPr>
-        <p:txBody>
-          <a:bodyPr wrap="square" anchor="t">
-            <a:spAutoFit/>
-          </a:bodyPr>
-          <a:lstStyle/>
-          <a:p>
-            <a:pPr algn="l">
-              <a:spcAft>
-                <a:spcPts val="0"/>
-              </a:spcAft>
-            </a:pPr>
-            <a:r>
-              <a:rPr sz="1600" b="1" i="0">
-                <a:solidFill>
-                  <a:srgbClr val="0D6E6E"/>
-                </a:solidFill>
-                <a:latin typeface="Calibri"/>
-              </a:rPr>
-              <a:t>What they gain</a:t>
-            </a:r>
-          </a:p>
-        </p:txBody>
-      </p:sp>
-      <p:sp>
-        <p:nvSpPr>
-          <p:cNvPr id="9" name="TextBox 8"/>
-          <p:cNvSpPr txBox="1"/>
-          <p:nvPr/>
-        </p:nvSpPr>
-        <p:spPr>
-          <a:xfrm>
-            <a:off x="6309360" y="1508760"/>
-            <a:ext cx="5394960" cy="4800600"/>
+            <a:off x="411480" y="384048"/>
+            <a:ext cx="10972800" cy="457200"/>
           </a:xfrm>
           <a:prstGeom prst="rect">
             <a:avLst/>
@@ -3975,81 +3655,92 @@
           </a:bodyPr>
           <a:lstStyle/>
           <a:p>
-            <a:pPr>
-              <a:spcAft>
-                <a:spcPts val="800"/>
-              </a:spcAft>
-            </a:pPr>
-            <a:r>
-              <a:rPr sz="1300">
-                <a:solidFill>
-                  <a:srgbClr val="1E2F38"/>
+            <a:pPr algn="l"/>
+            <a:r>
+              <a:rPr sz="2400" b="1" i="0">
+                <a:solidFill>
+                  <a:srgbClr val="0A1F2E"/>
                 </a:solidFill>
                 <a:latin typeface="Calibri"/>
               </a:rPr>
-              <a:t>•  Fellow already employed in public-facing community health work</a:t>
-            </a:r>
-          </a:p>
-          <a:p>
-            <a:pPr>
-              <a:spcAft>
-                <a:spcPts val="800"/>
-              </a:spcAft>
-            </a:pPr>
-            <a:r>
-              <a:rPr sz="1300">
+              <a:t>Two years — training, placement, fully funded</a:t>
+            </a:r>
+          </a:p>
+        </p:txBody>
+      </p:sp>
+      <p:sp>
+        <p:nvSpPr>
+          <p:cNvPr id="6" name="TextBox 5"/>
+          <p:cNvSpPr txBox="1"/>
+          <p:nvPr/>
+        </p:nvSpPr>
+        <p:spPr>
+          <a:xfrm>
+            <a:off x="457200" y="1097280"/>
+            <a:ext cx="5669280" cy="5029200"/>
+          </a:xfrm>
+          <a:prstGeom prst="rect">
+            <a:avLst/>
+          </a:prstGeom>
+          <a:noFill/>
+        </p:spPr>
+        <p:txBody>
+          <a:bodyPr wrap="square">
+            <a:spAutoFit/>
+          </a:bodyPr>
+          <a:lstStyle/>
+          <a:p>
+            <a:pPr algn="l"/>
+            <a:r>
+              <a:rPr sz="1700" b="0" i="0">
                 <a:solidFill>
                   <a:srgbClr val="1E2F38"/>
                 </a:solidFill>
                 <a:latin typeface="Calibri"/>
               </a:rPr>
-              <a:t>•  Field placement potential linked to real CHW and facility data flows</a:t>
-            </a:r>
-          </a:p>
-          <a:p>
-            <a:pPr>
-              <a:spcAft>
-                <a:spcPts val="800"/>
-              </a:spcAft>
-            </a:pPr>
-            <a:r>
-              <a:rPr sz="1300">
-                <a:solidFill>
-                  <a:srgbClr val="1E2F38"/>
-                </a:solidFill>
-                <a:latin typeface="Calibri"/>
-              </a:rPr>
-              <a:t>•  Contribution to Africa's epidemic readiness from Uganda</a:t>
-            </a:r>
-          </a:p>
-          <a:p>
-            <a:pPr>
-              <a:spcAft>
-                <a:spcPts val="800"/>
-              </a:spcAft>
-            </a:pPr>
-            <a:r>
-              <a:rPr sz="1300">
-                <a:solidFill>
-                  <a:srgbClr val="1E2F38"/>
-                </a:solidFill>
-                <a:latin typeface="Calibri"/>
-              </a:rPr>
-              <a:t>•  Informatics track alignment with digital community health tools</a:t>
-            </a:r>
-          </a:p>
-        </p:txBody>
-      </p:sp>
-      <p:sp>
-        <p:nvSpPr>
-          <p:cNvPr id="10" name="Rectangle 9"/>
+              <a:t>• 3 months core training in Addis Ababa
+• 21 months field placement with employer support
+• Epidemiology or Public Health Informatics track
+• Stipend, travel, insurance, hardware, software
+• African Union citizens under 35 in public health</a:t>
+            </a:r>
+          </a:p>
+        </p:txBody>
+      </p:sp>
+      <p:pic>
+        <p:nvPicPr>
+          <p:cNvPr id="7" name="Picture 6" descr="indoor_training_staff_presenting_01_opt.jpg"/>
+          <p:cNvPicPr>
+            <a:picLocks noChangeAspect="1"/>
+          </p:cNvPicPr>
+          <p:nvPr/>
+        </p:nvPicPr>
+        <p:blipFill>
+          <a:blip r:embed="rId2"/>
+          <a:stretch>
+            <a:fillRect/>
+          </a:stretch>
+        </p:blipFill>
+        <p:spPr>
+          <a:xfrm>
+            <a:off x="6400800" y="1844671"/>
+            <a:ext cx="5303520" cy="3534417"/>
+          </a:xfrm>
+          <a:prstGeom prst="rect">
+            <a:avLst/>
+          </a:prstGeom>
+        </p:spPr>
+      </p:pic>
+      <p:sp>
+        <p:nvSpPr>
+          <p:cNvPr id="8" name="Rectangle 7"/>
           <p:cNvSpPr/>
           <p:nvPr/>
         </p:nvSpPr>
         <p:spPr>
           <a:xfrm>
-            <a:off x="0" y="6565392"/>
-            <a:ext cx="12191695" cy="292608"/>
+            <a:off x="0" y="6583680"/>
+            <a:ext cx="12191695" cy="274320"/>
           </a:xfrm>
           <a:prstGeom prst="rect">
             <a:avLst/>
@@ -4060,7 +3751,6 @@
           <a:ln>
             <a:noFill/>
           </a:ln>
-          <a:effectLst/>
         </p:spPr>
         <p:style>
           <a:lnRef idx="1">
@@ -4086,14 +3776,14 @@
       </p:sp>
       <p:sp>
         <p:nvSpPr>
-          <p:cNvPr id="11" name="TextBox 10"/>
+          <p:cNvPr id="9" name="TextBox 8"/>
           <p:cNvSpPr txBox="1"/>
           <p:nvPr/>
         </p:nvSpPr>
         <p:spPr>
           <a:xfrm>
-            <a:off x="365760" y="6574536"/>
-            <a:ext cx="9144000" cy="274320"/>
+            <a:off x="365760" y="6592824"/>
+            <a:ext cx="9144000" cy="256032"/>
           </a:xfrm>
           <a:prstGeom prst="rect">
             <a:avLst/>
@@ -4101,16 +3791,12 @@
           <a:noFill/>
         </p:spPr>
         <p:txBody>
-          <a:bodyPr wrap="square" anchor="ctr">
+          <a:bodyPr wrap="square">
             <a:spAutoFit/>
           </a:bodyPr>
           <a:lstStyle/>
           <a:p>
-            <a:pPr algn="l">
-              <a:spcAft>
-                <a:spcPts val="0"/>
-              </a:spcAft>
-            </a:pPr>
+            <a:pPr algn="l"/>
             <a:r>
               <a:rPr sz="900" b="0" i="0">
                 <a:solidFill>
@@ -4118,21 +3804,21 @@
                 </a:solidFill>
                 <a:latin typeface="Calibri"/>
               </a:rPr>
-              <a:t>FairBanks FCHIP  |  Africa CDC African Epidemic Services (AE  |  Your health, our mission.</a:t>
-            </a:r>
-          </a:p>
-        </p:txBody>
-      </p:sp>
-      <p:sp>
-        <p:nvSpPr>
-          <p:cNvPr id="12" name="TextBox 11"/>
+              <a:t>FairBanks FCHIP | Africa CDC AES Fellowship | Your health, our mission.</a:t>
+            </a:r>
+          </a:p>
+        </p:txBody>
+      </p:sp>
+      <p:sp>
+        <p:nvSpPr>
+          <p:cNvPr id="10" name="TextBox 9"/>
           <p:cNvSpPr txBox="1"/>
           <p:nvPr/>
         </p:nvSpPr>
         <p:spPr>
           <a:xfrm>
-            <a:off x="11094415" y="6574536"/>
-            <a:ext cx="731520" cy="274320"/>
+            <a:off x="11460175" y="6592824"/>
+            <a:ext cx="457200" cy="256032"/>
           </a:xfrm>
           <a:prstGeom prst="rect">
             <a:avLst/>
@@ -4140,16 +3826,12 @@
           <a:noFill/>
         </p:spPr>
         <p:txBody>
-          <a:bodyPr wrap="square" anchor="ctr">
+          <a:bodyPr wrap="square">
             <a:spAutoFit/>
           </a:bodyPr>
           <a:lstStyle/>
           <a:p>
-            <a:pPr algn="r">
-              <a:spcAft>
-                <a:spcPts val="0"/>
-              </a:spcAft>
-            </a:pPr>
+            <a:pPr algn="r"/>
             <a:r>
               <a:rPr sz="900" b="0" i="0">
                 <a:solidFill>
@@ -4189,7 +3871,7 @@
         <p:spPr>
           <a:xfrm>
             <a:off x="0" y="0"/>
-            <a:ext cx="12191695" cy="960120"/>
+            <a:ext cx="12191695" cy="914400"/>
           </a:xfrm>
           <a:prstGeom prst="rect">
             <a:avLst/>
@@ -4200,7 +3882,6 @@
           <a:ln>
             <a:noFill/>
           </a:ln>
-          <a:effectLst/>
         </p:spPr>
         <p:style>
           <a:lnRef idx="1">
@@ -4233,7 +3914,7 @@
         <p:spPr>
           <a:xfrm>
             <a:off x="0" y="0"/>
-            <a:ext cx="164592" cy="960120"/>
+            <a:ext cx="137160" cy="914400"/>
           </a:xfrm>
           <a:prstGeom prst="rect">
             <a:avLst/>
@@ -4244,7 +3925,6 @@
           <a:ln>
             <a:noFill/>
           </a:ln>
-          <a:effectLst/>
         </p:spPr>
         <p:style>
           <a:lnRef idx="1">
@@ -4276,8 +3956,8 @@
         </p:nvSpPr>
         <p:spPr>
           <a:xfrm>
-            <a:off x="457200" y="109728"/>
-            <a:ext cx="10972800" cy="256032"/>
+            <a:off x="411480" y="91440"/>
+            <a:ext cx="10972800" cy="274320"/>
           </a:xfrm>
           <a:prstGeom prst="rect">
             <a:avLst/>
@@ -4285,16 +3965,12 @@
           <a:noFill/>
         </p:spPr>
         <p:txBody>
-          <a:bodyPr wrap="square" anchor="t">
+          <a:bodyPr wrap="square">
             <a:spAutoFit/>
           </a:bodyPr>
           <a:lstStyle/>
           <a:p>
-            <a:pPr algn="l">
-              <a:spcAft>
-                <a:spcPts val="0"/>
-              </a:spcAft>
-            </a:pPr>
+            <a:pPr algn="l"/>
             <a:r>
               <a:rPr sz="1100" b="1" i="0">
                 <a:solidFill>
@@ -4302,7 +3978,7 @@
                 </a:solidFill>
                 <a:latin typeface="Calibri"/>
               </a:rPr>
-              <a:t>THE PROBLEM</a:t>
+              <a:t>SURVEILLANCE SCIENCE</a:t>
             </a:r>
           </a:p>
         </p:txBody>
@@ -4315,8 +3991,8 @@
         </p:nvSpPr>
         <p:spPr>
           <a:xfrm>
-            <a:off x="457200" y="384048"/>
-            <a:ext cx="11247120" cy="475488"/>
+            <a:off x="411480" y="384048"/>
+            <a:ext cx="10972800" cy="457200"/>
           </a:xfrm>
           <a:prstGeom prst="rect">
             <a:avLst/>
@@ -4324,31 +4000,27 @@
           <a:noFill/>
         </p:spPr>
         <p:txBody>
-          <a:bodyPr wrap="square" anchor="t">
+          <a:bodyPr wrap="square">
             <a:spAutoFit/>
           </a:bodyPr>
           <a:lstStyle/>
           <a:p>
-            <a:pPr algn="l">
-              <a:spcAft>
-                <a:spcPts val="0"/>
-              </a:spcAft>
-            </a:pPr>
-            <a:r>
-              <a:rPr sz="2200" b="1" i="0">
+            <a:pPr algn="l"/>
+            <a:r>
+              <a:rPr sz="2400" b="1" i="0">
                 <a:solidFill>
                   <a:srgbClr val="0A1F2E"/>
                 </a:solidFill>
                 <a:latin typeface="Calibri"/>
               </a:rPr>
-              <a:t>Health systems react too late</a:t>
+              <a:t>Platforms need trained epidemiologists — not only code</a:t>
             </a:r>
           </a:p>
         </p:txBody>
       </p:sp>
       <p:pic>
         <p:nvPicPr>
-          <p:cNvPr id="6" name="Picture 5" descr="reactive_clinic_opt.jpg"/>
+          <p:cNvPr id="6" name="Picture 5" descr="gis_hotspots_opt.jpg"/>
           <p:cNvPicPr>
             <a:picLocks noChangeAspect="1"/>
           </p:cNvPicPr>
@@ -4362,8 +4034,8 @@
         </p:blipFill>
         <p:spPr>
           <a:xfrm>
-            <a:off x="411480" y="2004691"/>
-            <a:ext cx="5303520" cy="3534417"/>
+            <a:off x="411480" y="1783733"/>
+            <a:ext cx="5486400" cy="3656293"/>
           </a:xfrm>
           <a:prstGeom prst="rect">
             <a:avLst/>
@@ -4378,8 +4050,8 @@
         </p:nvSpPr>
         <p:spPr>
           <a:xfrm>
-            <a:off x="6035040" y="1234440"/>
-            <a:ext cx="5669280" cy="5074920"/>
+            <a:off x="6217920" y="1097280"/>
+            <a:ext cx="5669280" cy="5029200"/>
           </a:xfrm>
           <a:prstGeom prst="rect">
             <a:avLst/>
@@ -4392,83 +4064,16 @@
           </a:bodyPr>
           <a:lstStyle/>
           <a:p>
-            <a:pPr>
-              <a:spcAft>
-                <a:spcPts val="800"/>
-              </a:spcAft>
-            </a:pPr>
-            <a:r>
-              <a:rPr sz="1400">
-                <a:solidFill>
-                  <a:srgbClr val="1E2F38"/>
+            <a:pPr algn="l"/>
+            <a:r>
+              <a:rPr sz="1600" b="0" i="0">
+                <a:solidFill>
+                  <a:srgbClr val="3A4A54"/>
                 </a:solidFill>
                 <a:latin typeface="Calibri"/>
               </a:rPr>
-              <a:t>•  Care often starts only after people fall sick</a:t>
-            </a:r>
-          </a:p>
-          <a:p>
-            <a:pPr>
-              <a:spcAft>
-                <a:spcPts val="800"/>
-              </a:spcAft>
-            </a:pPr>
-            <a:r>
-              <a:rPr sz="1400">
-                <a:solidFill>
-                  <a:srgbClr val="1E2F38"/>
-                </a:solidFill>
-                <a:latin typeface="Calibri"/>
-              </a:rPr>
-              <a:t>•  Community health data sits in paper registers and silos</a:t>
-            </a:r>
-          </a:p>
-          <a:p>
-            <a:pPr>
-              <a:spcAft>
-                <a:spcPts val="800"/>
-              </a:spcAft>
-            </a:pPr>
-            <a:r>
-              <a:rPr sz="1400">
-                <a:solidFill>
-                  <a:srgbClr val="1E2F38"/>
-                </a:solidFill>
-                <a:latin typeface="Calibri"/>
-              </a:rPr>
-              <a:t>•  High-risk pregnancies and NCDs are found too late</a:t>
-            </a:r>
-          </a:p>
-          <a:p>
-            <a:pPr>
-              <a:spcAft>
-                <a:spcPts val="800"/>
-              </a:spcAft>
-            </a:pPr>
-            <a:r>
-              <a:rPr sz="1400">
-                <a:solidFill>
-                  <a:srgbClr val="1E2F38"/>
-                </a:solidFill>
-                <a:latin typeface="Calibri"/>
-              </a:rPr>
-              <a:t>•  Medicine stock-outs hit hard during disease surges</a:t>
-            </a:r>
-          </a:p>
-          <a:p>
-            <a:pPr>
-              <a:spcAft>
-                <a:spcPts val="800"/>
-              </a:spcAft>
-            </a:pPr>
-            <a:r>
-              <a:rPr sz="1400">
-                <a:solidFill>
-                  <a:srgbClr val="1E2F38"/>
-                </a:solidFill>
-                <a:latin typeface="Calibri"/>
-              </a:rPr>
-              <a:t>•  Health shocks push poor families deeper into hardship</a:t>
+              <a:t>Community signals from CHWs only become action with investigation discipline, trend analysis, and informatics pipelines.
+FairBanks lives inside primary care — the right place to grow Africa's epidemic readiness.</a:t>
             </a:r>
           </a:p>
         </p:txBody>
@@ -4481,8 +4086,8 @@
         </p:nvSpPr>
         <p:spPr>
           <a:xfrm>
-            <a:off x="0" y="6565392"/>
-            <a:ext cx="12191695" cy="292608"/>
+            <a:off x="0" y="6583680"/>
+            <a:ext cx="12191695" cy="274320"/>
           </a:xfrm>
           <a:prstGeom prst="rect">
             <a:avLst/>
@@ -4493,7 +4098,6 @@
           <a:ln>
             <a:noFill/>
           </a:ln>
-          <a:effectLst/>
         </p:spPr>
         <p:style>
           <a:lnRef idx="1">
@@ -4525,8 +4129,8 @@
         </p:nvSpPr>
         <p:spPr>
           <a:xfrm>
-            <a:off x="365760" y="6574536"/>
-            <a:ext cx="9144000" cy="274320"/>
+            <a:off x="365760" y="6592824"/>
+            <a:ext cx="9144000" cy="256032"/>
           </a:xfrm>
           <a:prstGeom prst="rect">
             <a:avLst/>
@@ -4534,16 +4138,12 @@
           <a:noFill/>
         </p:spPr>
         <p:txBody>
-          <a:bodyPr wrap="square" anchor="ctr">
+          <a:bodyPr wrap="square">
             <a:spAutoFit/>
           </a:bodyPr>
           <a:lstStyle/>
           <a:p>
-            <a:pPr algn="l">
-              <a:spcAft>
-                <a:spcPts val="0"/>
-              </a:spcAft>
-            </a:pPr>
+            <a:pPr algn="l"/>
             <a:r>
               <a:rPr sz="900" b="0" i="0">
                 <a:solidFill>
@@ -4551,7 +4151,7 @@
                 </a:solidFill>
                 <a:latin typeface="Calibri"/>
               </a:rPr>
-              <a:t>FairBanks FCHIP  |  Africa CDC African Epidemic Services (AE  |  Your health, our mission.</a:t>
+              <a:t>FairBanks FCHIP | Africa CDC AES Fellowship | Your health, our mission.</a:t>
             </a:r>
           </a:p>
         </p:txBody>
@@ -4564,8 +4164,8 @@
         </p:nvSpPr>
         <p:spPr>
           <a:xfrm>
-            <a:off x="11094415" y="6574536"/>
-            <a:ext cx="731520" cy="274320"/>
+            <a:off x="11460175" y="6592824"/>
+            <a:ext cx="457200" cy="256032"/>
           </a:xfrm>
           <a:prstGeom prst="rect">
             <a:avLst/>
@@ -4573,16 +4173,12 @@
           <a:noFill/>
         </p:spPr>
         <p:txBody>
-          <a:bodyPr wrap="square" anchor="ctr">
+          <a:bodyPr wrap="square">
             <a:spAutoFit/>
           </a:bodyPr>
           <a:lstStyle/>
           <a:p>
-            <a:pPr algn="r">
-              <a:spcAft>
-                <a:spcPts val="0"/>
-              </a:spcAft>
-            </a:pPr>
+            <a:pPr algn="r"/>
             <a:r>
               <a:rPr sz="900" b="0" i="0">
                 <a:solidFill>
@@ -4622,7 +4218,7 @@
         <p:spPr>
           <a:xfrm>
             <a:off x="0" y="0"/>
-            <a:ext cx="12191695" cy="960120"/>
+            <a:ext cx="12191695" cy="914400"/>
           </a:xfrm>
           <a:prstGeom prst="rect">
             <a:avLst/>
@@ -4633,7 +4229,6 @@
           <a:ln>
             <a:noFill/>
           </a:ln>
-          <a:effectLst/>
         </p:spPr>
         <p:style>
           <a:lnRef idx="1">
@@ -4666,7 +4261,7 @@
         <p:spPr>
           <a:xfrm>
             <a:off x="0" y="0"/>
-            <a:ext cx="164592" cy="960120"/>
+            <a:ext cx="137160" cy="914400"/>
           </a:xfrm>
           <a:prstGeom prst="rect">
             <a:avLst/>
@@ -4677,7 +4272,6 @@
           <a:ln>
             <a:noFill/>
           </a:ln>
-          <a:effectLst/>
         </p:spPr>
         <p:style>
           <a:lnRef idx="1">
@@ -4709,8 +4303,8 @@
         </p:nvSpPr>
         <p:spPr>
           <a:xfrm>
-            <a:off x="457200" y="109728"/>
-            <a:ext cx="10972800" cy="256032"/>
+            <a:off x="411480" y="91440"/>
+            <a:ext cx="10972800" cy="274320"/>
           </a:xfrm>
           <a:prstGeom prst="rect">
             <a:avLst/>
@@ -4718,16 +4312,12 @@
           <a:noFill/>
         </p:spPr>
         <p:txBody>
-          <a:bodyPr wrap="square" anchor="t">
+          <a:bodyPr wrap="square">
             <a:spAutoFit/>
           </a:bodyPr>
           <a:lstStyle/>
           <a:p>
-            <a:pPr algn="l">
-              <a:spcAft>
-                <a:spcPts val="0"/>
-              </a:spcAft>
-            </a:pPr>
+            <a:pPr algn="l"/>
             <a:r>
               <a:rPr sz="1100" b="1" i="0">
                 <a:solidFill>
@@ -4735,7 +4325,7 @@
                 </a:solidFill>
                 <a:latin typeface="Calibri"/>
               </a:rPr>
-              <a:t>THE SOLUTION</a:t>
+              <a:t>RETURN PATHWAY</a:t>
             </a:r>
           </a:p>
         </p:txBody>
@@ -4748,8 +4338,8 @@
         </p:nvSpPr>
         <p:spPr>
           <a:xfrm>
-            <a:off x="457200" y="384048"/>
-            <a:ext cx="11247120" cy="475488"/>
+            <a:off x="411480" y="384048"/>
+            <a:ext cx="10972800" cy="457200"/>
           </a:xfrm>
           <a:prstGeom prst="rect">
             <a:avLst/>
@@ -4757,24 +4347,20 @@
           <a:noFill/>
         </p:spPr>
         <p:txBody>
-          <a:bodyPr wrap="square" anchor="t">
+          <a:bodyPr wrap="square">
             <a:spAutoFit/>
           </a:bodyPr>
           <a:lstStyle/>
           <a:p>
-            <a:pPr algn="l">
-              <a:spcAft>
-                <a:spcPts val="0"/>
-              </a:spcAft>
-            </a:pPr>
-            <a:r>
-              <a:rPr sz="2200" b="1" i="0">
+            <a:pPr algn="l"/>
+            <a:r>
+              <a:rPr sz="2400" b="1" i="0">
                 <a:solidFill>
                   <a:srgbClr val="0A1F2E"/>
                 </a:solidFill>
                 <a:latin typeface="Calibri"/>
               </a:rPr>
-              <a:t>FCHIP — community health intelligence</a:t>
+              <a:t>Training → field → FCHIP → communities</a:t>
             </a:r>
           </a:p>
         </p:txBody>
@@ -4795,7 +4381,7 @@
         </p:blipFill>
         <p:spPr>
           <a:xfrm>
-            <a:off x="365760" y="1639062"/>
+            <a:off x="365760" y="1479042"/>
             <a:ext cx="6400800" cy="4265676"/>
           </a:xfrm>
           <a:prstGeom prst="rect">
@@ -4811,8 +4397,8 @@
         </p:nvSpPr>
         <p:spPr>
           <a:xfrm>
-            <a:off x="7040880" y="1234440"/>
-            <a:ext cx="4754880" cy="5074920"/>
+            <a:off x="7040880" y="1097280"/>
+            <a:ext cx="4754880" cy="5029200"/>
           </a:xfrm>
           <a:prstGeom prst="rect">
             <a:avLst/>
@@ -4825,67 +4411,18 @@
           </a:bodyPr>
           <a:lstStyle/>
           <a:p>
-            <a:pPr>
-              <a:spcAft>
-                <a:spcPts val="800"/>
-              </a:spcAft>
-            </a:pPr>
-            <a:r>
-              <a:rPr sz="1400">
-                <a:solidFill>
-                  <a:srgbClr val="1E2F38"/>
+            <a:pPr algn="l"/>
+            <a:r>
+              <a:rPr sz="1500" b="0" i="0">
+                <a:solidFill>
+                  <a:srgbClr val="3A4A54"/>
                 </a:solidFill>
                 <a:latin typeface="Calibri"/>
               </a:rPr>
-              <a:t>•  CHWs and VHTs capture structured data at household level</a:t>
-            </a:r>
-          </a:p>
-          <a:p>
-            <a:pPr>
-              <a:spcAft>
-                <a:spcPts val="800"/>
-              </a:spcAft>
-            </a:pPr>
-            <a:r>
-              <a:rPr sz="1400">
-                <a:solidFill>
-                  <a:srgbClr val="1E2F38"/>
-                </a:solidFill>
-                <a:latin typeface="Calibri"/>
-              </a:rPr>
-              <a:t>•  FCHIP applies AI, ML, and GIS to predict risk early</a:t>
-            </a:r>
-          </a:p>
-          <a:p>
-            <a:pPr>
-              <a:spcAft>
-                <a:spcPts val="800"/>
-              </a:spcAft>
-            </a:pPr>
-            <a:r>
-              <a:rPr sz="1400">
-                <a:solidFill>
-                  <a:srgbClr val="1E2F38"/>
-                </a:solidFill>
-                <a:latin typeface="Calibri"/>
-              </a:rPr>
-              <a:t>•  Alerts reach clinics, districts, and partners in time to act</a:t>
-            </a:r>
-          </a:p>
-          <a:p>
-            <a:pPr>
-              <a:spcAft>
-                <a:spcPts val="800"/>
-              </a:spcAft>
-            </a:pPr>
-            <a:r>
-              <a:rPr sz="1400">
-                <a:solidFill>
-                  <a:srgbClr val="1E2F38"/>
-                </a:solidFill>
-                <a:latin typeface="Calibri"/>
-              </a:rPr>
-              <a:t>•  Built on a live medical centre and community programmes</a:t>
+              <a:t>Standardise outbreak workflows
+Improve CHW data quality
+Cascade training to supervisors
+Validate FCHIP alerts with surveillance methods</a:t>
             </a:r>
           </a:p>
         </p:txBody>
@@ -4898,8 +4435,8 @@
         </p:nvSpPr>
         <p:spPr>
           <a:xfrm>
-            <a:off x="0" y="6565392"/>
-            <a:ext cx="12191695" cy="292608"/>
+            <a:off x="0" y="6583680"/>
+            <a:ext cx="12191695" cy="274320"/>
           </a:xfrm>
           <a:prstGeom prst="rect">
             <a:avLst/>
@@ -4910,7 +4447,6 @@
           <a:ln>
             <a:noFill/>
           </a:ln>
-          <a:effectLst/>
         </p:spPr>
         <p:style>
           <a:lnRef idx="1">
@@ -4942,8 +4478,8 @@
         </p:nvSpPr>
         <p:spPr>
           <a:xfrm>
-            <a:off x="365760" y="6574536"/>
-            <a:ext cx="9144000" cy="274320"/>
+            <a:off x="365760" y="6592824"/>
+            <a:ext cx="9144000" cy="256032"/>
           </a:xfrm>
           <a:prstGeom prst="rect">
             <a:avLst/>
@@ -4951,16 +4487,12 @@
           <a:noFill/>
         </p:spPr>
         <p:txBody>
-          <a:bodyPr wrap="square" anchor="ctr">
+          <a:bodyPr wrap="square">
             <a:spAutoFit/>
           </a:bodyPr>
           <a:lstStyle/>
           <a:p>
-            <a:pPr algn="l">
-              <a:spcAft>
-                <a:spcPts val="0"/>
-              </a:spcAft>
-            </a:pPr>
+            <a:pPr algn="l"/>
             <a:r>
               <a:rPr sz="900" b="0" i="0">
                 <a:solidFill>
@@ -4968,7 +4500,7 @@
                 </a:solidFill>
                 <a:latin typeface="Calibri"/>
               </a:rPr>
-              <a:t>FairBanks FCHIP  |  Africa CDC African Epidemic Services (AE  |  Your health, our mission.</a:t>
+              <a:t>FairBanks FCHIP | Africa CDC AES Fellowship | Your health, our mission.</a:t>
             </a:r>
           </a:p>
         </p:txBody>
@@ -4981,8 +4513,8 @@
         </p:nvSpPr>
         <p:spPr>
           <a:xfrm>
-            <a:off x="11094415" y="6574536"/>
-            <a:ext cx="731520" cy="274320"/>
+            <a:off x="11460175" y="6592824"/>
+            <a:ext cx="457200" cy="256032"/>
           </a:xfrm>
           <a:prstGeom prst="rect">
             <a:avLst/>
@@ -4990,16 +4522,12 @@
           <a:noFill/>
         </p:spPr>
         <p:txBody>
-          <a:bodyPr wrap="square" anchor="ctr">
+          <a:bodyPr wrap="square">
             <a:spAutoFit/>
           </a:bodyPr>
           <a:lstStyle/>
           <a:p>
-            <a:pPr algn="r">
-              <a:spcAft>
-                <a:spcPts val="0"/>
-              </a:spcAft>
-            </a:pPr>
+            <a:pPr algn="r"/>
             <a:r>
               <a:rPr sz="900" b="0" i="0">
                 <a:solidFill>
@@ -5039,7 +4567,7 @@
         <p:spPr>
           <a:xfrm>
             <a:off x="0" y="0"/>
-            <a:ext cx="12191695" cy="960120"/>
+            <a:ext cx="12191695" cy="914400"/>
           </a:xfrm>
           <a:prstGeom prst="rect">
             <a:avLst/>
@@ -5050,7 +4578,6 @@
           <a:ln>
             <a:noFill/>
           </a:ln>
-          <a:effectLst/>
         </p:spPr>
         <p:style>
           <a:lnRef idx="1">
@@ -5083,7 +4610,7 @@
         <p:spPr>
           <a:xfrm>
             <a:off x="0" y="0"/>
-            <a:ext cx="164592" cy="960120"/>
+            <a:ext cx="137160" cy="914400"/>
           </a:xfrm>
           <a:prstGeom prst="rect">
             <a:avLst/>
@@ -5094,7 +4621,6 @@
           <a:ln>
             <a:noFill/>
           </a:ln>
-          <a:effectLst/>
         </p:spPr>
         <p:style>
           <a:lnRef idx="1">
@@ -5126,8 +4652,8 @@
         </p:nvSpPr>
         <p:spPr>
           <a:xfrm>
-            <a:off x="457200" y="109728"/>
-            <a:ext cx="10972800" cy="256032"/>
+            <a:off x="411480" y="91440"/>
+            <a:ext cx="10972800" cy="274320"/>
           </a:xfrm>
           <a:prstGeom prst="rect">
             <a:avLst/>
@@ -5135,16 +4661,12 @@
           <a:noFill/>
         </p:spPr>
         <p:txBody>
-          <a:bodyPr wrap="square" anchor="t">
+          <a:bodyPr wrap="square">
             <a:spAutoFit/>
           </a:bodyPr>
           <a:lstStyle/>
           <a:p>
-            <a:pPr algn="l">
-              <a:spcAft>
-                <a:spcPts val="0"/>
-              </a:spcAft>
-            </a:pPr>
+            <a:pPr algn="l"/>
             <a:r>
               <a:rPr sz="1100" b="1" i="0">
                 <a:solidFill>
@@ -5152,7 +4674,7 @@
                 </a:solidFill>
                 <a:latin typeface="Calibri"/>
               </a:rPr>
-              <a:t>PROGRAMME FIT</a:t>
+              <a:t>SHARED VALUE</a:t>
             </a:r>
           </a:p>
         </p:txBody>
@@ -5165,8 +4687,8 @@
         </p:nvSpPr>
         <p:spPr>
           <a:xfrm>
-            <a:off x="457200" y="384048"/>
-            <a:ext cx="11247120" cy="475488"/>
+            <a:off x="411480" y="384048"/>
+            <a:ext cx="10972800" cy="457200"/>
           </a:xfrm>
           <a:prstGeom prst="rect">
             <a:avLst/>
@@ -5174,24 +4696,20 @@
           <a:noFill/>
         </p:spPr>
         <p:txBody>
-          <a:bodyPr wrap="square" anchor="t">
+          <a:bodyPr wrap="square">
             <a:spAutoFit/>
           </a:bodyPr>
           <a:lstStyle/>
           <a:p>
-            <a:pPr algn="l">
-              <a:spcAft>
-                <a:spcPts val="0"/>
-              </a:spcAft>
-            </a:pPr>
-            <a:r>
-              <a:rPr sz="2200" b="1" i="0">
+            <a:pPr algn="l"/>
+            <a:r>
+              <a:rPr sz="2400" b="1" i="0">
                 <a:solidFill>
                   <a:srgbClr val="0A1F2E"/>
                 </a:solidFill>
                 <a:latin typeface="Calibri"/>
               </a:rPr>
-              <a:t>Why this call matches FCHIP</a:t>
+              <a:t>Africa CDC ↔ FairBanks ↔ communities</a:t>
             </a:r>
           </a:p>
         </p:txBody>
@@ -5204,8 +4722,8 @@
         </p:nvSpPr>
         <p:spPr>
           <a:xfrm>
-            <a:off x="411480" y="1188720"/>
-            <a:ext cx="11338560" cy="1223010"/>
+            <a:off x="457200" y="1188720"/>
+            <a:ext cx="5394960" cy="4754880"/>
           </a:xfrm>
           <a:prstGeom prst="rect">
             <a:avLst/>
@@ -5213,12 +4731,11 @@
           <a:solidFill>
             <a:srgbClr val="FFFFFF"/>
           </a:solidFill>
-          <a:ln w="9525">
+          <a:ln>
             <a:solidFill>
               <a:srgbClr val="D0DCDC"/>
             </a:solidFill>
           </a:ln>
-          <a:effectLst/>
         </p:spPr>
         <p:style>
           <a:lnRef idx="1">
@@ -5250,8 +4767,8 @@
         </p:nvSpPr>
         <p:spPr>
           <a:xfrm>
-            <a:off x="594360" y="1252728"/>
-            <a:ext cx="2926080" cy="1085850"/>
+            <a:off x="640080" y="1371600"/>
+            <a:ext cx="5029200" cy="365760"/>
           </a:xfrm>
           <a:prstGeom prst="rect">
             <a:avLst/>
@@ -5259,24 +4776,20 @@
           <a:noFill/>
         </p:spPr>
         <p:txBody>
-          <a:bodyPr wrap="square" anchor="ctr">
+          <a:bodyPr wrap="square">
             <a:spAutoFit/>
           </a:bodyPr>
           <a:lstStyle/>
           <a:p>
-            <a:pPr algn="l">
-              <a:spcAft>
-                <a:spcPts val="0"/>
-              </a:spcAft>
-            </a:pPr>
-            <a:r>
-              <a:rPr sz="1300" b="1" i="0">
+            <a:pPr algn="l"/>
+            <a:r>
+              <a:rPr sz="1600" b="1" i="0">
                 <a:solidFill>
                   <a:srgbClr val="0D6E6E"/>
                 </a:solidFill>
                 <a:latin typeface="Calibri"/>
               </a:rPr>
-              <a:t>AU citizen under 35</a:t>
+              <a:t>FairBanks gains</a:t>
             </a:r>
           </a:p>
         </p:txBody>
@@ -5289,8 +4802,8 @@
         </p:nvSpPr>
         <p:spPr>
           <a:xfrm>
-            <a:off x="3657600" y="1252728"/>
-            <a:ext cx="7772400" cy="1085850"/>
+            <a:off x="640080" y="1828800"/>
+            <a:ext cx="5029200" cy="3657600"/>
           </a:xfrm>
           <a:prstGeom prst="rect">
             <a:avLst/>
@@ -5298,24 +4811,20 @@
           <a:noFill/>
         </p:spPr>
         <p:txBody>
-          <a:bodyPr wrap="square" anchor="ctr">
+          <a:bodyPr wrap="square">
             <a:spAutoFit/>
           </a:bodyPr>
           <a:lstStyle/>
           <a:p>
-            <a:pPr algn="l">
-              <a:spcAft>
-                <a:spcPts val="0"/>
-              </a:spcAft>
-            </a:pPr>
-            <a:r>
-              <a:rPr sz="1200" b="0" i="0">
+            <a:pPr algn="l"/>
+            <a:r>
+              <a:rPr sz="1400" b="0" i="0">
                 <a:solidFill>
                   <a:srgbClr val="3A4A54"/>
                 </a:solidFill>
                 <a:latin typeface="Calibri"/>
               </a:rPr>
-              <a:t>Ugandan staff candidate in range</a:t>
+              <a:t>World-class epidemiology training; stronger surveillance modules; stipend, travel, insurance, hardware, and software covered; continental AES network access.</a:t>
             </a:r>
           </a:p>
         </p:txBody>
@@ -5328,8 +4837,8 @@
         </p:nvSpPr>
         <p:spPr>
           <a:xfrm>
-            <a:off x="411480" y="2503170"/>
-            <a:ext cx="11338560" cy="1223010"/>
+            <a:off x="6217920" y="1188720"/>
+            <a:ext cx="5394960" cy="4754880"/>
           </a:xfrm>
           <a:prstGeom prst="rect">
             <a:avLst/>
@@ -5337,12 +4846,11 @@
           <a:solidFill>
             <a:srgbClr val="FFFFFF"/>
           </a:solidFill>
-          <a:ln w="9525">
+          <a:ln>
             <a:solidFill>
               <a:srgbClr val="D0DCDC"/>
             </a:solidFill>
           </a:ln>
-          <a:effectLst/>
         </p:spPr>
         <p:style>
           <a:lnRef idx="1">
@@ -5374,8 +4882,8 @@
         </p:nvSpPr>
         <p:spPr>
           <a:xfrm>
-            <a:off x="594360" y="2567178"/>
-            <a:ext cx="2926080" cy="1085850"/>
+            <a:off x="6400800" y="1371600"/>
+            <a:ext cx="5029200" cy="365760"/>
           </a:xfrm>
           <a:prstGeom prst="rect">
             <a:avLst/>
@@ -5383,24 +4891,20 @@
           <a:noFill/>
         </p:spPr>
         <p:txBody>
-          <a:bodyPr wrap="square" anchor="ctr">
+          <a:bodyPr wrap="square">
             <a:spAutoFit/>
           </a:bodyPr>
           <a:lstStyle/>
           <a:p>
-            <a:pPr algn="l">
-              <a:spcAft>
-                <a:spcPts val="0"/>
-              </a:spcAft>
-            </a:pPr>
-            <a:r>
-              <a:rPr sz="1300" b="1" i="0">
+            <a:pPr algn="l"/>
+            <a:r>
+              <a:rPr sz="1600" b="1" i="0">
                 <a:solidFill>
                   <a:srgbClr val="0D6E6E"/>
                 </a:solidFill>
                 <a:latin typeface="Calibri"/>
               </a:rPr>
-              <a:t>Employed in public health</a:t>
+              <a:t>Africa CDC gains</a:t>
             </a:r>
           </a:p>
         </p:txBody>
@@ -5413,8 +4917,8 @@
         </p:nvSpPr>
         <p:spPr>
           <a:xfrm>
-            <a:off x="3657600" y="2567178"/>
-            <a:ext cx="7772400" cy="1085850"/>
+            <a:off x="6400800" y="1828800"/>
+            <a:ext cx="5029200" cy="3657600"/>
           </a:xfrm>
           <a:prstGeom prst="rect">
             <a:avLst/>
@@ -5422,24 +4926,20 @@
           <a:noFill/>
         </p:spPr>
         <p:txBody>
-          <a:bodyPr wrap="square" anchor="ctr">
+          <a:bodyPr wrap="square">
             <a:spAutoFit/>
           </a:bodyPr>
           <a:lstStyle/>
           <a:p>
-            <a:pPr algn="l">
-              <a:spcAft>
-                <a:spcPts val="0"/>
-              </a:spcAft>
-            </a:pPr>
-            <a:r>
-              <a:rPr sz="1200" b="0" i="0">
+            <a:pPr algn="l"/>
+            <a:r>
+              <a:rPr sz="1400" b="0" i="0">
                 <a:solidFill>
                   <a:srgbClr val="3A4A54"/>
                 </a:solidFill>
                 <a:latin typeface="Calibri"/>
               </a:rPr>
-              <a:t>FairBanks clinical / community health employment</a:t>
+              <a:t>Fellow employed in live community health work; field placement linked to real CHW and facility data; Uganda contribution to Africa's epidemic readiness; informatics track aligned with digital community health tools.</a:t>
             </a:r>
           </a:p>
         </p:txBody>
@@ -5452,256 +4952,8 @@
         </p:nvSpPr>
         <p:spPr>
           <a:xfrm>
-            <a:off x="411480" y="3817620"/>
-            <a:ext cx="11338560" cy="1223010"/>
-          </a:xfrm>
-          <a:prstGeom prst="rect">
-            <a:avLst/>
-          </a:prstGeom>
-          <a:solidFill>
-            <a:srgbClr val="FFFFFF"/>
-          </a:solidFill>
-          <a:ln w="9525">
-            <a:solidFill>
-              <a:srgbClr val="D0DCDC"/>
-            </a:solidFill>
-          </a:ln>
-          <a:effectLst/>
-        </p:spPr>
-        <p:style>
-          <a:lnRef idx="1">
-            <a:schemeClr val="accent1"/>
-          </a:lnRef>
-          <a:fillRef idx="3">
-            <a:schemeClr val="accent1"/>
-          </a:fillRef>
-          <a:effectRef idx="2">
-            <a:schemeClr val="accent1"/>
-          </a:effectRef>
-          <a:fontRef idx="minor">
-            <a:schemeClr val="lt1"/>
-          </a:fontRef>
-        </p:style>
-        <p:txBody>
-          <a:bodyPr rtlCol="0" anchor="ctr"/>
-          <a:lstStyle/>
-          <a:p>
-            <a:pPr algn="ctr"/>
-          </a:p>
-        </p:txBody>
-      </p:sp>
-      <p:sp>
-        <p:nvSpPr>
-          <p:cNvPr id="13" name="TextBox 12"/>
-          <p:cNvSpPr txBox="1"/>
-          <p:nvPr/>
-        </p:nvSpPr>
-        <p:spPr>
-          <a:xfrm>
-            <a:off x="594360" y="3881628"/>
-            <a:ext cx="2926080" cy="1085850"/>
-          </a:xfrm>
-          <a:prstGeom prst="rect">
-            <a:avLst/>
-          </a:prstGeom>
-          <a:noFill/>
-        </p:spPr>
-        <p:txBody>
-          <a:bodyPr wrap="square" anchor="ctr">
-            <a:spAutoFit/>
-          </a:bodyPr>
-          <a:lstStyle/>
-          <a:p>
-            <a:pPr algn="l">
-              <a:spcAft>
-                <a:spcPts val="0"/>
-              </a:spcAft>
-            </a:pPr>
-            <a:r>
-              <a:rPr sz="1300" b="1" i="0">
-                <a:solidFill>
-                  <a:srgbClr val="0D6E6E"/>
-                </a:solidFill>
-                <a:latin typeface="Calibri"/>
-              </a:rPr>
-              <a:t>Degree + 3 years' experience</a:t>
-            </a:r>
-          </a:p>
-        </p:txBody>
-      </p:sp>
-      <p:sp>
-        <p:nvSpPr>
-          <p:cNvPr id="14" name="TextBox 13"/>
-          <p:cNvSpPr txBox="1"/>
-          <p:nvPr/>
-        </p:nvSpPr>
-        <p:spPr>
-          <a:xfrm>
-            <a:off x="3657600" y="3881628"/>
-            <a:ext cx="7772400" cy="1085850"/>
-          </a:xfrm>
-          <a:prstGeom prst="rect">
-            <a:avLst/>
-          </a:prstGeom>
-          <a:noFill/>
-        </p:spPr>
-        <p:txBody>
-          <a:bodyPr wrap="square" anchor="ctr">
-            <a:spAutoFit/>
-          </a:bodyPr>
-          <a:lstStyle/>
-          <a:p>
-            <a:pPr algn="l">
-              <a:spcAft>
-                <a:spcPts val="0"/>
-              </a:spcAft>
-            </a:pPr>
-            <a:r>
-              <a:rPr sz="1200" b="0" i="0">
-                <a:solidFill>
-                  <a:srgbClr val="3A4A54"/>
-                </a:solidFill>
-                <a:latin typeface="Calibri"/>
-              </a:rPr>
-              <a:t>Candidate will meet stated requirements</a:t>
-            </a:r>
-          </a:p>
-        </p:txBody>
-      </p:sp>
-      <p:sp>
-        <p:nvSpPr>
-          <p:cNvPr id="15" name="Rectangle 14"/>
-          <p:cNvSpPr/>
-          <p:nvPr/>
-        </p:nvSpPr>
-        <p:spPr>
-          <a:xfrm>
-            <a:off x="411480" y="5132070"/>
-            <a:ext cx="11338560" cy="1223010"/>
-          </a:xfrm>
-          <a:prstGeom prst="rect">
-            <a:avLst/>
-          </a:prstGeom>
-          <a:solidFill>
-            <a:srgbClr val="FFFFFF"/>
-          </a:solidFill>
-          <a:ln w="9525">
-            <a:solidFill>
-              <a:srgbClr val="D0DCDC"/>
-            </a:solidFill>
-          </a:ln>
-          <a:effectLst/>
-        </p:spPr>
-        <p:style>
-          <a:lnRef idx="1">
-            <a:schemeClr val="accent1"/>
-          </a:lnRef>
-          <a:fillRef idx="3">
-            <a:schemeClr val="accent1"/>
-          </a:fillRef>
-          <a:effectRef idx="2">
-            <a:schemeClr val="accent1"/>
-          </a:effectRef>
-          <a:fontRef idx="minor">
-            <a:schemeClr val="lt1"/>
-          </a:fontRef>
-        </p:style>
-        <p:txBody>
-          <a:bodyPr rtlCol="0" anchor="ctr"/>
-          <a:lstStyle/>
-          <a:p>
-            <a:pPr algn="ctr"/>
-          </a:p>
-        </p:txBody>
-      </p:sp>
-      <p:sp>
-        <p:nvSpPr>
-          <p:cNvPr id="16" name="TextBox 15"/>
-          <p:cNvSpPr txBox="1"/>
-          <p:nvPr/>
-        </p:nvSpPr>
-        <p:spPr>
-          <a:xfrm>
-            <a:off x="594360" y="5196078"/>
-            <a:ext cx="2926080" cy="1085850"/>
-          </a:xfrm>
-          <a:prstGeom prst="rect">
-            <a:avLst/>
-          </a:prstGeom>
-          <a:noFill/>
-        </p:spPr>
-        <p:txBody>
-          <a:bodyPr wrap="square" anchor="ctr">
-            <a:spAutoFit/>
-          </a:bodyPr>
-          <a:lstStyle/>
-          <a:p>
-            <a:pPr algn="l">
-              <a:spcAft>
-                <a:spcPts val="0"/>
-              </a:spcAft>
-            </a:pPr>
-            <a:r>
-              <a:rPr sz="1300" b="1" i="0">
-                <a:solidFill>
-                  <a:srgbClr val="0D6E6E"/>
-                </a:solidFill>
-                <a:latin typeface="Calibri"/>
-              </a:rPr>
-              <a:t>Epidemiology / Informatics tracks</a:t>
-            </a:r>
-          </a:p>
-        </p:txBody>
-      </p:sp>
-      <p:sp>
-        <p:nvSpPr>
-          <p:cNvPr id="17" name="TextBox 16"/>
-          <p:cNvSpPr txBox="1"/>
-          <p:nvPr/>
-        </p:nvSpPr>
-        <p:spPr>
-          <a:xfrm>
-            <a:off x="3657600" y="5196078"/>
-            <a:ext cx="7772400" cy="1085850"/>
-          </a:xfrm>
-          <a:prstGeom prst="rect">
-            <a:avLst/>
-          </a:prstGeom>
-          <a:noFill/>
-        </p:spPr>
-        <p:txBody>
-          <a:bodyPr wrap="square" anchor="ctr">
-            <a:spAutoFit/>
-          </a:bodyPr>
-          <a:lstStyle/>
-          <a:p>
-            <a:pPr algn="l">
-              <a:spcAft>
-                <a:spcPts val="0"/>
-              </a:spcAft>
-            </a:pPr>
-            <a:r>
-              <a:rPr sz="1200" b="0" i="0">
-                <a:solidFill>
-                  <a:srgbClr val="3A4A54"/>
-                </a:solidFill>
-                <a:latin typeface="Calibri"/>
-              </a:rPr>
-              <a:t>Direct fit to FCHIP surveillance goals</a:t>
-            </a:r>
-          </a:p>
-        </p:txBody>
-      </p:sp>
-      <p:sp>
-        <p:nvSpPr>
-          <p:cNvPr id="18" name="Rectangle 17"/>
-          <p:cNvSpPr/>
-          <p:nvPr/>
-        </p:nvSpPr>
-        <p:spPr>
-          <a:xfrm>
-            <a:off x="0" y="6565392"/>
-            <a:ext cx="12191695" cy="292608"/>
+            <a:off x="0" y="6583680"/>
+            <a:ext cx="12191695" cy="274320"/>
           </a:xfrm>
           <a:prstGeom prst="rect">
             <a:avLst/>
@@ -5712,7 +4964,6 @@
           <a:ln>
             <a:noFill/>
           </a:ln>
-          <a:effectLst/>
         </p:spPr>
         <p:style>
           <a:lnRef idx="1">
@@ -5738,14 +4989,14 @@
       </p:sp>
       <p:sp>
         <p:nvSpPr>
-          <p:cNvPr id="19" name="TextBox 18"/>
+          <p:cNvPr id="13" name="TextBox 12"/>
           <p:cNvSpPr txBox="1"/>
           <p:nvPr/>
         </p:nvSpPr>
         <p:spPr>
           <a:xfrm>
-            <a:off x="365760" y="6574536"/>
-            <a:ext cx="9144000" cy="274320"/>
+            <a:off x="365760" y="6592824"/>
+            <a:ext cx="9144000" cy="256032"/>
           </a:xfrm>
           <a:prstGeom prst="rect">
             <a:avLst/>
@@ -5753,16 +5004,12 @@
           <a:noFill/>
         </p:spPr>
         <p:txBody>
-          <a:bodyPr wrap="square" anchor="ctr">
+          <a:bodyPr wrap="square">
             <a:spAutoFit/>
           </a:bodyPr>
           <a:lstStyle/>
           <a:p>
-            <a:pPr algn="l">
-              <a:spcAft>
-                <a:spcPts val="0"/>
-              </a:spcAft>
-            </a:pPr>
+            <a:pPr algn="l"/>
             <a:r>
               <a:rPr sz="900" b="0" i="0">
                 <a:solidFill>
@@ -5770,21 +5017,21 @@
                 </a:solidFill>
                 <a:latin typeface="Calibri"/>
               </a:rPr>
-              <a:t>FairBanks FCHIP  |  Africa CDC African Epidemic Services (AE  |  Your health, our mission.</a:t>
-            </a:r>
-          </a:p>
-        </p:txBody>
-      </p:sp>
-      <p:sp>
-        <p:nvSpPr>
-          <p:cNvPr id="20" name="TextBox 19"/>
+              <a:t>FairBanks FCHIP | Africa CDC AES Fellowship | Your health, our mission.</a:t>
+            </a:r>
+          </a:p>
+        </p:txBody>
+      </p:sp>
+      <p:sp>
+        <p:nvSpPr>
+          <p:cNvPr id="14" name="TextBox 13"/>
           <p:cNvSpPr txBox="1"/>
           <p:nvPr/>
         </p:nvSpPr>
         <p:spPr>
           <a:xfrm>
-            <a:off x="11094415" y="6574536"/>
-            <a:ext cx="731520" cy="274320"/>
+            <a:off x="11460175" y="6592824"/>
+            <a:ext cx="457200" cy="256032"/>
           </a:xfrm>
           <a:prstGeom prst="rect">
             <a:avLst/>
@@ -5792,16 +5039,12 @@
           <a:noFill/>
         </p:spPr>
         <p:txBody>
-          <a:bodyPr wrap="square" anchor="ctr">
+          <a:bodyPr wrap="square">
             <a:spAutoFit/>
           </a:bodyPr>
           <a:lstStyle/>
           <a:p>
-            <a:pPr algn="r">
-              <a:spcAft>
-                <a:spcPts val="0"/>
-              </a:spcAft>
-            </a:pPr>
+            <a:pPr algn="r"/>
             <a:r>
               <a:rPr sz="900" b="0" i="0">
                 <a:solidFill>
@@ -5841,7 +5084,7 @@
         <p:spPr>
           <a:xfrm>
             <a:off x="0" y="0"/>
-            <a:ext cx="12191695" cy="960120"/>
+            <a:ext cx="12191695" cy="914400"/>
           </a:xfrm>
           <a:prstGeom prst="rect">
             <a:avLst/>
@@ -5852,7 +5095,6 @@
           <a:ln>
             <a:noFill/>
           </a:ln>
-          <a:effectLst/>
         </p:spPr>
         <p:style>
           <a:lnRef idx="1">
@@ -5885,7 +5127,7 @@
         <p:spPr>
           <a:xfrm>
             <a:off x="0" y="0"/>
-            <a:ext cx="164592" cy="960120"/>
+            <a:ext cx="137160" cy="914400"/>
           </a:xfrm>
           <a:prstGeom prst="rect">
             <a:avLst/>
@@ -5896,7 +5138,6 @@
           <a:ln>
             <a:noFill/>
           </a:ln>
-          <a:effectLst/>
         </p:spPr>
         <p:style>
           <a:lnRef idx="1">
@@ -5928,110 +5169,8 @@
         </p:nvSpPr>
         <p:spPr>
           <a:xfrm>
-            <a:off x="457200" y="109728"/>
-            <a:ext cx="10972800" cy="256032"/>
-          </a:xfrm>
-          <a:prstGeom prst="rect">
-            <a:avLst/>
-          </a:prstGeom>
-          <a:noFill/>
-        </p:spPr>
-        <p:txBody>
-          <a:bodyPr wrap="square" anchor="t">
-            <a:spAutoFit/>
-          </a:bodyPr>
-          <a:lstStyle/>
-          <a:p>
-            <a:pPr algn="l">
-              <a:spcAft>
-                <a:spcPts val="0"/>
-              </a:spcAft>
-            </a:pPr>
-            <a:r>
-              <a:rPr sz="1100" b="1" i="0">
-                <a:solidFill>
-                  <a:srgbClr val="C45C26"/>
-                </a:solidFill>
-                <a:latin typeface="Calibri"/>
-              </a:rPr>
-              <a:t>WHY FAIRBANKS</a:t>
-            </a:r>
-          </a:p>
-        </p:txBody>
-      </p:sp>
-      <p:sp>
-        <p:nvSpPr>
-          <p:cNvPr id="5" name="TextBox 4"/>
-          <p:cNvSpPr txBox="1"/>
-          <p:nvPr/>
-        </p:nvSpPr>
-        <p:spPr>
-          <a:xfrm>
-            <a:off x="457200" y="384048"/>
-            <a:ext cx="11247120" cy="475488"/>
-          </a:xfrm>
-          <a:prstGeom prst="rect">
-            <a:avLst/>
-          </a:prstGeom>
-          <a:noFill/>
-        </p:spPr>
-        <p:txBody>
-          <a:bodyPr wrap="square" anchor="t">
-            <a:spAutoFit/>
-          </a:bodyPr>
-          <a:lstStyle/>
-          <a:p>
-            <a:pPr algn="l">
-              <a:spcAft>
-                <a:spcPts val="0"/>
-              </a:spcAft>
-            </a:pPr>
-            <a:r>
-              <a:rPr sz="2200" b="1" i="0">
-                <a:solidFill>
-                  <a:srgbClr val="0A1F2E"/>
-                </a:solidFill>
-                <a:latin typeface="Calibri"/>
-              </a:rPr>
-              <a:t>A live community health ecosystem</a:t>
-            </a:r>
-          </a:p>
-        </p:txBody>
-      </p:sp>
-      <p:pic>
-        <p:nvPicPr>
-          <p:cNvPr id="6" name="Picture 5" descr="outreach_facilitator_canopy_01_opt.jpg"/>
-          <p:cNvPicPr>
-            <a:picLocks noChangeAspect="1"/>
-          </p:cNvPicPr>
-          <p:nvPr/>
-        </p:nvPicPr>
-        <p:blipFill>
-          <a:blip r:embed="rId2"/>
-          <a:stretch>
-            <a:fillRect/>
-          </a:stretch>
-        </p:blipFill>
-        <p:spPr>
-          <a:xfrm>
-            <a:off x="411480" y="1943753"/>
-            <a:ext cx="5486400" cy="3656293"/>
-          </a:xfrm>
-          <a:prstGeom prst="rect">
-            <a:avLst/>
-          </a:prstGeom>
-        </p:spPr>
-      </p:pic>
-      <p:sp>
-        <p:nvSpPr>
-          <p:cNvPr id="7" name="TextBox 6"/>
-          <p:cNvSpPr txBox="1"/>
-          <p:nvPr/>
-        </p:nvSpPr>
-        <p:spPr>
-          <a:xfrm>
-            <a:off x="6217920" y="1234440"/>
-            <a:ext cx="5486400" cy="5074920"/>
+            <a:off x="411480" y="91440"/>
+            <a:ext cx="10972800" cy="274320"/>
           </a:xfrm>
           <a:prstGeom prst="rect">
             <a:avLst/>
@@ -6044,113 +5183,433 @@
           </a:bodyPr>
           <a:lstStyle/>
           <a:p>
-            <a:pPr>
-              <a:spcAft>
-                <a:spcPts val="800"/>
-              </a:spcAft>
-            </a:pPr>
-            <a:r>
-              <a:rPr sz="1400">
-                <a:solidFill>
-                  <a:srgbClr val="1E2F38"/>
+            <a:pPr algn="l"/>
+            <a:r>
+              <a:rPr sz="1100" b="1" i="0">
+                <a:solidFill>
+                  <a:srgbClr val="C45C26"/>
                 </a:solidFill>
                 <a:latin typeface="Calibri"/>
               </a:rPr>
-              <a:t>•  Functioning FairBanks Medical Centre with clinic, pharmacy, and diagnostics</a:t>
-            </a:r>
-          </a:p>
-          <a:p>
-            <a:pPr>
-              <a:spcAft>
-                <a:spcPts val="800"/>
-              </a:spcAft>
-            </a:pPr>
-            <a:r>
-              <a:rPr sz="1400">
-                <a:solidFill>
-                  <a:srgbClr val="1E2F38"/>
+              <a:t>APPLICATION AREAS</a:t>
+            </a:r>
+          </a:p>
+        </p:txBody>
+      </p:sp>
+      <p:sp>
+        <p:nvSpPr>
+          <p:cNvPr id="5" name="TextBox 4"/>
+          <p:cNvSpPr txBox="1"/>
+          <p:nvPr/>
+        </p:nvSpPr>
+        <p:spPr>
+          <a:xfrm>
+            <a:off x="411480" y="384048"/>
+            <a:ext cx="10972800" cy="457200"/>
+          </a:xfrm>
+          <a:prstGeom prst="rect">
+            <a:avLst/>
+          </a:prstGeom>
+          <a:noFill/>
+        </p:spPr>
+        <p:txBody>
+          <a:bodyPr wrap="square">
+            <a:spAutoFit/>
+          </a:bodyPr>
+          <a:lstStyle/>
+          <a:p>
+            <a:pPr algn="l"/>
+            <a:r>
+              <a:rPr sz="2400" b="1" i="0">
+                <a:solidFill>
+                  <a:srgbClr val="0A1F2E"/>
                 </a:solidFill>
                 <a:latin typeface="Calibri"/>
               </a:rPr>
-              <a:t>•  Active Community Reach outreach in Bukoto, Kyebando, Kisaasi, Kamwokya, Kikaaya</a:t>
-            </a:r>
-          </a:p>
-          <a:p>
-            <a:pPr>
-              <a:spcAft>
-                <a:spcPts val="800"/>
-              </a:spcAft>
-            </a:pPr>
-            <a:r>
-              <a:rPr sz="1400">
+              <a:t>Where fellowship skills meet FCHIP</a:t>
+            </a:r>
+          </a:p>
+        </p:txBody>
+      </p:sp>
+      <p:sp>
+        <p:nvSpPr>
+          <p:cNvPr id="6" name="Rectangle 5"/>
+          <p:cNvSpPr/>
+          <p:nvPr/>
+        </p:nvSpPr>
+        <p:spPr>
+          <a:xfrm>
+            <a:off x="457200" y="1143000"/>
+            <a:ext cx="11155680" cy="914400"/>
+          </a:xfrm>
+          <a:prstGeom prst="rect">
+            <a:avLst/>
+          </a:prstGeom>
+          <a:solidFill>
+            <a:srgbClr val="FFFFFF"/>
+          </a:solidFill>
+          <a:ln>
+            <a:solidFill>
+              <a:srgbClr val="D0DCDC"/>
+            </a:solidFill>
+          </a:ln>
+        </p:spPr>
+        <p:style>
+          <a:lnRef idx="1">
+            <a:schemeClr val="accent1"/>
+          </a:lnRef>
+          <a:fillRef idx="3">
+            <a:schemeClr val="accent1"/>
+          </a:fillRef>
+          <a:effectRef idx="2">
+            <a:schemeClr val="accent1"/>
+          </a:effectRef>
+          <a:fontRef idx="minor">
+            <a:schemeClr val="lt1"/>
+          </a:fontRef>
+        </p:style>
+        <p:txBody>
+          <a:bodyPr rtlCol="0" anchor="ctr"/>
+          <a:lstStyle/>
+          <a:p>
+            <a:pPr algn="ctr"/>
+          </a:p>
+        </p:txBody>
+      </p:sp>
+      <p:sp>
+        <p:nvSpPr>
+          <p:cNvPr id="7" name="Rectangle 6"/>
+          <p:cNvSpPr/>
+          <p:nvPr/>
+        </p:nvSpPr>
+        <p:spPr>
+          <a:xfrm>
+            <a:off x="457200" y="1143000"/>
+            <a:ext cx="109728" cy="914400"/>
+          </a:xfrm>
+          <a:prstGeom prst="rect">
+            <a:avLst/>
+          </a:prstGeom>
+          <a:solidFill>
+            <a:srgbClr val="0D6E6E"/>
+          </a:solidFill>
+          <a:ln>
+            <a:noFill/>
+          </a:ln>
+        </p:spPr>
+        <p:style>
+          <a:lnRef idx="1">
+            <a:schemeClr val="accent1"/>
+          </a:lnRef>
+          <a:fillRef idx="3">
+            <a:schemeClr val="accent1"/>
+          </a:fillRef>
+          <a:effectRef idx="2">
+            <a:schemeClr val="accent1"/>
+          </a:effectRef>
+          <a:fontRef idx="minor">
+            <a:schemeClr val="lt1"/>
+          </a:fontRef>
+        </p:style>
+        <p:txBody>
+          <a:bodyPr rtlCol="0" anchor="ctr"/>
+          <a:lstStyle/>
+          <a:p>
+            <a:pPr algn="ctr"/>
+          </a:p>
+        </p:txBody>
+      </p:sp>
+      <p:sp>
+        <p:nvSpPr>
+          <p:cNvPr id="8" name="TextBox 7"/>
+          <p:cNvSpPr txBox="1"/>
+          <p:nvPr/>
+        </p:nvSpPr>
+        <p:spPr>
+          <a:xfrm>
+            <a:off x="685800" y="1280160"/>
+            <a:ext cx="10515600" cy="640080"/>
+          </a:xfrm>
+          <a:prstGeom prst="rect">
+            <a:avLst/>
+          </a:prstGeom>
+          <a:noFill/>
+        </p:spPr>
+        <p:txBody>
+          <a:bodyPr wrap="square">
+            <a:spAutoFit/>
+          </a:bodyPr>
+          <a:lstStyle/>
+          <a:p>
+            <a:pPr algn="l"/>
+            <a:r>
+              <a:rPr sz="1400" b="0" i="0">
                 <a:solidFill>
                   <a:srgbClr val="1E2F38"/>
                 </a:solidFill>
                 <a:latin typeface="Calibri"/>
               </a:rPr>
-              <a:t>•  Trusted CHW and VHT relationships for household visits and referrals</a:t>
-            </a:r>
-          </a:p>
-          <a:p>
-            <a:pPr>
-              <a:spcAft>
-                <a:spcPts val="800"/>
-              </a:spcAft>
-            </a:pPr>
-            <a:r>
-              <a:rPr sz="1400">
+              <a:t>Outbreak workflows: community fever reports trigger structured investigation and pharmacy pre-stocking before surges spread.</a:t>
+            </a:r>
+          </a:p>
+        </p:txBody>
+      </p:sp>
+      <p:sp>
+        <p:nvSpPr>
+          <p:cNvPr id="9" name="Rectangle 8"/>
+          <p:cNvSpPr/>
+          <p:nvPr/>
+        </p:nvSpPr>
+        <p:spPr>
+          <a:xfrm>
+            <a:off x="457200" y="2194560"/>
+            <a:ext cx="11155680" cy="914400"/>
+          </a:xfrm>
+          <a:prstGeom prst="rect">
+            <a:avLst/>
+          </a:prstGeom>
+          <a:solidFill>
+            <a:srgbClr val="FFFFFF"/>
+          </a:solidFill>
+          <a:ln>
+            <a:solidFill>
+              <a:srgbClr val="D0DCDC"/>
+            </a:solidFill>
+          </a:ln>
+        </p:spPr>
+        <p:style>
+          <a:lnRef idx="1">
+            <a:schemeClr val="accent1"/>
+          </a:lnRef>
+          <a:fillRef idx="3">
+            <a:schemeClr val="accent1"/>
+          </a:fillRef>
+          <a:effectRef idx="2">
+            <a:schemeClr val="accent1"/>
+          </a:effectRef>
+          <a:fontRef idx="minor">
+            <a:schemeClr val="lt1"/>
+          </a:fontRef>
+        </p:style>
+        <p:txBody>
+          <a:bodyPr rtlCol="0" anchor="ctr"/>
+          <a:lstStyle/>
+          <a:p>
+            <a:pPr algn="ctr"/>
+          </a:p>
+        </p:txBody>
+      </p:sp>
+      <p:sp>
+        <p:nvSpPr>
+          <p:cNvPr id="10" name="Rectangle 9"/>
+          <p:cNvSpPr/>
+          <p:nvPr/>
+        </p:nvSpPr>
+        <p:spPr>
+          <a:xfrm>
+            <a:off x="457200" y="2194560"/>
+            <a:ext cx="109728" cy="914400"/>
+          </a:xfrm>
+          <a:prstGeom prst="rect">
+            <a:avLst/>
+          </a:prstGeom>
+          <a:solidFill>
+            <a:srgbClr val="0D6E6E"/>
+          </a:solidFill>
+          <a:ln>
+            <a:noFill/>
+          </a:ln>
+        </p:spPr>
+        <p:style>
+          <a:lnRef idx="1">
+            <a:schemeClr val="accent1"/>
+          </a:lnRef>
+          <a:fillRef idx="3">
+            <a:schemeClr val="accent1"/>
+          </a:fillRef>
+          <a:effectRef idx="2">
+            <a:schemeClr val="accent1"/>
+          </a:effectRef>
+          <a:fontRef idx="minor">
+            <a:schemeClr val="lt1"/>
+          </a:fontRef>
+        </p:style>
+        <p:txBody>
+          <a:bodyPr rtlCol="0" anchor="ctr"/>
+          <a:lstStyle/>
+          <a:p>
+            <a:pPr algn="ctr"/>
+          </a:p>
+        </p:txBody>
+      </p:sp>
+      <p:sp>
+        <p:nvSpPr>
+          <p:cNvPr id="11" name="TextBox 10"/>
+          <p:cNvSpPr txBox="1"/>
+          <p:nvPr/>
+        </p:nvSpPr>
+        <p:spPr>
+          <a:xfrm>
+            <a:off x="685800" y="2331720"/>
+            <a:ext cx="10515600" cy="640080"/>
+          </a:xfrm>
+          <a:prstGeom prst="rect">
+            <a:avLst/>
+          </a:prstGeom>
+          <a:noFill/>
+        </p:spPr>
+        <p:txBody>
+          <a:bodyPr wrap="square">
+            <a:spAutoFit/>
+          </a:bodyPr>
+          <a:lstStyle/>
+          <a:p>
+            <a:pPr algn="l"/>
+            <a:r>
+              <a:rPr sz="1400" b="0" i="0">
                 <a:solidFill>
                   <a:srgbClr val="1E2F38"/>
                 </a:solidFill>
                 <a:latin typeface="Calibri"/>
               </a:rPr>
-              <a:t>•  Live programmes: maternal &amp; child health, Gericare, chronic-disease screening</a:t>
-            </a:r>
-          </a:p>
-          <a:p>
-            <a:pPr>
-              <a:spcAft>
-                <a:spcPts val="800"/>
-              </a:spcAft>
-            </a:pPr>
-            <a:r>
-              <a:rPr sz="1400">
+              <a:t>Informatics: validation rules and data-quality pipelines for offline CHW capture feeding FCHIP.</a:t>
+            </a:r>
+          </a:p>
+        </p:txBody>
+      </p:sp>
+      <p:sp>
+        <p:nvSpPr>
+          <p:cNvPr id="12" name="Rectangle 11"/>
+          <p:cNvSpPr/>
+          <p:nvPr/>
+        </p:nvSpPr>
+        <p:spPr>
+          <a:xfrm>
+            <a:off x="457200" y="3246120"/>
+            <a:ext cx="11155680" cy="914400"/>
+          </a:xfrm>
+          <a:prstGeom prst="rect">
+            <a:avLst/>
+          </a:prstGeom>
+          <a:solidFill>
+            <a:srgbClr val="FFFFFF"/>
+          </a:solidFill>
+          <a:ln>
+            <a:solidFill>
+              <a:srgbClr val="D0DCDC"/>
+            </a:solidFill>
+          </a:ln>
+        </p:spPr>
+        <p:style>
+          <a:lnRef idx="1">
+            <a:schemeClr val="accent1"/>
+          </a:lnRef>
+          <a:fillRef idx="3">
+            <a:schemeClr val="accent1"/>
+          </a:fillRef>
+          <a:effectRef idx="2">
+            <a:schemeClr val="accent1"/>
+          </a:effectRef>
+          <a:fontRef idx="minor">
+            <a:schemeClr val="lt1"/>
+          </a:fontRef>
+        </p:style>
+        <p:txBody>
+          <a:bodyPr rtlCol="0" anchor="ctr"/>
+          <a:lstStyle/>
+          <a:p>
+            <a:pPr algn="ctr"/>
+          </a:p>
+        </p:txBody>
+      </p:sp>
+      <p:sp>
+        <p:nvSpPr>
+          <p:cNvPr id="13" name="Rectangle 12"/>
+          <p:cNvSpPr/>
+          <p:nvPr/>
+        </p:nvSpPr>
+        <p:spPr>
+          <a:xfrm>
+            <a:off x="457200" y="3246120"/>
+            <a:ext cx="109728" cy="914400"/>
+          </a:xfrm>
+          <a:prstGeom prst="rect">
+            <a:avLst/>
+          </a:prstGeom>
+          <a:solidFill>
+            <a:srgbClr val="0D6E6E"/>
+          </a:solidFill>
+          <a:ln>
+            <a:noFill/>
+          </a:ln>
+        </p:spPr>
+        <p:style>
+          <a:lnRef idx="1">
+            <a:schemeClr val="accent1"/>
+          </a:lnRef>
+          <a:fillRef idx="3">
+            <a:schemeClr val="accent1"/>
+          </a:fillRef>
+          <a:effectRef idx="2">
+            <a:schemeClr val="accent1"/>
+          </a:effectRef>
+          <a:fontRef idx="minor">
+            <a:schemeClr val="lt1"/>
+          </a:fontRef>
+        </p:style>
+        <p:txBody>
+          <a:bodyPr rtlCol="0" anchor="ctr"/>
+          <a:lstStyle/>
+          <a:p>
+            <a:pPr algn="ctr"/>
+          </a:p>
+        </p:txBody>
+      </p:sp>
+      <p:sp>
+        <p:nvSpPr>
+          <p:cNvPr id="14" name="TextBox 13"/>
+          <p:cNvSpPr txBox="1"/>
+          <p:nvPr/>
+        </p:nvSpPr>
+        <p:spPr>
+          <a:xfrm>
+            <a:off x="685800" y="3383280"/>
+            <a:ext cx="10515600" cy="640080"/>
+          </a:xfrm>
+          <a:prstGeom prst="rect">
+            <a:avLst/>
+          </a:prstGeom>
+          <a:noFill/>
+        </p:spPr>
+        <p:txBody>
+          <a:bodyPr wrap="square">
+            <a:spAutoFit/>
+          </a:bodyPr>
+          <a:lstStyle/>
+          <a:p>
+            <a:pPr algn="l"/>
+            <a:r>
+              <a:rPr sz="1400" b="0" i="0">
                 <a:solidFill>
                   <a:srgbClr val="1E2F38"/>
                 </a:solidFill>
                 <a:latin typeface="Calibri"/>
               </a:rPr>
-              <a:t>•  Digital health records and outreach data ready to feed FCHIP</a:t>
-            </a:r>
-          </a:p>
-          <a:p>
-            <a:pPr>
-              <a:spcAft>
-                <a:spcPts val="800"/>
-              </a:spcAft>
-            </a:pPr>
-            <a:r>
-              <a:rPr sz="1400">
-                <a:solidFill>
-                  <a:srgbClr val="1E2F38"/>
-                </a:solidFill>
-                <a:latin typeface="Calibri"/>
-              </a:rPr>
-              <a:t>•  Research and partnership mindset for ethical, evidence-based scale</a:t>
-            </a:r>
-          </a:p>
-        </p:txBody>
-      </p:sp>
-      <p:sp>
-        <p:nvSpPr>
-          <p:cNvPr id="8" name="Rectangle 7"/>
+              <a:t>Training cascade: teach CHW supervisors better data use and early-warning interpretation.</a:t>
+            </a:r>
+          </a:p>
+        </p:txBody>
+      </p:sp>
+      <p:sp>
+        <p:nvSpPr>
+          <p:cNvPr id="15" name="Rectangle 14"/>
           <p:cNvSpPr/>
           <p:nvPr/>
         </p:nvSpPr>
         <p:spPr>
           <a:xfrm>
-            <a:off x="0" y="6565392"/>
-            <a:ext cx="12191695" cy="292608"/>
+            <a:off x="0" y="6583680"/>
+            <a:ext cx="12191695" cy="274320"/>
           </a:xfrm>
           <a:prstGeom prst="rect">
             <a:avLst/>
@@ -6161,7 +5620,6 @@
           <a:ln>
             <a:noFill/>
           </a:ln>
-          <a:effectLst/>
         </p:spPr>
         <p:style>
           <a:lnRef idx="1">
@@ -6187,14 +5645,14 @@
       </p:sp>
       <p:sp>
         <p:nvSpPr>
-          <p:cNvPr id="9" name="TextBox 8"/>
+          <p:cNvPr id="16" name="TextBox 15"/>
           <p:cNvSpPr txBox="1"/>
           <p:nvPr/>
         </p:nvSpPr>
         <p:spPr>
           <a:xfrm>
-            <a:off x="365760" y="6574536"/>
-            <a:ext cx="9144000" cy="274320"/>
+            <a:off x="365760" y="6592824"/>
+            <a:ext cx="9144000" cy="256032"/>
           </a:xfrm>
           <a:prstGeom prst="rect">
             <a:avLst/>
@@ -6202,16 +5660,12 @@
           <a:noFill/>
         </p:spPr>
         <p:txBody>
-          <a:bodyPr wrap="square" anchor="ctr">
+          <a:bodyPr wrap="square">
             <a:spAutoFit/>
           </a:bodyPr>
           <a:lstStyle/>
           <a:p>
-            <a:pPr algn="l">
-              <a:spcAft>
-                <a:spcPts val="0"/>
-              </a:spcAft>
-            </a:pPr>
+            <a:pPr algn="l"/>
             <a:r>
               <a:rPr sz="900" b="0" i="0">
                 <a:solidFill>
@@ -6219,21 +5673,21 @@
                 </a:solidFill>
                 <a:latin typeface="Calibri"/>
               </a:rPr>
-              <a:t>FairBanks FCHIP  |  Africa CDC African Epidemic Services (AE  |  Your health, our mission.</a:t>
-            </a:r>
-          </a:p>
-        </p:txBody>
-      </p:sp>
-      <p:sp>
-        <p:nvSpPr>
-          <p:cNvPr id="10" name="TextBox 9"/>
+              <a:t>FairBanks FCHIP | Africa CDC AES Fellowship | Your health, our mission.</a:t>
+            </a:r>
+          </a:p>
+        </p:txBody>
+      </p:sp>
+      <p:sp>
+        <p:nvSpPr>
+          <p:cNvPr id="17" name="TextBox 16"/>
           <p:cNvSpPr txBox="1"/>
           <p:nvPr/>
         </p:nvSpPr>
         <p:spPr>
           <a:xfrm>
-            <a:off x="11094415" y="6574536"/>
-            <a:ext cx="731520" cy="274320"/>
+            <a:off x="11460175" y="6592824"/>
+            <a:ext cx="457200" cy="256032"/>
           </a:xfrm>
           <a:prstGeom prst="rect">
             <a:avLst/>
@@ -6241,16 +5695,12 @@
           <a:noFill/>
         </p:spPr>
         <p:txBody>
-          <a:bodyPr wrap="square" anchor="ctr">
+          <a:bodyPr wrap="square">
             <a:spAutoFit/>
           </a:bodyPr>
           <a:lstStyle/>
           <a:p>
-            <a:pPr algn="r">
-              <a:spcAft>
-                <a:spcPts val="0"/>
-              </a:spcAft>
-            </a:pPr>
+            <a:pPr algn="r"/>
             <a:r>
               <a:rPr sz="900" b="0" i="0">
                 <a:solidFill>
@@ -6290,7 +5740,7 @@
         <p:spPr>
           <a:xfrm>
             <a:off x="0" y="0"/>
-            <a:ext cx="12191695" cy="960120"/>
+            <a:ext cx="12191695" cy="914400"/>
           </a:xfrm>
           <a:prstGeom prst="rect">
             <a:avLst/>
@@ -6301,7 +5751,6 @@
           <a:ln>
             <a:noFill/>
           </a:ln>
-          <a:effectLst/>
         </p:spPr>
         <p:style>
           <a:lnRef idx="1">
@@ -6334,7 +5783,7 @@
         <p:spPr>
           <a:xfrm>
             <a:off x="0" y="0"/>
-            <a:ext cx="164592" cy="960120"/>
+            <a:ext cx="137160" cy="914400"/>
           </a:xfrm>
           <a:prstGeom prst="rect">
             <a:avLst/>
@@ -6345,7 +5794,6 @@
           <a:ln>
             <a:noFill/>
           </a:ln>
-          <a:effectLst/>
         </p:spPr>
         <p:style>
           <a:lnRef idx="1">
@@ -6377,86 +5825,8 @@
         </p:nvSpPr>
         <p:spPr>
           <a:xfrm>
-            <a:off x="457200" y="109728"/>
-            <a:ext cx="10972800" cy="256032"/>
-          </a:xfrm>
-          <a:prstGeom prst="rect">
-            <a:avLst/>
-          </a:prstGeom>
-          <a:noFill/>
-        </p:spPr>
-        <p:txBody>
-          <a:bodyPr wrap="square" anchor="t">
-            <a:spAutoFit/>
-          </a:bodyPr>
-          <a:lstStyle/>
-          <a:p>
-            <a:pPr algn="l">
-              <a:spcAft>
-                <a:spcPts val="0"/>
-              </a:spcAft>
-            </a:pPr>
-            <a:r>
-              <a:rPr sz="1100" b="1" i="0">
-                <a:solidFill>
-                  <a:srgbClr val="C45C26"/>
-                </a:solidFill>
-                <a:latin typeface="Calibri"/>
-              </a:rPr>
-              <a:t>THE PLAN</a:t>
-            </a:r>
-          </a:p>
-        </p:txBody>
-      </p:sp>
-      <p:sp>
-        <p:nvSpPr>
-          <p:cNvPr id="5" name="TextBox 4"/>
-          <p:cNvSpPr txBox="1"/>
-          <p:nvPr/>
-        </p:nvSpPr>
-        <p:spPr>
-          <a:xfrm>
-            <a:off x="457200" y="384048"/>
-            <a:ext cx="11247120" cy="475488"/>
-          </a:xfrm>
-          <a:prstGeom prst="rect">
-            <a:avLst/>
-          </a:prstGeom>
-          <a:noFill/>
-        </p:spPr>
-        <p:txBody>
-          <a:bodyPr wrap="square" anchor="t">
-            <a:spAutoFit/>
-          </a:bodyPr>
-          <a:lstStyle/>
-          <a:p>
-            <a:pPr algn="l">
-              <a:spcAft>
-                <a:spcPts val="0"/>
-              </a:spcAft>
-            </a:pPr>
-            <a:r>
-              <a:rPr sz="2200" b="1" i="0">
-                <a:solidFill>
-                  <a:srgbClr val="0A1F2E"/>
-                </a:solidFill>
-                <a:latin typeface="Calibri"/>
-              </a:rPr>
-              <a:t>Two-year fellowship pathway</a:t>
-            </a:r>
-          </a:p>
-        </p:txBody>
-      </p:sp>
-      <p:sp>
-        <p:nvSpPr>
-          <p:cNvPr id="6" name="TextBox 5"/>
-          <p:cNvSpPr txBox="1"/>
-          <p:nvPr/>
-        </p:nvSpPr>
-        <p:spPr>
-          <a:xfrm>
-            <a:off x="502920" y="1234440"/>
-            <a:ext cx="5760720" cy="5074920"/>
+            <a:off x="411480" y="91440"/>
+            <a:ext cx="10972800" cy="274320"/>
           </a:xfrm>
           <a:prstGeom prst="rect">
             <a:avLst/>
@@ -6469,89 +5839,524 @@
           </a:bodyPr>
           <a:lstStyle/>
           <a:p>
-            <a:pPr>
-              <a:spcAft>
-                <a:spcPts val="800"/>
-              </a:spcAft>
-            </a:pPr>
-            <a:r>
-              <a:rPr sz="1500">
-                <a:solidFill>
-                  <a:srgbClr val="1E2F38"/>
+            <a:pPr algn="l"/>
+            <a:r>
+              <a:rPr sz="1100" b="1" i="0">
+                <a:solidFill>
+                  <a:srgbClr val="C45C26"/>
                 </a:solidFill>
                 <a:latin typeface="Calibri"/>
               </a:rPr>
-              <a:t>•  Months 1–3: Core training in Addis Ababa</a:t>
-            </a:r>
-          </a:p>
-          <a:p>
-            <a:pPr>
-              <a:spcAft>
-                <a:spcPts val="800"/>
-              </a:spcAft>
-            </a:pPr>
-            <a:r>
-              <a:rPr sz="1500">
-                <a:solidFill>
-                  <a:srgbClr val="1E2F38"/>
+              <a:t>24-MONTH PATHWAY</a:t>
+            </a:r>
+          </a:p>
+        </p:txBody>
+      </p:sp>
+      <p:sp>
+        <p:nvSpPr>
+          <p:cNvPr id="5" name="TextBox 4"/>
+          <p:cNvSpPr txBox="1"/>
+          <p:nvPr/>
+        </p:nvSpPr>
+        <p:spPr>
+          <a:xfrm>
+            <a:off x="411480" y="384048"/>
+            <a:ext cx="10972800" cy="457200"/>
+          </a:xfrm>
+          <a:prstGeom prst="rect">
+            <a:avLst/>
+          </a:prstGeom>
+          <a:noFill/>
+        </p:spPr>
+        <p:txBody>
+          <a:bodyPr wrap="square">
+            <a:spAutoFit/>
+          </a:bodyPr>
+          <a:lstStyle/>
+          <a:p>
+            <a:pPr algn="l"/>
+            <a:r>
+              <a:rPr sz="2400" b="1" i="0">
+                <a:solidFill>
+                  <a:srgbClr val="0A1F2E"/>
                 </a:solidFill>
                 <a:latin typeface="Calibri"/>
               </a:rPr>
-              <a:t>•  Months 4–24: Field placement with FairBanks / partner public health sites</a:t>
-            </a:r>
-          </a:p>
-          <a:p>
-            <a:pPr>
-              <a:spcAft>
-                <a:spcPts val="800"/>
-              </a:spcAft>
-            </a:pPr>
-            <a:r>
-              <a:rPr sz="1500">
-                <a:solidFill>
-                  <a:srgbClr val="1E2F38"/>
+              <a:t>Addis Ababa training → Uganda field placement</a:t>
+            </a:r>
+          </a:p>
+        </p:txBody>
+      </p:sp>
+      <p:sp>
+        <p:nvSpPr>
+          <p:cNvPr id="6" name="Rectangle 5"/>
+          <p:cNvSpPr/>
+          <p:nvPr/>
+        </p:nvSpPr>
+        <p:spPr>
+          <a:xfrm>
+            <a:off x="457200" y="1097280"/>
+            <a:ext cx="11155680" cy="960120"/>
+          </a:xfrm>
+          <a:prstGeom prst="rect">
+            <a:avLst/>
+          </a:prstGeom>
+          <a:solidFill>
+            <a:srgbClr val="FFFFFF"/>
+          </a:solidFill>
+          <a:ln>
+            <a:solidFill>
+              <a:srgbClr val="D0DCDC"/>
+            </a:solidFill>
+          </a:ln>
+        </p:spPr>
+        <p:style>
+          <a:lnRef idx="1">
+            <a:schemeClr val="accent1"/>
+          </a:lnRef>
+          <a:fillRef idx="3">
+            <a:schemeClr val="accent1"/>
+          </a:fillRef>
+          <a:effectRef idx="2">
+            <a:schemeClr val="accent1"/>
+          </a:effectRef>
+          <a:fontRef idx="minor">
+            <a:schemeClr val="lt1"/>
+          </a:fontRef>
+        </p:style>
+        <p:txBody>
+          <a:bodyPr rtlCol="0" anchor="ctr"/>
+          <a:lstStyle/>
+          <a:p>
+            <a:pPr algn="ctr"/>
+          </a:p>
+        </p:txBody>
+      </p:sp>
+      <p:sp>
+        <p:nvSpPr>
+          <p:cNvPr id="7" name="TextBox 6"/>
+          <p:cNvSpPr txBox="1"/>
+          <p:nvPr/>
+        </p:nvSpPr>
+        <p:spPr>
+          <a:xfrm>
+            <a:off x="640080" y="1207008"/>
+            <a:ext cx="2286000" cy="320040"/>
+          </a:xfrm>
+          <a:prstGeom prst="rect">
+            <a:avLst/>
+          </a:prstGeom>
+          <a:noFill/>
+        </p:spPr>
+        <p:txBody>
+          <a:bodyPr wrap="square">
+            <a:spAutoFit/>
+          </a:bodyPr>
+          <a:lstStyle/>
+          <a:p>
+            <a:pPr algn="l"/>
+            <a:r>
+              <a:rPr sz="1400" b="1" i="0">
+                <a:solidFill>
+                  <a:srgbClr val="0D6E6E"/>
                 </a:solidFill>
                 <a:latin typeface="Calibri"/>
               </a:rPr>
-              <a:t>•  Throughout: Apply methods to FCHIP surveillance and quality improvement</a:t>
-            </a:r>
-          </a:p>
-        </p:txBody>
-      </p:sp>
-      <p:pic>
-        <p:nvPicPr>
-          <p:cNvPr id="7" name="Picture 6" descr="indoor_training_staff_presenting_01_opt.jpg"/>
-          <p:cNvPicPr>
-            <a:picLocks noChangeAspect="1"/>
-          </p:cNvPicPr>
-          <p:nvPr/>
-        </p:nvPicPr>
-        <p:blipFill>
-          <a:blip r:embed="rId2"/>
-          <a:stretch>
-            <a:fillRect/>
-          </a:stretch>
-        </p:blipFill>
-        <p:spPr>
-          <a:xfrm>
-            <a:off x="6492240" y="2035160"/>
-            <a:ext cx="5212080" cy="3473479"/>
-          </a:xfrm>
-          <a:prstGeom prst="rect">
-            <a:avLst/>
-          </a:prstGeom>
-        </p:spPr>
-      </p:pic>
-      <p:sp>
-        <p:nvSpPr>
-          <p:cNvPr id="8" name="Rectangle 7"/>
+              <a:t>Months 1–3</a:t>
+            </a:r>
+          </a:p>
+        </p:txBody>
+      </p:sp>
+      <p:sp>
+        <p:nvSpPr>
+          <p:cNvPr id="8" name="TextBox 7"/>
+          <p:cNvSpPr txBox="1"/>
+          <p:nvPr/>
+        </p:nvSpPr>
+        <p:spPr>
+          <a:xfrm>
+            <a:off x="3017520" y="1207008"/>
+            <a:ext cx="8229600" cy="731520"/>
+          </a:xfrm>
+          <a:prstGeom prst="rect">
+            <a:avLst/>
+          </a:prstGeom>
+          <a:noFill/>
+        </p:spPr>
+        <p:txBody>
+          <a:bodyPr wrap="square">
+            <a:spAutoFit/>
+          </a:bodyPr>
+          <a:lstStyle/>
+          <a:p>
+            <a:pPr algn="l"/>
+            <a:r>
+              <a:rPr sz="1300" b="0" i="0">
+                <a:solidFill>
+                  <a:srgbClr val="3A4A54"/>
+                </a:solidFill>
+                <a:latin typeface="Calibri"/>
+              </a:rPr>
+              <a:t>Core epidemiology and informatics training in Addis Ababa</a:t>
+            </a:r>
+          </a:p>
+        </p:txBody>
+      </p:sp>
+      <p:sp>
+        <p:nvSpPr>
+          <p:cNvPr id="9" name="Rectangle 8"/>
           <p:cNvSpPr/>
           <p:nvPr/>
         </p:nvSpPr>
         <p:spPr>
           <a:xfrm>
-            <a:off x="0" y="6565392"/>
-            <a:ext cx="12191695" cy="292608"/>
+            <a:off x="457200" y="2194560"/>
+            <a:ext cx="11155680" cy="960120"/>
+          </a:xfrm>
+          <a:prstGeom prst="rect">
+            <a:avLst/>
+          </a:prstGeom>
+          <a:solidFill>
+            <a:srgbClr val="FFFFFF"/>
+          </a:solidFill>
+          <a:ln>
+            <a:solidFill>
+              <a:srgbClr val="D0DCDC"/>
+            </a:solidFill>
+          </a:ln>
+        </p:spPr>
+        <p:style>
+          <a:lnRef idx="1">
+            <a:schemeClr val="accent1"/>
+          </a:lnRef>
+          <a:fillRef idx="3">
+            <a:schemeClr val="accent1"/>
+          </a:fillRef>
+          <a:effectRef idx="2">
+            <a:schemeClr val="accent1"/>
+          </a:effectRef>
+          <a:fontRef idx="minor">
+            <a:schemeClr val="lt1"/>
+          </a:fontRef>
+        </p:style>
+        <p:txBody>
+          <a:bodyPr rtlCol="0" anchor="ctr"/>
+          <a:lstStyle/>
+          <a:p>
+            <a:pPr algn="ctr"/>
+          </a:p>
+        </p:txBody>
+      </p:sp>
+      <p:sp>
+        <p:nvSpPr>
+          <p:cNvPr id="10" name="TextBox 9"/>
+          <p:cNvSpPr txBox="1"/>
+          <p:nvPr/>
+        </p:nvSpPr>
+        <p:spPr>
+          <a:xfrm>
+            <a:off x="640080" y="2304288"/>
+            <a:ext cx="2286000" cy="320040"/>
+          </a:xfrm>
+          <a:prstGeom prst="rect">
+            <a:avLst/>
+          </a:prstGeom>
+          <a:noFill/>
+        </p:spPr>
+        <p:txBody>
+          <a:bodyPr wrap="square">
+            <a:spAutoFit/>
+          </a:bodyPr>
+          <a:lstStyle/>
+          <a:p>
+            <a:pPr algn="l"/>
+            <a:r>
+              <a:rPr sz="1400" b="1" i="0">
+                <a:solidFill>
+                  <a:srgbClr val="0D6E6E"/>
+                </a:solidFill>
+                <a:latin typeface="Calibri"/>
+              </a:rPr>
+              <a:t>Months 4–12</a:t>
+            </a:r>
+          </a:p>
+        </p:txBody>
+      </p:sp>
+      <p:sp>
+        <p:nvSpPr>
+          <p:cNvPr id="11" name="TextBox 10"/>
+          <p:cNvSpPr txBox="1"/>
+          <p:nvPr/>
+        </p:nvSpPr>
+        <p:spPr>
+          <a:xfrm>
+            <a:off x="3017520" y="2304288"/>
+            <a:ext cx="8229600" cy="731520"/>
+          </a:xfrm>
+          <a:prstGeom prst="rect">
+            <a:avLst/>
+          </a:prstGeom>
+          <a:noFill/>
+        </p:spPr>
+        <p:txBody>
+          <a:bodyPr wrap="square">
+            <a:spAutoFit/>
+          </a:bodyPr>
+          <a:lstStyle/>
+          <a:p>
+            <a:pPr algn="l"/>
+            <a:r>
+              <a:rPr sz="1300" b="0" i="0">
+                <a:solidFill>
+                  <a:srgbClr val="3A4A54"/>
+                </a:solidFill>
+                <a:latin typeface="Calibri"/>
+              </a:rPr>
+              <a:t>Field placement — outbreak workflows and CHW data quality at FairBanks sites</a:t>
+            </a:r>
+          </a:p>
+        </p:txBody>
+      </p:sp>
+      <p:sp>
+        <p:nvSpPr>
+          <p:cNvPr id="12" name="Rectangle 11"/>
+          <p:cNvSpPr/>
+          <p:nvPr/>
+        </p:nvSpPr>
+        <p:spPr>
+          <a:xfrm>
+            <a:off x="457200" y="3291840"/>
+            <a:ext cx="11155680" cy="960120"/>
+          </a:xfrm>
+          <a:prstGeom prst="rect">
+            <a:avLst/>
+          </a:prstGeom>
+          <a:solidFill>
+            <a:srgbClr val="FFFFFF"/>
+          </a:solidFill>
+          <a:ln>
+            <a:solidFill>
+              <a:srgbClr val="D0DCDC"/>
+            </a:solidFill>
+          </a:ln>
+        </p:spPr>
+        <p:style>
+          <a:lnRef idx="1">
+            <a:schemeClr val="accent1"/>
+          </a:lnRef>
+          <a:fillRef idx="3">
+            <a:schemeClr val="accent1"/>
+          </a:fillRef>
+          <a:effectRef idx="2">
+            <a:schemeClr val="accent1"/>
+          </a:effectRef>
+          <a:fontRef idx="minor">
+            <a:schemeClr val="lt1"/>
+          </a:fontRef>
+        </p:style>
+        <p:txBody>
+          <a:bodyPr rtlCol="0" anchor="ctr"/>
+          <a:lstStyle/>
+          <a:p>
+            <a:pPr algn="ctr"/>
+          </a:p>
+        </p:txBody>
+      </p:sp>
+      <p:sp>
+        <p:nvSpPr>
+          <p:cNvPr id="13" name="TextBox 12"/>
+          <p:cNvSpPr txBox="1"/>
+          <p:nvPr/>
+        </p:nvSpPr>
+        <p:spPr>
+          <a:xfrm>
+            <a:off x="640080" y="3401568"/>
+            <a:ext cx="2286000" cy="320040"/>
+          </a:xfrm>
+          <a:prstGeom prst="rect">
+            <a:avLst/>
+          </a:prstGeom>
+          <a:noFill/>
+        </p:spPr>
+        <p:txBody>
+          <a:bodyPr wrap="square">
+            <a:spAutoFit/>
+          </a:bodyPr>
+          <a:lstStyle/>
+          <a:p>
+            <a:pPr algn="l"/>
+            <a:r>
+              <a:rPr sz="1400" b="1" i="0">
+                <a:solidFill>
+                  <a:srgbClr val="0D6E6E"/>
+                </a:solidFill>
+                <a:latin typeface="Calibri"/>
+              </a:rPr>
+              <a:t>Months 13–24</a:t>
+            </a:r>
+          </a:p>
+        </p:txBody>
+      </p:sp>
+      <p:sp>
+        <p:nvSpPr>
+          <p:cNvPr id="14" name="TextBox 13"/>
+          <p:cNvSpPr txBox="1"/>
+          <p:nvPr/>
+        </p:nvSpPr>
+        <p:spPr>
+          <a:xfrm>
+            <a:off x="3017520" y="3401568"/>
+            <a:ext cx="8229600" cy="731520"/>
+          </a:xfrm>
+          <a:prstGeom prst="rect">
+            <a:avLst/>
+          </a:prstGeom>
+          <a:noFill/>
+        </p:spPr>
+        <p:txBody>
+          <a:bodyPr wrap="square">
+            <a:spAutoFit/>
+          </a:bodyPr>
+          <a:lstStyle/>
+          <a:p>
+            <a:pPr algn="l"/>
+            <a:r>
+              <a:rPr sz="1300" b="0" i="0">
+                <a:solidFill>
+                  <a:srgbClr val="3A4A54"/>
+                </a:solidFill>
+                <a:latin typeface="Calibri"/>
+              </a:rPr>
+              <a:t>Advanced surveillance modules; district partner engagement; FCHIP alert validation</a:t>
+            </a:r>
+          </a:p>
+        </p:txBody>
+      </p:sp>
+      <p:sp>
+        <p:nvSpPr>
+          <p:cNvPr id="15" name="Rectangle 14"/>
+          <p:cNvSpPr/>
+          <p:nvPr/>
+        </p:nvSpPr>
+        <p:spPr>
+          <a:xfrm>
+            <a:off x="457200" y="4389120"/>
+            <a:ext cx="11155680" cy="960120"/>
+          </a:xfrm>
+          <a:prstGeom prst="rect">
+            <a:avLst/>
+          </a:prstGeom>
+          <a:solidFill>
+            <a:srgbClr val="FFFFFF"/>
+          </a:solidFill>
+          <a:ln>
+            <a:solidFill>
+              <a:srgbClr val="D0DCDC"/>
+            </a:solidFill>
+          </a:ln>
+        </p:spPr>
+        <p:style>
+          <a:lnRef idx="1">
+            <a:schemeClr val="accent1"/>
+          </a:lnRef>
+          <a:fillRef idx="3">
+            <a:schemeClr val="accent1"/>
+          </a:fillRef>
+          <a:effectRef idx="2">
+            <a:schemeClr val="accent1"/>
+          </a:effectRef>
+          <a:fontRef idx="minor">
+            <a:schemeClr val="lt1"/>
+          </a:fontRef>
+        </p:style>
+        <p:txBody>
+          <a:bodyPr rtlCol="0" anchor="ctr"/>
+          <a:lstStyle/>
+          <a:p>
+            <a:pPr algn="ctr"/>
+          </a:p>
+        </p:txBody>
+      </p:sp>
+      <p:sp>
+        <p:nvSpPr>
+          <p:cNvPr id="16" name="TextBox 15"/>
+          <p:cNvSpPr txBox="1"/>
+          <p:nvPr/>
+        </p:nvSpPr>
+        <p:spPr>
+          <a:xfrm>
+            <a:off x="640080" y="4498848"/>
+            <a:ext cx="2286000" cy="320040"/>
+          </a:xfrm>
+          <a:prstGeom prst="rect">
+            <a:avLst/>
+          </a:prstGeom>
+          <a:noFill/>
+        </p:spPr>
+        <p:txBody>
+          <a:bodyPr wrap="square">
+            <a:spAutoFit/>
+          </a:bodyPr>
+          <a:lstStyle/>
+          <a:p>
+            <a:pPr algn="l"/>
+            <a:r>
+              <a:rPr sz="1400" b="1" i="0">
+                <a:solidFill>
+                  <a:srgbClr val="0D6E6E"/>
+                </a:solidFill>
+                <a:latin typeface="Calibri"/>
+              </a:rPr>
+              <a:t>Throughout</a:t>
+            </a:r>
+          </a:p>
+        </p:txBody>
+      </p:sp>
+      <p:sp>
+        <p:nvSpPr>
+          <p:cNvPr id="17" name="TextBox 16"/>
+          <p:cNvSpPr txBox="1"/>
+          <p:nvPr/>
+        </p:nvSpPr>
+        <p:spPr>
+          <a:xfrm>
+            <a:off x="3017520" y="4498848"/>
+            <a:ext cx="8229600" cy="731520"/>
+          </a:xfrm>
+          <a:prstGeom prst="rect">
+            <a:avLst/>
+          </a:prstGeom>
+          <a:noFill/>
+        </p:spPr>
+        <p:txBody>
+          <a:bodyPr wrap="square">
+            <a:spAutoFit/>
+          </a:bodyPr>
+          <a:lstStyle/>
+          <a:p>
+            <a:pPr algn="l"/>
+            <a:r>
+              <a:rPr sz="1300" b="0" i="0">
+                <a:solidFill>
+                  <a:srgbClr val="3A4A54"/>
+                </a:solidFill>
+                <a:latin typeface="Calibri"/>
+              </a:rPr>
+              <a:t>Monthly learning reports; Africa CDC network participation; community feedback loops</a:t>
+            </a:r>
+          </a:p>
+        </p:txBody>
+      </p:sp>
+      <p:sp>
+        <p:nvSpPr>
+          <p:cNvPr id="18" name="Rectangle 17"/>
+          <p:cNvSpPr/>
+          <p:nvPr/>
+        </p:nvSpPr>
+        <p:spPr>
+          <a:xfrm>
+            <a:off x="0" y="6583680"/>
+            <a:ext cx="12191695" cy="274320"/>
           </a:xfrm>
           <a:prstGeom prst="rect">
             <a:avLst/>
@@ -6562,7 +6367,6 @@
           <a:ln>
             <a:noFill/>
           </a:ln>
-          <a:effectLst/>
         </p:spPr>
         <p:style>
           <a:lnRef idx="1">
@@ -6588,14 +6392,14 @@
       </p:sp>
       <p:sp>
         <p:nvSpPr>
-          <p:cNvPr id="9" name="TextBox 8"/>
+          <p:cNvPr id="19" name="TextBox 18"/>
           <p:cNvSpPr txBox="1"/>
           <p:nvPr/>
         </p:nvSpPr>
         <p:spPr>
           <a:xfrm>
-            <a:off x="365760" y="6574536"/>
-            <a:ext cx="9144000" cy="274320"/>
+            <a:off x="365760" y="6592824"/>
+            <a:ext cx="9144000" cy="256032"/>
           </a:xfrm>
           <a:prstGeom prst="rect">
             <a:avLst/>
@@ -6603,16 +6407,12 @@
           <a:noFill/>
         </p:spPr>
         <p:txBody>
-          <a:bodyPr wrap="square" anchor="ctr">
+          <a:bodyPr wrap="square">
             <a:spAutoFit/>
           </a:bodyPr>
           <a:lstStyle/>
           <a:p>
-            <a:pPr algn="l">
-              <a:spcAft>
-                <a:spcPts val="0"/>
-              </a:spcAft>
-            </a:pPr>
+            <a:pPr algn="l"/>
             <a:r>
               <a:rPr sz="900" b="0" i="0">
                 <a:solidFill>
@@ -6620,21 +6420,21 @@
                 </a:solidFill>
                 <a:latin typeface="Calibri"/>
               </a:rPr>
-              <a:t>FairBanks FCHIP  |  Africa CDC African Epidemic Services (AE  |  Your health, our mission.</a:t>
-            </a:r>
-          </a:p>
-        </p:txBody>
-      </p:sp>
-      <p:sp>
-        <p:nvSpPr>
-          <p:cNvPr id="10" name="TextBox 9"/>
+              <a:t>FairBanks FCHIP | Africa CDC AES Fellowship | Your health, our mission.</a:t>
+            </a:r>
+          </a:p>
+        </p:txBody>
+      </p:sp>
+      <p:sp>
+        <p:nvSpPr>
+          <p:cNvPr id="20" name="TextBox 19"/>
           <p:cNvSpPr txBox="1"/>
           <p:nvPr/>
         </p:nvSpPr>
         <p:spPr>
           <a:xfrm>
-            <a:off x="11094415" y="6574536"/>
-            <a:ext cx="731520" cy="274320"/>
+            <a:off x="11460175" y="6592824"/>
+            <a:ext cx="457200" cy="256032"/>
           </a:xfrm>
           <a:prstGeom prst="rect">
             <a:avLst/>
@@ -6642,16 +6442,12 @@
           <a:noFill/>
         </p:spPr>
         <p:txBody>
-          <a:bodyPr wrap="square" anchor="ctr">
+          <a:bodyPr wrap="square">
             <a:spAutoFit/>
           </a:bodyPr>
           <a:lstStyle/>
           <a:p>
-            <a:pPr algn="r">
-              <a:spcAft>
-                <a:spcPts val="0"/>
-              </a:spcAft>
-            </a:pPr>
+            <a:pPr algn="r"/>
             <a:r>
               <a:rPr sz="900" b="0" i="0">
                 <a:solidFill>
@@ -6691,7 +6487,7 @@
         <p:spPr>
           <a:xfrm>
             <a:off x="0" y="0"/>
-            <a:ext cx="12191695" cy="960120"/>
+            <a:ext cx="12191695" cy="914400"/>
           </a:xfrm>
           <a:prstGeom prst="rect">
             <a:avLst/>
@@ -6702,7 +6498,6 @@
           <a:ln>
             <a:noFill/>
           </a:ln>
-          <a:effectLst/>
         </p:spPr>
         <p:style>
           <a:lnRef idx="1">
@@ -6735,7 +6530,7 @@
         <p:spPr>
           <a:xfrm>
             <a:off x="0" y="0"/>
-            <a:ext cx="164592" cy="960120"/>
+            <a:ext cx="137160" cy="914400"/>
           </a:xfrm>
           <a:prstGeom prst="rect">
             <a:avLst/>
@@ -6746,7 +6541,6 @@
           <a:ln>
             <a:noFill/>
           </a:ln>
-          <a:effectLst/>
         </p:spPr>
         <p:style>
           <a:lnRef idx="1">
@@ -6778,8 +6572,8 @@
         </p:nvSpPr>
         <p:spPr>
           <a:xfrm>
-            <a:off x="457200" y="109728"/>
-            <a:ext cx="10972800" cy="256032"/>
+            <a:off x="411480" y="91440"/>
+            <a:ext cx="10972800" cy="274320"/>
           </a:xfrm>
           <a:prstGeom prst="rect">
             <a:avLst/>
@@ -6787,16 +6581,12 @@
           <a:noFill/>
         </p:spPr>
         <p:txBody>
-          <a:bodyPr wrap="square" anchor="t">
+          <a:bodyPr wrap="square">
             <a:spAutoFit/>
           </a:bodyPr>
           <a:lstStyle/>
           <a:p>
-            <a:pPr algn="l">
-              <a:spcAft>
-                <a:spcPts val="0"/>
-              </a:spcAft>
-            </a:pPr>
+            <a:pPr algn="l"/>
             <a:r>
               <a:rPr sz="1100" b="1" i="0">
                 <a:solidFill>
@@ -6804,7 +6594,7 @@
                 </a:solidFill>
                 <a:latin typeface="Calibri"/>
               </a:rPr>
-              <a:t>DEEP TECHNOLOGY</a:t>
+              <a:t>ELIGIBILITY FIT</a:t>
             </a:r>
           </a:p>
         </p:txBody>
@@ -6817,8 +6607,8 @@
         </p:nvSpPr>
         <p:spPr>
           <a:xfrm>
-            <a:off x="457200" y="384048"/>
-            <a:ext cx="11247120" cy="475488"/>
+            <a:off x="411480" y="384048"/>
+            <a:ext cx="10972800" cy="457200"/>
           </a:xfrm>
           <a:prstGeom prst="rect">
             <a:avLst/>
@@ -6826,62 +6616,34 @@
           <a:noFill/>
         </p:spPr>
         <p:txBody>
-          <a:bodyPr wrap="square" anchor="t">
+          <a:bodyPr wrap="square">
             <a:spAutoFit/>
           </a:bodyPr>
           <a:lstStyle/>
           <a:p>
-            <a:pPr algn="l">
-              <a:spcAft>
-                <a:spcPts val="0"/>
-              </a:spcAft>
-            </a:pPr>
-            <a:r>
-              <a:rPr sz="2200" b="1" i="0">
+            <a:pPr algn="l"/>
+            <a:r>
+              <a:rPr sz="2400" b="1" i="0">
                 <a:solidFill>
                   <a:srgbClr val="0A1F2E"/>
                 </a:solidFill>
                 <a:latin typeface="Calibri"/>
               </a:rPr>
-              <a:t>Intelligence rooted in African community care</a:t>
-            </a:r>
-          </a:p>
-        </p:txBody>
-      </p:sp>
-      <p:pic>
-        <p:nvPicPr>
-          <p:cNvPr id="6" name="Picture 5" descr="deep_tech_collage_opt.jpg"/>
-          <p:cNvPicPr>
-            <a:picLocks noChangeAspect="1"/>
-          </p:cNvPicPr>
-          <p:nvPr/>
-        </p:nvPicPr>
-        <p:blipFill>
-          <a:blip r:embed="rId2"/>
-          <a:stretch>
-            <a:fillRect/>
-          </a:stretch>
-        </p:blipFill>
-        <p:spPr>
-          <a:xfrm>
-            <a:off x="411480" y="2065630"/>
-            <a:ext cx="5120640" cy="3412540"/>
-          </a:xfrm>
-          <a:prstGeom prst="rect">
-            <a:avLst/>
-          </a:prstGeom>
-        </p:spPr>
-      </p:pic>
-      <p:sp>
-        <p:nvSpPr>
-          <p:cNvPr id="7" name="Rectangle 6"/>
+              <a:t>Nominee meets AES criteria through FairBanks employment</a:t>
+            </a:r>
+          </a:p>
+        </p:txBody>
+      </p:sp>
+      <p:sp>
+        <p:nvSpPr>
+          <p:cNvPr id="6" name="Rectangle 5"/>
           <p:cNvSpPr/>
           <p:nvPr/>
         </p:nvSpPr>
         <p:spPr>
           <a:xfrm>
-            <a:off x="5852160" y="1197864"/>
-            <a:ext cx="5852160" cy="766572"/>
+            <a:off x="457200" y="1097280"/>
+            <a:ext cx="11155680" cy="960120"/>
           </a:xfrm>
           <a:prstGeom prst="rect">
             <a:avLst/>
@@ -6889,12 +6651,11 @@
           <a:solidFill>
             <a:srgbClr val="FFFFFF"/>
           </a:solidFill>
-          <a:ln w="9525">
+          <a:ln>
             <a:solidFill>
               <a:srgbClr val="D0DCDC"/>
             </a:solidFill>
           </a:ln>
-          <a:effectLst/>
         </p:spPr>
         <p:style>
           <a:lnRef idx="1">
@@ -6920,14 +6681,49 @@
       </p:sp>
       <p:sp>
         <p:nvSpPr>
+          <p:cNvPr id="7" name="TextBox 6"/>
+          <p:cNvSpPr txBox="1"/>
+          <p:nvPr/>
+        </p:nvSpPr>
+        <p:spPr>
+          <a:xfrm>
+            <a:off x="640080" y="1207008"/>
+            <a:ext cx="3200400" cy="731520"/>
+          </a:xfrm>
+          <a:prstGeom prst="rect">
+            <a:avLst/>
+          </a:prstGeom>
+          <a:noFill/>
+        </p:spPr>
+        <p:txBody>
+          <a:bodyPr wrap="square">
+            <a:spAutoFit/>
+          </a:bodyPr>
+          <a:lstStyle/>
+          <a:p>
+            <a:pPr algn="l"/>
+            <a:r>
+              <a:rPr sz="1300" b="1" i="0">
+                <a:solidFill>
+                  <a:srgbClr val="0D6E6E"/>
+                </a:solidFill>
+                <a:latin typeface="Calibri"/>
+              </a:rPr>
+              <a:t>AU citizen under 35</a:t>
+            </a:r>
+          </a:p>
+        </p:txBody>
+      </p:sp>
+      <p:sp>
+        <p:nvSpPr>
           <p:cNvPr id="8" name="TextBox 7"/>
           <p:cNvSpPr txBox="1"/>
           <p:nvPr/>
         </p:nvSpPr>
         <p:spPr>
           <a:xfrm>
-            <a:off x="6035040" y="1252728"/>
-            <a:ext cx="5486400" cy="274320"/>
+            <a:off x="3931920" y="1207008"/>
+            <a:ext cx="7315200" cy="731520"/>
           </a:xfrm>
           <a:prstGeom prst="rect">
             <a:avLst/>
@@ -6935,77 +6731,34 @@
           <a:noFill/>
         </p:spPr>
         <p:txBody>
-          <a:bodyPr wrap="square" anchor="t">
+          <a:bodyPr wrap="square">
             <a:spAutoFit/>
           </a:bodyPr>
           <a:lstStyle/>
           <a:p>
-            <a:pPr algn="l">
-              <a:spcAft>
-                <a:spcPts val="0"/>
-              </a:spcAft>
-            </a:pPr>
-            <a:r>
-              <a:rPr sz="1400" b="1" i="0">
-                <a:solidFill>
-                  <a:srgbClr val="0D6E6E"/>
+            <a:pPr algn="l"/>
+            <a:r>
+              <a:rPr sz="1300" b="0" i="0">
+                <a:solidFill>
+                  <a:srgbClr val="3A4A54"/>
                 </a:solidFill>
                 <a:latin typeface="Calibri"/>
               </a:rPr>
-              <a:t>Artificial Intelligence</a:t>
-            </a:r>
-          </a:p>
-        </p:txBody>
-      </p:sp>
-      <p:sp>
-        <p:nvSpPr>
-          <p:cNvPr id="9" name="TextBox 8"/>
-          <p:cNvSpPr txBox="1"/>
-          <p:nvPr/>
-        </p:nvSpPr>
-        <p:spPr>
-          <a:xfrm>
-            <a:off x="6035040" y="1527048"/>
-            <a:ext cx="5486400" cy="365760"/>
-          </a:xfrm>
-          <a:prstGeom prst="rect">
-            <a:avLst/>
-          </a:prstGeom>
-          <a:noFill/>
-        </p:spPr>
-        <p:txBody>
-          <a:bodyPr wrap="square" anchor="t">
-            <a:spAutoFit/>
-          </a:bodyPr>
-          <a:lstStyle/>
-          <a:p>
-            <a:pPr algn="l">
-              <a:spcAft>
-                <a:spcPts val="0"/>
-              </a:spcAft>
-            </a:pPr>
-            <a:r>
-              <a:rPr sz="1200" b="0" i="0">
-                <a:solidFill>
-                  <a:srgbClr val="3A4A54"/>
-                </a:solidFill>
-                <a:latin typeface="Calibri"/>
-              </a:rPr>
-              <a:t>Outbreak early warning; maternal and NCD risk scoring</a:t>
-            </a:r>
-          </a:p>
-        </p:txBody>
-      </p:sp>
-      <p:sp>
-        <p:nvSpPr>
-          <p:cNvPr id="10" name="Rectangle 9"/>
+              <a:t>Ugandan staff candidate within eligibility range</a:t>
+            </a:r>
+          </a:p>
+        </p:txBody>
+      </p:sp>
+      <p:sp>
+        <p:nvSpPr>
+          <p:cNvPr id="9" name="Rectangle 8"/>
           <p:cNvSpPr/>
           <p:nvPr/>
         </p:nvSpPr>
         <p:spPr>
           <a:xfrm>
-            <a:off x="5852160" y="2074164"/>
-            <a:ext cx="5852160" cy="766572"/>
+            <a:off x="457200" y="2194560"/>
+            <a:ext cx="11155680" cy="960120"/>
           </a:xfrm>
           <a:prstGeom prst="rect">
             <a:avLst/>
@@ -7013,12 +6766,11 @@
           <a:solidFill>
             <a:srgbClr val="FFFFFF"/>
           </a:solidFill>
-          <a:ln w="9525">
+          <a:ln>
             <a:solidFill>
               <a:srgbClr val="D0DCDC"/>
             </a:solidFill>
           </a:ln>
-          <a:effectLst/>
         </p:spPr>
         <p:style>
           <a:lnRef idx="1">
@@ -7044,14 +6796,49 @@
       </p:sp>
       <p:sp>
         <p:nvSpPr>
+          <p:cNvPr id="10" name="TextBox 9"/>
+          <p:cNvSpPr txBox="1"/>
+          <p:nvPr/>
+        </p:nvSpPr>
+        <p:spPr>
+          <a:xfrm>
+            <a:off x="640080" y="2304288"/>
+            <a:ext cx="3200400" cy="731520"/>
+          </a:xfrm>
+          <a:prstGeom prst="rect">
+            <a:avLst/>
+          </a:prstGeom>
+          <a:noFill/>
+        </p:spPr>
+        <p:txBody>
+          <a:bodyPr wrap="square">
+            <a:spAutoFit/>
+          </a:bodyPr>
+          <a:lstStyle/>
+          <a:p>
+            <a:pPr algn="l"/>
+            <a:r>
+              <a:rPr sz="1300" b="1" i="0">
+                <a:solidFill>
+                  <a:srgbClr val="0D6E6E"/>
+                </a:solidFill>
+                <a:latin typeface="Calibri"/>
+              </a:rPr>
+              <a:t>Employed in public health</a:t>
+            </a:r>
+          </a:p>
+        </p:txBody>
+      </p:sp>
+      <p:sp>
+        <p:nvSpPr>
           <p:cNvPr id="11" name="TextBox 10"/>
           <p:cNvSpPr txBox="1"/>
           <p:nvPr/>
         </p:nvSpPr>
         <p:spPr>
           <a:xfrm>
-            <a:off x="6035040" y="2129028"/>
-            <a:ext cx="5486400" cy="274320"/>
+            <a:off x="3931920" y="2304288"/>
+            <a:ext cx="7315200" cy="731520"/>
           </a:xfrm>
           <a:prstGeom prst="rect">
             <a:avLst/>
@@ -7059,77 +6846,34 @@
           <a:noFill/>
         </p:spPr>
         <p:txBody>
-          <a:bodyPr wrap="square" anchor="t">
+          <a:bodyPr wrap="square">
             <a:spAutoFit/>
           </a:bodyPr>
           <a:lstStyle/>
           <a:p>
-            <a:pPr algn="l">
-              <a:spcAft>
-                <a:spcPts val="0"/>
-              </a:spcAft>
-            </a:pPr>
-            <a:r>
-              <a:rPr sz="1400" b="1" i="0">
-                <a:solidFill>
-                  <a:srgbClr val="0D6E6E"/>
+            <a:pPr algn="l"/>
+            <a:r>
+              <a:rPr sz="1300" b="0" i="0">
+                <a:solidFill>
+                  <a:srgbClr val="3A4A54"/>
                 </a:solidFill>
                 <a:latin typeface="Calibri"/>
               </a:rPr>
-              <a:t>Machine Learning</a:t>
-            </a:r>
-          </a:p>
-        </p:txBody>
-      </p:sp>
-      <p:sp>
-        <p:nvSpPr>
-          <p:cNvPr id="12" name="TextBox 11"/>
-          <p:cNvSpPr txBox="1"/>
-          <p:nvPr/>
-        </p:nvSpPr>
-        <p:spPr>
-          <a:xfrm>
-            <a:off x="6035040" y="2403348"/>
-            <a:ext cx="5486400" cy="365760"/>
-          </a:xfrm>
-          <a:prstGeom prst="rect">
-            <a:avLst/>
-          </a:prstGeom>
-          <a:noFill/>
-        </p:spPr>
-        <p:txBody>
-          <a:bodyPr wrap="square" anchor="t">
-            <a:spAutoFit/>
-          </a:bodyPr>
-          <a:lstStyle/>
-          <a:p>
-            <a:pPr algn="l">
-              <a:spcAft>
-                <a:spcPts val="0"/>
-              </a:spcAft>
-            </a:pPr>
-            <a:r>
-              <a:rPr sz="1200" b="0" i="0">
-                <a:solidFill>
-                  <a:srgbClr val="3A4A54"/>
-                </a:solidFill>
-                <a:latin typeface="Calibri"/>
-              </a:rPr>
-              <a:t>Learn from community patterns, seasons, and outreach outcomes</a:t>
-            </a:r>
-          </a:p>
-        </p:txBody>
-      </p:sp>
-      <p:sp>
-        <p:nvSpPr>
-          <p:cNvPr id="13" name="Rectangle 12"/>
+              <a:t>FairBanks clinical / community health employment</a:t>
+            </a:r>
+          </a:p>
+        </p:txBody>
+      </p:sp>
+      <p:sp>
+        <p:nvSpPr>
+          <p:cNvPr id="12" name="Rectangle 11"/>
           <p:cNvSpPr/>
           <p:nvPr/>
         </p:nvSpPr>
         <p:spPr>
           <a:xfrm>
-            <a:off x="5852160" y="2950464"/>
-            <a:ext cx="5852160" cy="766572"/>
+            <a:off x="457200" y="3291840"/>
+            <a:ext cx="11155680" cy="960120"/>
           </a:xfrm>
           <a:prstGeom prst="rect">
             <a:avLst/>
@@ -7137,12 +6881,11 @@
           <a:solidFill>
             <a:srgbClr val="FFFFFF"/>
           </a:solidFill>
-          <a:ln w="9525">
+          <a:ln>
             <a:solidFill>
               <a:srgbClr val="D0DCDC"/>
             </a:solidFill>
           </a:ln>
-          <a:effectLst/>
         </p:spPr>
         <p:style>
           <a:lnRef idx="1">
@@ -7168,14 +6911,49 @@
       </p:sp>
       <p:sp>
         <p:nvSpPr>
+          <p:cNvPr id="13" name="TextBox 12"/>
+          <p:cNvSpPr txBox="1"/>
+          <p:nvPr/>
+        </p:nvSpPr>
+        <p:spPr>
+          <a:xfrm>
+            <a:off x="640080" y="3401568"/>
+            <a:ext cx="3200400" cy="731520"/>
+          </a:xfrm>
+          <a:prstGeom prst="rect">
+            <a:avLst/>
+          </a:prstGeom>
+          <a:noFill/>
+        </p:spPr>
+        <p:txBody>
+          <a:bodyPr wrap="square">
+            <a:spAutoFit/>
+          </a:bodyPr>
+          <a:lstStyle/>
+          <a:p>
+            <a:pPr algn="l"/>
+            <a:r>
+              <a:rPr sz="1300" b="1" i="0">
+                <a:solidFill>
+                  <a:srgbClr val="0D6E6E"/>
+                </a:solidFill>
+                <a:latin typeface="Calibri"/>
+              </a:rPr>
+              <a:t>Degree + 3 years' experience</a:t>
+            </a:r>
+          </a:p>
+        </p:txBody>
+      </p:sp>
+      <p:sp>
+        <p:nvSpPr>
           <p:cNvPr id="14" name="TextBox 13"/>
           <p:cNvSpPr txBox="1"/>
           <p:nvPr/>
         </p:nvSpPr>
         <p:spPr>
           <a:xfrm>
-            <a:off x="6035040" y="3005328"/>
-            <a:ext cx="5486400" cy="274320"/>
+            <a:off x="3931920" y="3401568"/>
+            <a:ext cx="7315200" cy="731520"/>
           </a:xfrm>
           <a:prstGeom prst="rect">
             <a:avLst/>
@@ -7183,77 +6961,34 @@
           <a:noFill/>
         </p:spPr>
         <p:txBody>
-          <a:bodyPr wrap="square" anchor="t">
+          <a:bodyPr wrap="square">
             <a:spAutoFit/>
           </a:bodyPr>
           <a:lstStyle/>
           <a:p>
-            <a:pPr algn="l">
-              <a:spcAft>
-                <a:spcPts val="0"/>
-              </a:spcAft>
-            </a:pPr>
-            <a:r>
-              <a:rPr sz="1400" b="1" i="0">
-                <a:solidFill>
-                  <a:srgbClr val="0D6E6E"/>
+            <a:pPr algn="l"/>
+            <a:r>
+              <a:rPr sz="1300" b="0" i="0">
+                <a:solidFill>
+                  <a:srgbClr val="3A4A54"/>
                 </a:solidFill>
                 <a:latin typeface="Calibri"/>
               </a:rPr>
-              <a:t>GIS Mapping</a:t>
-            </a:r>
-          </a:p>
-        </p:txBody>
-      </p:sp>
-      <p:sp>
-        <p:nvSpPr>
-          <p:cNvPr id="15" name="TextBox 14"/>
-          <p:cNvSpPr txBox="1"/>
-          <p:nvPr/>
-        </p:nvSpPr>
-        <p:spPr>
-          <a:xfrm>
-            <a:off x="6035040" y="3279648"/>
-            <a:ext cx="5486400" cy="365760"/>
-          </a:xfrm>
-          <a:prstGeom prst="rect">
-            <a:avLst/>
-          </a:prstGeom>
-          <a:noFill/>
-        </p:spPr>
-        <p:txBody>
-          <a:bodyPr wrap="square" anchor="t">
-            <a:spAutoFit/>
-          </a:bodyPr>
-          <a:lstStyle/>
-          <a:p>
-            <a:pPr algn="l">
-              <a:spcAft>
-                <a:spcPts val="0"/>
-              </a:spcAft>
-            </a:pPr>
-            <a:r>
-              <a:rPr sz="1200" b="0" i="0">
-                <a:solidFill>
-                  <a:srgbClr val="3A4A54"/>
-                </a:solidFill>
-                <a:latin typeface="Calibri"/>
-              </a:rPr>
-              <a:t>Disease distribution, hotspots, and resource gaps</a:t>
-            </a:r>
-          </a:p>
-        </p:txBody>
-      </p:sp>
-      <p:sp>
-        <p:nvSpPr>
-          <p:cNvPr id="16" name="Rectangle 15"/>
+              <a:t>Nominee will meet stated requirements</a:t>
+            </a:r>
+          </a:p>
+        </p:txBody>
+      </p:sp>
+      <p:sp>
+        <p:nvSpPr>
+          <p:cNvPr id="15" name="Rectangle 14"/>
           <p:cNvSpPr/>
           <p:nvPr/>
         </p:nvSpPr>
         <p:spPr>
           <a:xfrm>
-            <a:off x="5852160" y="3826764"/>
-            <a:ext cx="5852160" cy="766572"/>
+            <a:off x="457200" y="4389120"/>
+            <a:ext cx="11155680" cy="960120"/>
           </a:xfrm>
           <a:prstGeom prst="rect">
             <a:avLst/>
@@ -7261,12 +6996,11 @@
           <a:solidFill>
             <a:srgbClr val="FFFFFF"/>
           </a:solidFill>
-          <a:ln w="9525">
+          <a:ln>
             <a:solidFill>
               <a:srgbClr val="D0DCDC"/>
             </a:solidFill>
           </a:ln>
-          <a:effectLst/>
         </p:spPr>
         <p:style>
           <a:lnRef idx="1">
@@ -7292,14 +7026,49 @@
       </p:sp>
       <p:sp>
         <p:nvSpPr>
+          <p:cNvPr id="16" name="TextBox 15"/>
+          <p:cNvSpPr txBox="1"/>
+          <p:nvPr/>
+        </p:nvSpPr>
+        <p:spPr>
+          <a:xfrm>
+            <a:off x="640080" y="4498848"/>
+            <a:ext cx="3200400" cy="731520"/>
+          </a:xfrm>
+          <a:prstGeom prst="rect">
+            <a:avLst/>
+          </a:prstGeom>
+          <a:noFill/>
+        </p:spPr>
+        <p:txBody>
+          <a:bodyPr wrap="square">
+            <a:spAutoFit/>
+          </a:bodyPr>
+          <a:lstStyle/>
+          <a:p>
+            <a:pPr algn="l"/>
+            <a:r>
+              <a:rPr sz="1300" b="1" i="0">
+                <a:solidFill>
+                  <a:srgbClr val="0D6E6E"/>
+                </a:solidFill>
+                <a:latin typeface="Calibri"/>
+              </a:rPr>
+              <a:t>Epidemiology / Informatics tracks</a:t>
+            </a:r>
+          </a:p>
+        </p:txBody>
+      </p:sp>
+      <p:sp>
+        <p:nvSpPr>
           <p:cNvPr id="17" name="TextBox 16"/>
           <p:cNvSpPr txBox="1"/>
           <p:nvPr/>
         </p:nvSpPr>
         <p:spPr>
           <a:xfrm>
-            <a:off x="6035040" y="3881628"/>
-            <a:ext cx="5486400" cy="274320"/>
+            <a:off x="3931920" y="4498848"/>
+            <a:ext cx="7315200" cy="731520"/>
           </a:xfrm>
           <a:prstGeom prst="rect">
             <a:avLst/>
@@ -7307,325 +7076,34 @@
           <a:noFill/>
         </p:spPr>
         <p:txBody>
-          <a:bodyPr wrap="square" anchor="t">
+          <a:bodyPr wrap="square">
             <a:spAutoFit/>
           </a:bodyPr>
           <a:lstStyle/>
           <a:p>
-            <a:pPr algn="l">
-              <a:spcAft>
-                <a:spcPts val="0"/>
-              </a:spcAft>
-            </a:pPr>
-            <a:r>
-              <a:rPr sz="1400" b="1" i="0">
-                <a:solidFill>
-                  <a:srgbClr val="0D6E6E"/>
+            <a:pPr algn="l"/>
+            <a:r>
+              <a:rPr sz="1300" b="0" i="0">
+                <a:solidFill>
+                  <a:srgbClr val="3A4A54"/>
                 </a:solidFill>
                 <a:latin typeface="Calibri"/>
               </a:rPr>
-              <a:t>Mobile Data Collection</a:t>
-            </a:r>
-          </a:p>
-        </p:txBody>
-      </p:sp>
-      <p:sp>
-        <p:nvSpPr>
-          <p:cNvPr id="18" name="TextBox 17"/>
-          <p:cNvSpPr txBox="1"/>
-          <p:nvPr/>
-        </p:nvSpPr>
-        <p:spPr>
-          <a:xfrm>
-            <a:off x="6035040" y="4155948"/>
-            <a:ext cx="5486400" cy="365760"/>
-          </a:xfrm>
-          <a:prstGeom prst="rect">
-            <a:avLst/>
-          </a:prstGeom>
-          <a:noFill/>
-        </p:spPr>
-        <p:txBody>
-          <a:bodyPr wrap="square" anchor="t">
-            <a:spAutoFit/>
-          </a:bodyPr>
-          <a:lstStyle/>
-          <a:p>
-            <a:pPr algn="l">
-              <a:spcAft>
-                <a:spcPts val="0"/>
-              </a:spcAft>
-            </a:pPr>
-            <a:r>
-              <a:rPr sz="1200" b="0" i="0">
-                <a:solidFill>
-                  <a:srgbClr val="3A4A54"/>
-                </a:solidFill>
-                <a:latin typeface="Calibri"/>
-              </a:rPr>
-              <a:t>Offline-capable CHW/VHT capture at household level</a:t>
-            </a:r>
-          </a:p>
-        </p:txBody>
-      </p:sp>
-      <p:sp>
-        <p:nvSpPr>
-          <p:cNvPr id="19" name="Rectangle 18"/>
+              <a:t>Direct fit to FCHIP surveillance and data-quality goals</a:t>
+            </a:r>
+          </a:p>
+        </p:txBody>
+      </p:sp>
+      <p:sp>
+        <p:nvSpPr>
+          <p:cNvPr id="18" name="Rectangle 17"/>
           <p:cNvSpPr/>
           <p:nvPr/>
         </p:nvSpPr>
         <p:spPr>
           <a:xfrm>
-            <a:off x="5852160" y="4703064"/>
-            <a:ext cx="5852160" cy="766572"/>
-          </a:xfrm>
-          <a:prstGeom prst="rect">
-            <a:avLst/>
-          </a:prstGeom>
-          <a:solidFill>
-            <a:srgbClr val="FFFFFF"/>
-          </a:solidFill>
-          <a:ln w="9525">
-            <a:solidFill>
-              <a:srgbClr val="D0DCDC"/>
-            </a:solidFill>
-          </a:ln>
-          <a:effectLst/>
-        </p:spPr>
-        <p:style>
-          <a:lnRef idx="1">
-            <a:schemeClr val="accent1"/>
-          </a:lnRef>
-          <a:fillRef idx="3">
-            <a:schemeClr val="accent1"/>
-          </a:fillRef>
-          <a:effectRef idx="2">
-            <a:schemeClr val="accent1"/>
-          </a:effectRef>
-          <a:fontRef idx="minor">
-            <a:schemeClr val="lt1"/>
-          </a:fontRef>
-        </p:style>
-        <p:txBody>
-          <a:bodyPr rtlCol="0" anchor="ctr"/>
-          <a:lstStyle/>
-          <a:p>
-            <a:pPr algn="ctr"/>
-          </a:p>
-        </p:txBody>
-      </p:sp>
-      <p:sp>
-        <p:nvSpPr>
-          <p:cNvPr id="20" name="TextBox 19"/>
-          <p:cNvSpPr txBox="1"/>
-          <p:nvPr/>
-        </p:nvSpPr>
-        <p:spPr>
-          <a:xfrm>
-            <a:off x="6035040" y="4757928"/>
-            <a:ext cx="5486400" cy="274320"/>
-          </a:xfrm>
-          <a:prstGeom prst="rect">
-            <a:avLst/>
-          </a:prstGeom>
-          <a:noFill/>
-        </p:spPr>
-        <p:txBody>
-          <a:bodyPr wrap="square" anchor="t">
-            <a:spAutoFit/>
-          </a:bodyPr>
-          <a:lstStyle/>
-          <a:p>
-            <a:pPr algn="l">
-              <a:spcAft>
-                <a:spcPts val="0"/>
-              </a:spcAft>
-            </a:pPr>
-            <a:r>
-              <a:rPr sz="1400" b="1" i="0">
-                <a:solidFill>
-                  <a:srgbClr val="0D6E6E"/>
-                </a:solidFill>
-                <a:latin typeface="Calibri"/>
-              </a:rPr>
-              <a:t>Cloud Computing</a:t>
-            </a:r>
-          </a:p>
-        </p:txBody>
-      </p:sp>
-      <p:sp>
-        <p:nvSpPr>
-          <p:cNvPr id="21" name="TextBox 20"/>
-          <p:cNvSpPr txBox="1"/>
-          <p:nvPr/>
-        </p:nvSpPr>
-        <p:spPr>
-          <a:xfrm>
-            <a:off x="6035040" y="5032248"/>
-            <a:ext cx="5486400" cy="365760"/>
-          </a:xfrm>
-          <a:prstGeom prst="rect">
-            <a:avLst/>
-          </a:prstGeom>
-          <a:noFill/>
-        </p:spPr>
-        <p:txBody>
-          <a:bodyPr wrap="square" anchor="t">
-            <a:spAutoFit/>
-          </a:bodyPr>
-          <a:lstStyle/>
-          <a:p>
-            <a:pPr algn="l">
-              <a:spcAft>
-                <a:spcPts val="0"/>
-              </a:spcAft>
-            </a:pPr>
-            <a:r>
-              <a:rPr sz="1200" b="0" i="0">
-                <a:solidFill>
-                  <a:srgbClr val="3A4A54"/>
-                </a:solidFill>
-                <a:latin typeface="Calibri"/>
-              </a:rPr>
-              <a:t>Secure sync across facilities and partners</a:t>
-            </a:r>
-          </a:p>
-        </p:txBody>
-      </p:sp>
-      <p:sp>
-        <p:nvSpPr>
-          <p:cNvPr id="22" name="Rectangle 21"/>
-          <p:cNvSpPr/>
-          <p:nvPr/>
-        </p:nvSpPr>
-        <p:spPr>
-          <a:xfrm>
-            <a:off x="5852160" y="5579364"/>
-            <a:ext cx="5852160" cy="766572"/>
-          </a:xfrm>
-          <a:prstGeom prst="rect">
-            <a:avLst/>
-          </a:prstGeom>
-          <a:solidFill>
-            <a:srgbClr val="FFFFFF"/>
-          </a:solidFill>
-          <a:ln w="9525">
-            <a:solidFill>
-              <a:srgbClr val="D0DCDC"/>
-            </a:solidFill>
-          </a:ln>
-          <a:effectLst/>
-        </p:spPr>
-        <p:style>
-          <a:lnRef idx="1">
-            <a:schemeClr val="accent1"/>
-          </a:lnRef>
-          <a:fillRef idx="3">
-            <a:schemeClr val="accent1"/>
-          </a:fillRef>
-          <a:effectRef idx="2">
-            <a:schemeClr val="accent1"/>
-          </a:effectRef>
-          <a:fontRef idx="minor">
-            <a:schemeClr val="lt1"/>
-          </a:fontRef>
-        </p:style>
-        <p:txBody>
-          <a:bodyPr rtlCol="0" anchor="ctr"/>
-          <a:lstStyle/>
-          <a:p>
-            <a:pPr algn="ctr"/>
-          </a:p>
-        </p:txBody>
-      </p:sp>
-      <p:sp>
-        <p:nvSpPr>
-          <p:cNvPr id="23" name="TextBox 22"/>
-          <p:cNvSpPr txBox="1"/>
-          <p:nvPr/>
-        </p:nvSpPr>
-        <p:spPr>
-          <a:xfrm>
-            <a:off x="6035040" y="5634228"/>
-            <a:ext cx="5486400" cy="274320"/>
-          </a:xfrm>
-          <a:prstGeom prst="rect">
-            <a:avLst/>
-          </a:prstGeom>
-          <a:noFill/>
-        </p:spPr>
-        <p:txBody>
-          <a:bodyPr wrap="square" anchor="t">
-            <a:spAutoFit/>
-          </a:bodyPr>
-          <a:lstStyle/>
-          <a:p>
-            <a:pPr algn="l">
-              <a:spcAft>
-                <a:spcPts val="0"/>
-              </a:spcAft>
-            </a:pPr>
-            <a:r>
-              <a:rPr sz="1400" b="1" i="0">
-                <a:solidFill>
-                  <a:srgbClr val="0D6E6E"/>
-                </a:solidFill>
-                <a:latin typeface="Calibri"/>
-              </a:rPr>
-              <a:t>Analytics Dashboards</a:t>
-            </a:r>
-          </a:p>
-        </p:txBody>
-      </p:sp>
-      <p:sp>
-        <p:nvSpPr>
-          <p:cNvPr id="24" name="TextBox 23"/>
-          <p:cNvSpPr txBox="1"/>
-          <p:nvPr/>
-        </p:nvSpPr>
-        <p:spPr>
-          <a:xfrm>
-            <a:off x="6035040" y="5908548"/>
-            <a:ext cx="5486400" cy="365760"/>
-          </a:xfrm>
-          <a:prstGeom prst="rect">
-            <a:avLst/>
-          </a:prstGeom>
-          <a:noFill/>
-        </p:spPr>
-        <p:txBody>
-          <a:bodyPr wrap="square" anchor="t">
-            <a:spAutoFit/>
-          </a:bodyPr>
-          <a:lstStyle/>
-          <a:p>
-            <a:pPr algn="l">
-              <a:spcAft>
-                <a:spcPts val="0"/>
-              </a:spcAft>
-            </a:pPr>
-            <a:r>
-              <a:rPr sz="1200" b="0" i="0">
-                <a:solidFill>
-                  <a:srgbClr val="3A4A54"/>
-                </a:solidFill>
-                <a:latin typeface="Calibri"/>
-              </a:rPr>
-              <a:t>Real-time views for clinics, districts, and NGOs</a:t>
-            </a:r>
-          </a:p>
-        </p:txBody>
-      </p:sp>
-      <p:sp>
-        <p:nvSpPr>
-          <p:cNvPr id="25" name="Rectangle 24"/>
-          <p:cNvSpPr/>
-          <p:nvPr/>
-        </p:nvSpPr>
-        <p:spPr>
-          <a:xfrm>
-            <a:off x="0" y="6565392"/>
-            <a:ext cx="12191695" cy="292608"/>
+            <a:off x="0" y="6583680"/>
+            <a:ext cx="12191695" cy="274320"/>
           </a:xfrm>
           <a:prstGeom prst="rect">
             <a:avLst/>
@@ -7636,7 +7114,6 @@
           <a:ln>
             <a:noFill/>
           </a:ln>
-          <a:effectLst/>
         </p:spPr>
         <p:style>
           <a:lnRef idx="1">
@@ -7662,14 +7139,14 @@
       </p:sp>
       <p:sp>
         <p:nvSpPr>
-          <p:cNvPr id="26" name="TextBox 25"/>
+          <p:cNvPr id="19" name="TextBox 18"/>
           <p:cNvSpPr txBox="1"/>
           <p:nvPr/>
         </p:nvSpPr>
         <p:spPr>
           <a:xfrm>
-            <a:off x="365760" y="6574536"/>
-            <a:ext cx="9144000" cy="274320"/>
+            <a:off x="365760" y="6592824"/>
+            <a:ext cx="9144000" cy="256032"/>
           </a:xfrm>
           <a:prstGeom prst="rect">
             <a:avLst/>
@@ -7677,16 +7154,12 @@
           <a:noFill/>
         </p:spPr>
         <p:txBody>
-          <a:bodyPr wrap="square" anchor="ctr">
+          <a:bodyPr wrap="square">
             <a:spAutoFit/>
           </a:bodyPr>
           <a:lstStyle/>
           <a:p>
-            <a:pPr algn="l">
-              <a:spcAft>
-                <a:spcPts val="0"/>
-              </a:spcAft>
-            </a:pPr>
+            <a:pPr algn="l"/>
             <a:r>
               <a:rPr sz="900" b="0" i="0">
                 <a:solidFill>
@@ -7694,21 +7167,21 @@
                 </a:solidFill>
                 <a:latin typeface="Calibri"/>
               </a:rPr>
-              <a:t>FairBanks FCHIP  |  Africa CDC African Epidemic Services (AE  |  Your health, our mission.</a:t>
-            </a:r>
-          </a:p>
-        </p:txBody>
-      </p:sp>
-      <p:sp>
-        <p:nvSpPr>
-          <p:cNvPr id="27" name="TextBox 26"/>
+              <a:t>FairBanks FCHIP | Africa CDC AES Fellowship | Your health, our mission.</a:t>
+            </a:r>
+          </a:p>
+        </p:txBody>
+      </p:sp>
+      <p:sp>
+        <p:nvSpPr>
+          <p:cNvPr id="20" name="TextBox 19"/>
           <p:cNvSpPr txBox="1"/>
           <p:nvPr/>
         </p:nvSpPr>
         <p:spPr>
           <a:xfrm>
-            <a:off x="11094415" y="6574536"/>
-            <a:ext cx="731520" cy="274320"/>
+            <a:off x="11460175" y="6592824"/>
+            <a:ext cx="457200" cy="256032"/>
           </a:xfrm>
           <a:prstGeom prst="rect">
             <a:avLst/>
@@ -7716,16 +7189,12 @@
           <a:noFill/>
         </p:spPr>
         <p:txBody>
-          <a:bodyPr wrap="square" anchor="ctr">
+          <a:bodyPr wrap="square">
             <a:spAutoFit/>
           </a:bodyPr>
           <a:lstStyle/>
           <a:p>
-            <a:pPr algn="r">
-              <a:spcAft>
-                <a:spcPts val="0"/>
-              </a:spcAft>
-            </a:pPr>
+            <a:pPr algn="r"/>
             <a:r>
               <a:rPr sz="900" b="0" i="0">
                 <a:solidFill>
@@ -7765,7 +7234,7 @@
         <p:spPr>
           <a:xfrm>
             <a:off x="0" y="0"/>
-            <a:ext cx="12191695" cy="960120"/>
+            <a:ext cx="12191695" cy="914400"/>
           </a:xfrm>
           <a:prstGeom prst="rect">
             <a:avLst/>
@@ -7776,7 +7245,6 @@
           <a:ln>
             <a:noFill/>
           </a:ln>
-          <a:effectLst/>
         </p:spPr>
         <p:style>
           <a:lnRef idx="1">
@@ -7809,7 +7277,7 @@
         <p:spPr>
           <a:xfrm>
             <a:off x="0" y="0"/>
-            <a:ext cx="164592" cy="960120"/>
+            <a:ext cx="137160" cy="914400"/>
           </a:xfrm>
           <a:prstGeom prst="rect">
             <a:avLst/>
@@ -7820,7 +7288,6 @@
           <a:ln>
             <a:noFill/>
           </a:ln>
-          <a:effectLst/>
         </p:spPr>
         <p:style>
           <a:lnRef idx="1">
@@ -7852,86 +7319,8 @@
         </p:nvSpPr>
         <p:spPr>
           <a:xfrm>
-            <a:off x="457200" y="109728"/>
-            <a:ext cx="10972800" cy="256032"/>
-          </a:xfrm>
-          <a:prstGeom prst="rect">
-            <a:avLst/>
-          </a:prstGeom>
-          <a:noFill/>
-        </p:spPr>
-        <p:txBody>
-          <a:bodyPr wrap="square" anchor="t">
-            <a:spAutoFit/>
-          </a:bodyPr>
-          <a:lstStyle/>
-          <a:p>
-            <a:pPr algn="l">
-              <a:spcAft>
-                <a:spcPts val="0"/>
-              </a:spcAft>
-            </a:pPr>
-            <a:r>
-              <a:rPr sz="1100" b="1" i="0">
-                <a:solidFill>
-                  <a:srgbClr val="C45C26"/>
-                </a:solidFill>
-                <a:latin typeface="Calibri"/>
-              </a:rPr>
-              <a:t>OUR MODEL</a:t>
-            </a:r>
-          </a:p>
-        </p:txBody>
-      </p:sp>
-      <p:sp>
-        <p:nvSpPr>
-          <p:cNvPr id="5" name="TextBox 4"/>
-          <p:cNvSpPr txBox="1"/>
-          <p:nvPr/>
-        </p:nvSpPr>
-        <p:spPr>
-          <a:xfrm>
-            <a:off x="457200" y="384048"/>
-            <a:ext cx="11247120" cy="475488"/>
-          </a:xfrm>
-          <a:prstGeom prst="rect">
-            <a:avLst/>
-          </a:prstGeom>
-          <a:noFill/>
-        </p:spPr>
-        <p:txBody>
-          <a:bodyPr wrap="square" anchor="t">
-            <a:spAutoFit/>
-          </a:bodyPr>
-          <a:lstStyle/>
-          <a:p>
-            <a:pPr algn="l">
-              <a:spcAft>
-                <a:spcPts val="0"/>
-              </a:spcAft>
-            </a:pPr>
-            <a:r>
-              <a:rPr sz="2200" b="1" i="0">
-                <a:solidFill>
-                  <a:srgbClr val="0A1F2E"/>
-                </a:solidFill>
-                <a:latin typeface="Calibri"/>
-              </a:rPr>
-              <a:t>Communities first — intelligence that serves care</a:t>
-            </a:r>
-          </a:p>
-        </p:txBody>
-      </p:sp>
-      <p:sp>
-        <p:nvSpPr>
-          <p:cNvPr id="6" name="TextBox 5"/>
-          <p:cNvSpPr txBox="1"/>
-          <p:nvPr/>
-        </p:nvSpPr>
-        <p:spPr>
-          <a:xfrm>
-            <a:off x="502920" y="1234440"/>
-            <a:ext cx="5760720" cy="5074920"/>
+            <a:off x="411480" y="91440"/>
+            <a:ext cx="10972800" cy="274320"/>
           </a:xfrm>
           <a:prstGeom prst="rect">
             <a:avLst/>
@@ -7944,106 +7333,57 @@
           </a:bodyPr>
           <a:lstStyle/>
           <a:p>
-            <a:pPr>
-              <a:spcAft>
-                <a:spcPts val="800"/>
-              </a:spcAft>
-            </a:pPr>
-            <a:r>
-              <a:rPr sz="1400">
-                <a:solidFill>
-                  <a:srgbClr val="1E2F38"/>
+            <a:pPr algn="l"/>
+            <a:r>
+              <a:rPr sz="1100" b="1" i="0">
+                <a:solidFill>
+                  <a:srgbClr val="C45C26"/>
                 </a:solidFill>
                 <a:latin typeface="Calibri"/>
               </a:rPr>
-              <a:t>•  Community members identify needs and own solutions</a:t>
-            </a:r>
-          </a:p>
-          <a:p>
-            <a:pPr>
-              <a:spcAft>
-                <a:spcPts val="800"/>
-              </a:spcAft>
-            </a:pPr>
-            <a:r>
-              <a:rPr sz="1400">
-                <a:solidFill>
-                  <a:srgbClr val="1E2F38"/>
+              <a:t>FIELD FOUNDATION</a:t>
+            </a:r>
+          </a:p>
+        </p:txBody>
+      </p:sp>
+      <p:sp>
+        <p:nvSpPr>
+          <p:cNvPr id="5" name="TextBox 4"/>
+          <p:cNvSpPr txBox="1"/>
+          <p:nvPr/>
+        </p:nvSpPr>
+        <p:spPr>
+          <a:xfrm>
+            <a:off x="411480" y="384048"/>
+            <a:ext cx="10972800" cy="457200"/>
+          </a:xfrm>
+          <a:prstGeom prst="rect">
+            <a:avLst/>
+          </a:prstGeom>
+          <a:noFill/>
+        </p:spPr>
+        <p:txBody>
+          <a:bodyPr wrap="square">
+            <a:spAutoFit/>
+          </a:bodyPr>
+          <a:lstStyle/>
+          <a:p>
+            <a:pPr algn="l"/>
+            <a:r>
+              <a:rPr sz="2400" b="1" i="0">
+                <a:solidFill>
+                  <a:srgbClr val="0A1F2E"/>
                 </a:solidFill>
                 <a:latin typeface="Calibri"/>
               </a:rPr>
-              <a:t>•  CHWs / VHTs bridge homes to clinics</a:t>
-            </a:r>
-          </a:p>
-          <a:p>
-            <a:pPr>
-              <a:spcAft>
-                <a:spcPts val="800"/>
-              </a:spcAft>
-            </a:pPr>
-            <a:r>
-              <a:rPr sz="1400">
-                <a:solidFill>
-                  <a:srgbClr val="1E2F38"/>
-                </a:solidFill>
-                <a:latin typeface="Calibri"/>
-              </a:rPr>
-              <a:t>•  FairBanks Community Reach programmes deliver outreach</a:t>
-            </a:r>
-          </a:p>
-          <a:p>
-            <a:pPr>
-              <a:spcAft>
-                <a:spcPts val="800"/>
-              </a:spcAft>
-            </a:pPr>
-            <a:r>
-              <a:rPr sz="1400">
-                <a:solidFill>
-                  <a:srgbClr val="1E2F38"/>
-                </a:solidFill>
-                <a:latin typeface="Calibri"/>
-              </a:rPr>
-              <a:t>•  FairBanks Medical Centre provides clinical care</a:t>
-            </a:r>
-          </a:p>
-          <a:p>
-            <a:pPr>
-              <a:spcAft>
-                <a:spcPts val="800"/>
-              </a:spcAft>
-            </a:pPr>
-            <a:r>
-              <a:rPr sz="1400">
-                <a:solidFill>
-                  <a:srgbClr val="1E2F38"/>
-                </a:solidFill>
-                <a:latin typeface="Calibri"/>
-              </a:rPr>
-              <a:t>•  Research, partnerships, and skills strengthen the system</a:t>
-            </a:r>
-          </a:p>
-          <a:p>
-            <a:pPr>
-              <a:spcAft>
-                <a:spcPts val="800"/>
-              </a:spcAft>
-            </a:pPr>
-            <a:r>
-              <a:rPr sz="1400">
-                <a:solidFill>
-                  <a:srgbClr val="1E2F38"/>
-                </a:solidFill>
-                <a:latin typeface="Calibri"/>
-              </a:rPr>
-              <a:t>•  Livelihoods and empowerment make health gains last</a:t>
+              <a:t>Live community health ecosystem in Uganda</a:t>
             </a:r>
           </a:p>
         </p:txBody>
       </p:sp>
       <p:pic>
         <p:nvPicPr>
-          <p:cNvPr id="7" name="Picture 6" descr="gis_hotspots_opt.jpg"/>
+          <p:cNvPr id="6" name="Picture 5" descr="outreach_facilitator_canopy_01_opt.jpg"/>
           <p:cNvPicPr>
             <a:picLocks noChangeAspect="1"/>
           </p:cNvPicPr>
@@ -8057,14 +7397,53 @@
         </p:blipFill>
         <p:spPr>
           <a:xfrm>
-            <a:off x="6492240" y="2035160"/>
-            <a:ext cx="5212080" cy="3473479"/>
+            <a:off x="411480" y="1844671"/>
+            <a:ext cx="5303520" cy="3534417"/>
           </a:xfrm>
           <a:prstGeom prst="rect">
             <a:avLst/>
           </a:prstGeom>
         </p:spPr>
       </p:pic>
+      <p:sp>
+        <p:nvSpPr>
+          <p:cNvPr id="7" name="TextBox 6"/>
+          <p:cNvSpPr txBox="1"/>
+          <p:nvPr/>
+        </p:nvSpPr>
+        <p:spPr>
+          <a:xfrm>
+            <a:off x="5943600" y="1097280"/>
+            <a:ext cx="5760720" cy="5029200"/>
+          </a:xfrm>
+          <a:prstGeom prst="rect">
+            <a:avLst/>
+          </a:prstGeom>
+          <a:noFill/>
+        </p:spPr>
+        <p:txBody>
+          <a:bodyPr wrap="square">
+            <a:spAutoFit/>
+          </a:bodyPr>
+          <a:lstStyle/>
+          <a:p>
+            <a:pPr algn="l"/>
+            <a:r>
+              <a:rPr sz="1600" b="0" i="0">
+                <a:solidFill>
+                  <a:srgbClr val="1E2F38"/>
+                </a:solidFill>
+                <a:latin typeface="Calibri"/>
+              </a:rPr>
+              <a:t>• FairBanks Medical Centre + Community Reach
+• CHW/VHT networks in Kampala catchments
+• Maternal, child, chronic, and outreach programmes
+• FCHIP intelligence layer in development
+• Employer ready to host field placement</a:t>
+            </a:r>
+          </a:p>
+        </p:txBody>
+      </p:sp>
       <p:sp>
         <p:nvSpPr>
           <p:cNvPr id="8" name="Rectangle 7"/>
@@ -8073,8 +7452,8 @@
         </p:nvSpPr>
         <p:spPr>
           <a:xfrm>
-            <a:off x="0" y="6565392"/>
-            <a:ext cx="12191695" cy="292608"/>
+            <a:off x="0" y="6583680"/>
+            <a:ext cx="12191695" cy="274320"/>
           </a:xfrm>
           <a:prstGeom prst="rect">
             <a:avLst/>
@@ -8085,7 +7464,6 @@
           <a:ln>
             <a:noFill/>
           </a:ln>
-          <a:effectLst/>
         </p:spPr>
         <p:style>
           <a:lnRef idx="1">
@@ -8117,8 +7495,8 @@
         </p:nvSpPr>
         <p:spPr>
           <a:xfrm>
-            <a:off x="365760" y="6574536"/>
-            <a:ext cx="9144000" cy="274320"/>
+            <a:off x="365760" y="6592824"/>
+            <a:ext cx="9144000" cy="256032"/>
           </a:xfrm>
           <a:prstGeom prst="rect">
             <a:avLst/>
@@ -8126,16 +7504,12 @@
           <a:noFill/>
         </p:spPr>
         <p:txBody>
-          <a:bodyPr wrap="square" anchor="ctr">
+          <a:bodyPr wrap="square">
             <a:spAutoFit/>
           </a:bodyPr>
           <a:lstStyle/>
           <a:p>
-            <a:pPr algn="l">
-              <a:spcAft>
-                <a:spcPts val="0"/>
-              </a:spcAft>
-            </a:pPr>
+            <a:pPr algn="l"/>
             <a:r>
               <a:rPr sz="900" b="0" i="0">
                 <a:solidFill>
@@ -8143,7 +7517,7 @@
                 </a:solidFill>
                 <a:latin typeface="Calibri"/>
               </a:rPr>
-              <a:t>FairBanks FCHIP  |  Africa CDC African Epidemic Services (AE  |  Your health, our mission.</a:t>
+              <a:t>FairBanks FCHIP | Africa CDC AES Fellowship | Your health, our mission.</a:t>
             </a:r>
           </a:p>
         </p:txBody>
@@ -8156,8 +7530,8 @@
         </p:nvSpPr>
         <p:spPr>
           <a:xfrm>
-            <a:off x="11094415" y="6574536"/>
-            <a:ext cx="731520" cy="274320"/>
+            <a:off x="11460175" y="6592824"/>
+            <a:ext cx="457200" cy="256032"/>
           </a:xfrm>
           <a:prstGeom prst="rect">
             <a:avLst/>
@@ -8165,16 +7539,12 @@
           <a:noFill/>
         </p:spPr>
         <p:txBody>
-          <a:bodyPr wrap="square" anchor="ctr">
+          <a:bodyPr wrap="square">
             <a:spAutoFit/>
           </a:bodyPr>
           <a:lstStyle/>
           <a:p>
-            <a:pPr algn="r">
-              <a:spcAft>
-                <a:spcPts val="0"/>
-              </a:spcAft>
-            </a:pPr>
+            <a:pPr algn="r"/>
             <a:r>
               <a:rPr sz="900" b="0" i="0">
                 <a:solidFill>

--- a/applications/africa-cdc/documents/africa-cdc_ppt.pptx
+++ b/applications/africa-cdc/documents/africa-cdc_ppt.pptx
@@ -3208,7 +3208,7 @@
         <p:spPr>
           <a:xfrm>
             <a:off x="548640" y="4389120"/>
-            <a:ext cx="10972800" cy="594360"/>
+            <a:ext cx="10972800" cy="502920"/>
           </a:xfrm>
           <a:prstGeom prst="rect">
             <a:avLst/>
@@ -3223,7 +3223,7 @@
           <a:p>
             <a:pPr algn="l"/>
             <a:r>
-              <a:rPr sz="2400" b="1" i="0">
+              <a:rPr sz="2200" b="1" i="0">
                 <a:solidFill>
                   <a:srgbClr val="FFFFFF"/>
                 </a:solidFill>
@@ -3242,8 +3242,8 @@
         </p:nvSpPr>
         <p:spPr>
           <a:xfrm>
-            <a:off x="548640" y="5166360"/>
-            <a:ext cx="10972800" cy="365760"/>
+            <a:off x="548640" y="4892040"/>
+            <a:ext cx="10972800" cy="274320"/>
           </a:xfrm>
           <a:prstGeom prst="rect">
             <a:avLst/>
@@ -3258,6 +3258,41 @@
           <a:p>
             <a:pPr algn="l"/>
             <a:r>
+              <a:rPr sz="1300" b="1" i="1">
+                <a:solidFill>
+                  <a:srgbClr val="F2C79B"/>
+                </a:solidFill>
+                <a:latin typeface="Calibri"/>
+              </a:rPr>
+              <a:t>FairBanks Community Health Intelligence Platform (FCHIP)</a:t>
+            </a:r>
+          </a:p>
+        </p:txBody>
+      </p:sp>
+      <p:sp>
+        <p:nvSpPr>
+          <p:cNvPr id="7" name="TextBox 6"/>
+          <p:cNvSpPr txBox="1"/>
+          <p:nvPr/>
+        </p:nvSpPr>
+        <p:spPr>
+          <a:xfrm>
+            <a:off x="548640" y="5257800"/>
+            <a:ext cx="10972800" cy="320040"/>
+          </a:xfrm>
+          <a:prstGeom prst="rect">
+            <a:avLst/>
+          </a:prstGeom>
+          <a:noFill/>
+        </p:spPr>
+        <p:txBody>
+          <a:bodyPr wrap="square">
+            <a:spAutoFit/>
+          </a:bodyPr>
+          <a:lstStyle/>
+          <a:p>
+            <a:pPr algn="l"/>
+            <a:r>
               <a:rPr sz="1400" b="1" i="0">
                 <a:solidFill>
                   <a:srgbClr val="FFFFFF"/>
@@ -3271,7 +3306,7 @@
       </p:sp>
       <p:sp>
         <p:nvSpPr>
-          <p:cNvPr id="7" name="TextBox 6"/>
+          <p:cNvPr id="8" name="TextBox 7"/>
           <p:cNvSpPr txBox="1"/>
           <p:nvPr/>
         </p:nvSpPr>

--- a/applications/africa-cdc/documents/africa-cdc_ppt.pptx
+++ b/applications/africa-cdc/documents/africa-cdc_ppt.pptx
@@ -3186,7 +3186,17 @@
           </a:bodyPr>
           <a:lstStyle/>
           <a:p>
-            <a:pPr algn="l"/>
+            <a:pPr algn="l">
+              <a:lnSpc>
+                <a:spcPct val="115000"/>
+              </a:lnSpc>
+              <a:spcBef>
+                <a:spcPts val="0"/>
+              </a:spcBef>
+              <a:spcAft>
+                <a:spcPts val="200"/>
+              </a:spcAft>
+            </a:pPr>
             <a:r>
               <a:rPr sz="1300" b="1" i="0">
                 <a:solidFill>
@@ -3221,7 +3231,17 @@
           </a:bodyPr>
           <a:lstStyle/>
           <a:p>
-            <a:pPr algn="l"/>
+            <a:pPr algn="l">
+              <a:lnSpc>
+                <a:spcPct val="115000"/>
+              </a:lnSpc>
+              <a:spcBef>
+                <a:spcPts val="0"/>
+              </a:spcBef>
+              <a:spcAft>
+                <a:spcPts val="200"/>
+              </a:spcAft>
+            </a:pPr>
             <a:r>
               <a:rPr sz="2200" b="1" i="0">
                 <a:solidFill>
@@ -3256,7 +3276,17 @@
           </a:bodyPr>
           <a:lstStyle/>
           <a:p>
-            <a:pPr algn="l"/>
+            <a:pPr algn="l">
+              <a:lnSpc>
+                <a:spcPct val="115000"/>
+              </a:lnSpc>
+              <a:spcBef>
+                <a:spcPts val="0"/>
+              </a:spcBef>
+              <a:spcAft>
+                <a:spcPts val="200"/>
+              </a:spcAft>
+            </a:pPr>
             <a:r>
               <a:rPr sz="1300" b="1" i="1">
                 <a:solidFill>
@@ -3291,7 +3321,17 @@
           </a:bodyPr>
           <a:lstStyle/>
           <a:p>
-            <a:pPr algn="l"/>
+            <a:pPr algn="l">
+              <a:lnSpc>
+                <a:spcPct val="115000"/>
+              </a:lnSpc>
+              <a:spcBef>
+                <a:spcPts val="0"/>
+              </a:spcBef>
+              <a:spcAft>
+                <a:spcPts val="200"/>
+              </a:spcAft>
+            </a:pPr>
             <a:r>
               <a:rPr sz="1400" b="1" i="0">
                 <a:solidFill>
@@ -3326,7 +3366,17 @@
           </a:bodyPr>
           <a:lstStyle/>
           <a:p>
-            <a:pPr algn="l"/>
+            <a:pPr algn="l">
+              <a:lnSpc>
+                <a:spcPct val="115000"/>
+              </a:lnSpc>
+              <a:spcBef>
+                <a:spcPts val="0"/>
+              </a:spcBef>
+              <a:spcAft>
+                <a:spcPts val="200"/>
+              </a:spcAft>
+            </a:pPr>
             <a:r>
               <a:rPr sz="1200" b="0" i="0">
                 <a:solidFill>
@@ -3446,7 +3496,17 @@
           </a:bodyPr>
           <a:lstStyle/>
           <a:p>
-            <a:pPr algn="l"/>
+            <a:pPr algn="l">
+              <a:lnSpc>
+                <a:spcPct val="115000"/>
+              </a:lnSpc>
+              <a:spcBef>
+                <a:spcPts val="0"/>
+              </a:spcBef>
+              <a:spcAft>
+                <a:spcPts val="200"/>
+              </a:spcAft>
+            </a:pPr>
             <a:r>
               <a:rPr sz="2400" b="1" i="0">
                 <a:solidFill>
@@ -3481,7 +3541,17 @@
           </a:bodyPr>
           <a:lstStyle/>
           <a:p>
-            <a:pPr algn="l"/>
+            <a:pPr algn="l">
+              <a:lnSpc>
+                <a:spcPct val="115000"/>
+              </a:lnSpc>
+              <a:spcBef>
+                <a:spcPts val="0"/>
+              </a:spcBef>
+              <a:spcAft>
+                <a:spcPts val="200"/>
+              </a:spcAft>
+            </a:pPr>
             <a:r>
               <a:rPr sz="1400" b="1" i="0">
                 <a:solidFill>
@@ -3516,7 +3586,17 @@
           </a:bodyPr>
           <a:lstStyle/>
           <a:p>
-            <a:pPr algn="l"/>
+            <a:pPr algn="l">
+              <a:lnSpc>
+                <a:spcPct val="115000"/>
+              </a:lnSpc>
+              <a:spcBef>
+                <a:spcPts val="0"/>
+              </a:spcBef>
+              <a:spcAft>
+                <a:spcPts val="200"/>
+              </a:spcAft>
+            </a:pPr>
             <a:r>
               <a:rPr sz="1200" b="0" i="0">
                 <a:solidFill>
@@ -3655,7 +3735,17 @@
           </a:bodyPr>
           <a:lstStyle/>
           <a:p>
-            <a:pPr algn="l"/>
+            <a:pPr algn="l">
+              <a:lnSpc>
+                <a:spcPct val="115000"/>
+              </a:lnSpc>
+              <a:spcBef>
+                <a:spcPts val="0"/>
+              </a:spcBef>
+              <a:spcAft>
+                <a:spcPts val="200"/>
+              </a:spcAft>
+            </a:pPr>
             <a:r>
               <a:rPr sz="1100" b="1" i="0">
                 <a:solidFill>
@@ -3690,7 +3780,17 @@
           </a:bodyPr>
           <a:lstStyle/>
           <a:p>
-            <a:pPr algn="l"/>
+            <a:pPr algn="l">
+              <a:lnSpc>
+                <a:spcPct val="115000"/>
+              </a:lnSpc>
+              <a:spcBef>
+                <a:spcPts val="0"/>
+              </a:spcBef>
+              <a:spcAft>
+                <a:spcPts val="200"/>
+              </a:spcAft>
+            </a:pPr>
             <a:r>
               <a:rPr sz="2400" b="1" i="0">
                 <a:solidFill>
@@ -3725,19 +3825,113 @@
           </a:bodyPr>
           <a:lstStyle/>
           <a:p>
-            <a:pPr algn="l"/>
-            <a:r>
-              <a:rPr sz="1700" b="0" i="0">
+            <a:pPr algn="l">
+              <a:lnSpc>
+                <a:spcPct val="128000"/>
+              </a:lnSpc>
+              <a:spcBef>
+                <a:spcPts val="0"/>
+              </a:spcBef>
+              <a:spcAft>
+                <a:spcPts val="1400"/>
+              </a:spcAft>
+            </a:pPr>
+            <a:r>
+              <a:rPr sz="2600" b="0" i="0">
                 <a:solidFill>
                   <a:srgbClr val="1E2F38"/>
                 </a:solidFill>
                 <a:latin typeface="Calibri"/>
               </a:rPr>
-              <a:t>• 3 months core training in Addis Ababa
-• 21 months field placement with employer support
-• Epidemiology or Public Health Informatics track
-• Stipend, travel, insurance, hardware, software
-• African Union citizens under 35 in public health</a:t>
+              <a:t>• 3 months core training in Addis Ababa</a:t>
+            </a:r>
+          </a:p>
+          <a:p>
+            <a:pPr algn="l">
+              <a:lnSpc>
+                <a:spcPct val="128000"/>
+              </a:lnSpc>
+              <a:spcBef>
+                <a:spcPts val="0"/>
+              </a:spcBef>
+              <a:spcAft>
+                <a:spcPts val="1400"/>
+              </a:spcAft>
+            </a:pPr>
+            <a:r>
+              <a:rPr sz="2600" b="0" i="0">
+                <a:solidFill>
+                  <a:srgbClr val="1E2F38"/>
+                </a:solidFill>
+                <a:latin typeface="Calibri"/>
+              </a:rPr>
+              <a:t>• 21 months field placement with employer support</a:t>
+            </a:r>
+          </a:p>
+          <a:p>
+            <a:pPr algn="l">
+              <a:lnSpc>
+                <a:spcPct val="128000"/>
+              </a:lnSpc>
+              <a:spcBef>
+                <a:spcPts val="0"/>
+              </a:spcBef>
+              <a:spcAft>
+                <a:spcPts val="1400"/>
+              </a:spcAft>
+            </a:pPr>
+            <a:r>
+              <a:rPr sz="2600" b="0" i="0">
+                <a:solidFill>
+                  <a:srgbClr val="1E2F38"/>
+                </a:solidFill>
+                <a:latin typeface="Calibri"/>
+              </a:rPr>
+              <a:t>• Epidemiology or Public Health Informatics track</a:t>
+            </a:r>
+          </a:p>
+          <a:p>
+            <a:pPr algn="l">
+              <a:lnSpc>
+                <a:spcPct val="128000"/>
+              </a:lnSpc>
+              <a:spcBef>
+                <a:spcPts val="0"/>
+              </a:spcBef>
+              <a:spcAft>
+                <a:spcPts val="1400"/>
+              </a:spcAft>
+            </a:pPr>
+            <a:r>
+              <a:rPr sz="2600" b="0" i="0">
+                <a:solidFill>
+                  <a:srgbClr val="1E2F38"/>
+                </a:solidFill>
+                <a:latin typeface="Calibri"/>
+              </a:rPr>
+              <a:t>• Stipend, travel, insurance, hardware, software</a:t>
+            </a:r>
+          </a:p>
+          <a:p>
+            <a:pPr algn="l">
+              <a:lnSpc>
+                <a:spcPct val="128000"/>
+              </a:lnSpc>
+              <a:spcBef>
+                <a:spcPts val="0"/>
+              </a:spcBef>
+              <a:spcAft>
+                <a:spcPts val="200"/>
+              </a:spcAft>
+            </a:pPr>
+            <a:r>
+              <a:rPr sz="2600" b="0" i="0">
+                <a:solidFill>
+                  <a:srgbClr val="1E2F38"/>
+                </a:solidFill>
+                <a:latin typeface="Calibri"/>
+              </a:rPr>
+              <a:t>• African Union citizens under 35 in public health</a:t>
             </a:r>
           </a:p>
         </p:txBody>
@@ -3831,7 +4025,17 @@
           </a:bodyPr>
           <a:lstStyle/>
           <a:p>
-            <a:pPr algn="l"/>
+            <a:pPr algn="l">
+              <a:lnSpc>
+                <a:spcPct val="115000"/>
+              </a:lnSpc>
+              <a:spcBef>
+                <a:spcPts val="0"/>
+              </a:spcBef>
+              <a:spcAft>
+                <a:spcPts val="200"/>
+              </a:spcAft>
+            </a:pPr>
             <a:r>
               <a:rPr sz="900" b="0" i="0">
                 <a:solidFill>
@@ -3866,7 +4070,17 @@
           </a:bodyPr>
           <a:lstStyle/>
           <a:p>
-            <a:pPr algn="r"/>
+            <a:pPr algn="r">
+              <a:lnSpc>
+                <a:spcPct val="115000"/>
+              </a:lnSpc>
+              <a:spcBef>
+                <a:spcPts val="0"/>
+              </a:spcBef>
+              <a:spcAft>
+                <a:spcPts val="200"/>
+              </a:spcAft>
+            </a:pPr>
             <a:r>
               <a:rPr sz="900" b="0" i="0">
                 <a:solidFill>
@@ -4005,7 +4219,17 @@
           </a:bodyPr>
           <a:lstStyle/>
           <a:p>
-            <a:pPr algn="l"/>
+            <a:pPr algn="l">
+              <a:lnSpc>
+                <a:spcPct val="115000"/>
+              </a:lnSpc>
+              <a:spcBef>
+                <a:spcPts val="0"/>
+              </a:spcBef>
+              <a:spcAft>
+                <a:spcPts val="200"/>
+              </a:spcAft>
+            </a:pPr>
             <a:r>
               <a:rPr sz="1100" b="1" i="0">
                 <a:solidFill>
@@ -4040,7 +4264,17 @@
           </a:bodyPr>
           <a:lstStyle/>
           <a:p>
-            <a:pPr algn="l"/>
+            <a:pPr algn="l">
+              <a:lnSpc>
+                <a:spcPct val="115000"/>
+              </a:lnSpc>
+              <a:spcBef>
+                <a:spcPts val="0"/>
+              </a:spcBef>
+              <a:spcAft>
+                <a:spcPts val="200"/>
+              </a:spcAft>
+            </a:pPr>
             <a:r>
               <a:rPr sz="2400" b="1" i="0">
                 <a:solidFill>
@@ -4099,16 +4333,47 @@
           </a:bodyPr>
           <a:lstStyle/>
           <a:p>
-            <a:pPr algn="l"/>
-            <a:r>
-              <a:rPr sz="1600" b="0" i="0">
+            <a:pPr algn="l">
+              <a:lnSpc>
+                <a:spcPct val="128000"/>
+              </a:lnSpc>
+              <a:spcBef>
+                <a:spcPts val="0"/>
+              </a:spcBef>
+              <a:spcAft>
+                <a:spcPts val="1400"/>
+              </a:spcAft>
+            </a:pPr>
+            <a:r>
+              <a:rPr sz="2600" b="0" i="0">
                 <a:solidFill>
                   <a:srgbClr val="3A4A54"/>
                 </a:solidFill>
                 <a:latin typeface="Calibri"/>
               </a:rPr>
-              <a:t>Community signals from CHWs only become action with investigation discipline, trend analysis, and informatics pipelines.
-FairBanks lives inside primary care — the right place to grow Africa's epidemic readiness.</a:t>
+              <a:t>Community signals from CHWs only become action with investigation discipline, trend analysis, and informatics pipelines.</a:t>
+            </a:r>
+          </a:p>
+          <a:p>
+            <a:pPr algn="l">
+              <a:lnSpc>
+                <a:spcPct val="128000"/>
+              </a:lnSpc>
+              <a:spcBef>
+                <a:spcPts val="0"/>
+              </a:spcBef>
+              <a:spcAft>
+                <a:spcPts val="200"/>
+              </a:spcAft>
+            </a:pPr>
+            <a:r>
+              <a:rPr sz="2600" b="0" i="0">
+                <a:solidFill>
+                  <a:srgbClr val="3A4A54"/>
+                </a:solidFill>
+                <a:latin typeface="Calibri"/>
+              </a:rPr>
+              <a:t>FairBanks lives inside primary care — the right place to grow Africa's epidemic readiness.</a:t>
             </a:r>
           </a:p>
         </p:txBody>
@@ -4178,7 +4443,17 @@
           </a:bodyPr>
           <a:lstStyle/>
           <a:p>
-            <a:pPr algn="l"/>
+            <a:pPr algn="l">
+              <a:lnSpc>
+                <a:spcPct val="115000"/>
+              </a:lnSpc>
+              <a:spcBef>
+                <a:spcPts val="0"/>
+              </a:spcBef>
+              <a:spcAft>
+                <a:spcPts val="200"/>
+              </a:spcAft>
+            </a:pPr>
             <a:r>
               <a:rPr sz="900" b="0" i="0">
                 <a:solidFill>
@@ -4213,7 +4488,17 @@
           </a:bodyPr>
           <a:lstStyle/>
           <a:p>
-            <a:pPr algn="r"/>
+            <a:pPr algn="r">
+              <a:lnSpc>
+                <a:spcPct val="115000"/>
+              </a:lnSpc>
+              <a:spcBef>
+                <a:spcPts val="0"/>
+              </a:spcBef>
+              <a:spcAft>
+                <a:spcPts val="200"/>
+              </a:spcAft>
+            </a:pPr>
             <a:r>
               <a:rPr sz="900" b="0" i="0">
                 <a:solidFill>
@@ -4352,7 +4637,17 @@
           </a:bodyPr>
           <a:lstStyle/>
           <a:p>
-            <a:pPr algn="l"/>
+            <a:pPr algn="l">
+              <a:lnSpc>
+                <a:spcPct val="115000"/>
+              </a:lnSpc>
+              <a:spcBef>
+                <a:spcPts val="0"/>
+              </a:spcBef>
+              <a:spcAft>
+                <a:spcPts val="200"/>
+              </a:spcAft>
+            </a:pPr>
             <a:r>
               <a:rPr sz="1100" b="1" i="0">
                 <a:solidFill>
@@ -4387,7 +4682,17 @@
           </a:bodyPr>
           <a:lstStyle/>
           <a:p>
-            <a:pPr algn="l"/>
+            <a:pPr algn="l">
+              <a:lnSpc>
+                <a:spcPct val="115000"/>
+              </a:lnSpc>
+              <a:spcBef>
+                <a:spcPts val="0"/>
+              </a:spcBef>
+              <a:spcAft>
+                <a:spcPts val="200"/>
+              </a:spcAft>
+            </a:pPr>
             <a:r>
               <a:rPr sz="2400" b="1" i="0">
                 <a:solidFill>
@@ -4446,18 +4751,91 @@
           </a:bodyPr>
           <a:lstStyle/>
           <a:p>
-            <a:pPr algn="l"/>
-            <a:r>
-              <a:rPr sz="1500" b="0" i="0">
+            <a:pPr algn="l">
+              <a:lnSpc>
+                <a:spcPct val="128000"/>
+              </a:lnSpc>
+              <a:spcBef>
+                <a:spcPts val="0"/>
+              </a:spcBef>
+              <a:spcAft>
+                <a:spcPts val="1400"/>
+              </a:spcAft>
+            </a:pPr>
+            <a:r>
+              <a:rPr sz="2600" b="0" i="0">
                 <a:solidFill>
                   <a:srgbClr val="3A4A54"/>
                 </a:solidFill>
                 <a:latin typeface="Calibri"/>
               </a:rPr>
-              <a:t>Standardise outbreak workflows
-Improve CHW data quality
-Cascade training to supervisors
-Validate FCHIP alerts with surveillance methods</a:t>
+              <a:t>Standardise outbreak workflows</a:t>
+            </a:r>
+          </a:p>
+          <a:p>
+            <a:pPr algn="l">
+              <a:lnSpc>
+                <a:spcPct val="128000"/>
+              </a:lnSpc>
+              <a:spcBef>
+                <a:spcPts val="0"/>
+              </a:spcBef>
+              <a:spcAft>
+                <a:spcPts val="1400"/>
+              </a:spcAft>
+            </a:pPr>
+            <a:r>
+              <a:rPr sz="2600" b="0" i="0">
+                <a:solidFill>
+                  <a:srgbClr val="3A4A54"/>
+                </a:solidFill>
+                <a:latin typeface="Calibri"/>
+              </a:rPr>
+              <a:t>Improve CHW data quality</a:t>
+            </a:r>
+          </a:p>
+          <a:p>
+            <a:pPr algn="l">
+              <a:lnSpc>
+                <a:spcPct val="128000"/>
+              </a:lnSpc>
+              <a:spcBef>
+                <a:spcPts val="0"/>
+              </a:spcBef>
+              <a:spcAft>
+                <a:spcPts val="1400"/>
+              </a:spcAft>
+            </a:pPr>
+            <a:r>
+              <a:rPr sz="2600" b="0" i="0">
+                <a:solidFill>
+                  <a:srgbClr val="3A4A54"/>
+                </a:solidFill>
+                <a:latin typeface="Calibri"/>
+              </a:rPr>
+              <a:t>Cascade training to supervisors</a:t>
+            </a:r>
+          </a:p>
+          <a:p>
+            <a:pPr algn="l">
+              <a:lnSpc>
+                <a:spcPct val="128000"/>
+              </a:lnSpc>
+              <a:spcBef>
+                <a:spcPts val="0"/>
+              </a:spcBef>
+              <a:spcAft>
+                <a:spcPts val="200"/>
+              </a:spcAft>
+            </a:pPr>
+            <a:r>
+              <a:rPr sz="2600" b="0" i="0">
+                <a:solidFill>
+                  <a:srgbClr val="3A4A54"/>
+                </a:solidFill>
+                <a:latin typeface="Calibri"/>
+              </a:rPr>
+              <a:t>Validate FCHIP alerts with surveillance methods</a:t>
             </a:r>
           </a:p>
         </p:txBody>
@@ -4527,7 +4905,17 @@
           </a:bodyPr>
           <a:lstStyle/>
           <a:p>
-            <a:pPr algn="l"/>
+            <a:pPr algn="l">
+              <a:lnSpc>
+                <a:spcPct val="115000"/>
+              </a:lnSpc>
+              <a:spcBef>
+                <a:spcPts val="0"/>
+              </a:spcBef>
+              <a:spcAft>
+                <a:spcPts val="200"/>
+              </a:spcAft>
+            </a:pPr>
             <a:r>
               <a:rPr sz="900" b="0" i="0">
                 <a:solidFill>
@@ -4562,7 +4950,17 @@
           </a:bodyPr>
           <a:lstStyle/>
           <a:p>
-            <a:pPr algn="r"/>
+            <a:pPr algn="r">
+              <a:lnSpc>
+                <a:spcPct val="115000"/>
+              </a:lnSpc>
+              <a:spcBef>
+                <a:spcPts val="0"/>
+              </a:spcBef>
+              <a:spcAft>
+                <a:spcPts val="200"/>
+              </a:spcAft>
+            </a:pPr>
             <a:r>
               <a:rPr sz="900" b="0" i="0">
                 <a:solidFill>
@@ -4701,7 +5099,17 @@
           </a:bodyPr>
           <a:lstStyle/>
           <a:p>
-            <a:pPr algn="l"/>
+            <a:pPr algn="l">
+              <a:lnSpc>
+                <a:spcPct val="115000"/>
+              </a:lnSpc>
+              <a:spcBef>
+                <a:spcPts val="0"/>
+              </a:spcBef>
+              <a:spcAft>
+                <a:spcPts val="200"/>
+              </a:spcAft>
+            </a:pPr>
             <a:r>
               <a:rPr sz="1100" b="1" i="0">
                 <a:solidFill>
@@ -4736,7 +5144,17 @@
           </a:bodyPr>
           <a:lstStyle/>
           <a:p>
-            <a:pPr algn="l"/>
+            <a:pPr algn="l">
+              <a:lnSpc>
+                <a:spcPct val="115000"/>
+              </a:lnSpc>
+              <a:spcBef>
+                <a:spcPts val="0"/>
+              </a:spcBef>
+              <a:spcAft>
+                <a:spcPts val="200"/>
+              </a:spcAft>
+            </a:pPr>
             <a:r>
               <a:rPr sz="2400" b="1" i="0">
                 <a:solidFill>
@@ -4816,7 +5234,17 @@
           </a:bodyPr>
           <a:lstStyle/>
           <a:p>
-            <a:pPr algn="l"/>
+            <a:pPr algn="l">
+              <a:lnSpc>
+                <a:spcPct val="115000"/>
+              </a:lnSpc>
+              <a:spcBef>
+                <a:spcPts val="0"/>
+              </a:spcBef>
+              <a:spcAft>
+                <a:spcPts val="200"/>
+              </a:spcAft>
+            </a:pPr>
             <a:r>
               <a:rPr sz="1600" b="1" i="0">
                 <a:solidFill>
@@ -4851,9 +5279,19 @@
           </a:bodyPr>
           <a:lstStyle/>
           <a:p>
-            <a:pPr algn="l"/>
-            <a:r>
-              <a:rPr sz="1400" b="0" i="0">
+            <a:pPr algn="l">
+              <a:lnSpc>
+                <a:spcPct val="128000"/>
+              </a:lnSpc>
+              <a:spcBef>
+                <a:spcPts val="0"/>
+              </a:spcBef>
+              <a:spcAft>
+                <a:spcPts val="200"/>
+              </a:spcAft>
+            </a:pPr>
+            <a:r>
+              <a:rPr sz="2600" b="0" i="0">
                 <a:solidFill>
                   <a:srgbClr val="3A4A54"/>
                 </a:solidFill>
@@ -4931,7 +5369,17 @@
           </a:bodyPr>
           <a:lstStyle/>
           <a:p>
-            <a:pPr algn="l"/>
+            <a:pPr algn="l">
+              <a:lnSpc>
+                <a:spcPct val="115000"/>
+              </a:lnSpc>
+              <a:spcBef>
+                <a:spcPts val="0"/>
+              </a:spcBef>
+              <a:spcAft>
+                <a:spcPts val="200"/>
+              </a:spcAft>
+            </a:pPr>
             <a:r>
               <a:rPr sz="1600" b="1" i="0">
                 <a:solidFill>
@@ -4966,9 +5414,19 @@
           </a:bodyPr>
           <a:lstStyle/>
           <a:p>
-            <a:pPr algn="l"/>
-            <a:r>
-              <a:rPr sz="1400" b="0" i="0">
+            <a:pPr algn="l">
+              <a:lnSpc>
+                <a:spcPct val="128000"/>
+              </a:lnSpc>
+              <a:spcBef>
+                <a:spcPts val="0"/>
+              </a:spcBef>
+              <a:spcAft>
+                <a:spcPts val="200"/>
+              </a:spcAft>
+            </a:pPr>
+            <a:r>
+              <a:rPr sz="2500" b="0" i="0">
                 <a:solidFill>
                   <a:srgbClr val="3A4A54"/>
                 </a:solidFill>
@@ -5044,7 +5502,17 @@
           </a:bodyPr>
           <a:lstStyle/>
           <a:p>
-            <a:pPr algn="l"/>
+            <a:pPr algn="l">
+              <a:lnSpc>
+                <a:spcPct val="115000"/>
+              </a:lnSpc>
+              <a:spcBef>
+                <a:spcPts val="0"/>
+              </a:spcBef>
+              <a:spcAft>
+                <a:spcPts val="200"/>
+              </a:spcAft>
+            </a:pPr>
             <a:r>
               <a:rPr sz="900" b="0" i="0">
                 <a:solidFill>
@@ -5079,7 +5547,17 @@
           </a:bodyPr>
           <a:lstStyle/>
           <a:p>
-            <a:pPr algn="r"/>
+            <a:pPr algn="r">
+              <a:lnSpc>
+                <a:spcPct val="115000"/>
+              </a:lnSpc>
+              <a:spcBef>
+                <a:spcPts val="0"/>
+              </a:spcBef>
+              <a:spcAft>
+                <a:spcPts val="200"/>
+              </a:spcAft>
+            </a:pPr>
             <a:r>
               <a:rPr sz="900" b="0" i="0">
                 <a:solidFill>
@@ -5218,7 +5696,17 @@
           </a:bodyPr>
           <a:lstStyle/>
           <a:p>
-            <a:pPr algn="l"/>
+            <a:pPr algn="l">
+              <a:lnSpc>
+                <a:spcPct val="115000"/>
+              </a:lnSpc>
+              <a:spcBef>
+                <a:spcPts val="0"/>
+              </a:spcBef>
+              <a:spcAft>
+                <a:spcPts val="200"/>
+              </a:spcAft>
+            </a:pPr>
             <a:r>
               <a:rPr sz="1100" b="1" i="0">
                 <a:solidFill>
@@ -5253,7 +5741,17 @@
           </a:bodyPr>
           <a:lstStyle/>
           <a:p>
-            <a:pPr algn="l"/>
+            <a:pPr algn="l">
+              <a:lnSpc>
+                <a:spcPct val="115000"/>
+              </a:lnSpc>
+              <a:spcBef>
+                <a:spcPts val="0"/>
+              </a:spcBef>
+              <a:spcAft>
+                <a:spcPts val="200"/>
+              </a:spcAft>
+            </a:pPr>
             <a:r>
               <a:rPr sz="2400" b="1" i="0">
                 <a:solidFill>
@@ -5376,9 +5874,19 @@
           </a:bodyPr>
           <a:lstStyle/>
           <a:p>
-            <a:pPr algn="l"/>
-            <a:r>
-              <a:rPr sz="1400" b="0" i="0">
+            <a:pPr algn="l">
+              <a:lnSpc>
+                <a:spcPct val="115000"/>
+              </a:lnSpc>
+              <a:spcBef>
+                <a:spcPts val="0"/>
+              </a:spcBef>
+              <a:spcAft>
+                <a:spcPts val="200"/>
+              </a:spcAft>
+            </a:pPr>
+            <a:r>
+              <a:rPr sz="1800" b="0" i="0">
                 <a:solidFill>
                   <a:srgbClr val="1E2F38"/>
                 </a:solidFill>
@@ -5499,9 +6007,19 @@
           </a:bodyPr>
           <a:lstStyle/>
           <a:p>
-            <a:pPr algn="l"/>
-            <a:r>
-              <a:rPr sz="1400" b="0" i="0">
+            <a:pPr algn="l">
+              <a:lnSpc>
+                <a:spcPct val="115000"/>
+              </a:lnSpc>
+              <a:spcBef>
+                <a:spcPts val="0"/>
+              </a:spcBef>
+              <a:spcAft>
+                <a:spcPts val="200"/>
+              </a:spcAft>
+            </a:pPr>
+            <a:r>
+              <a:rPr sz="1800" b="0" i="0">
                 <a:solidFill>
                   <a:srgbClr val="1E2F38"/>
                 </a:solidFill>
@@ -5622,9 +6140,19 @@
           </a:bodyPr>
           <a:lstStyle/>
           <a:p>
-            <a:pPr algn="l"/>
-            <a:r>
-              <a:rPr sz="1400" b="0" i="0">
+            <a:pPr algn="l">
+              <a:lnSpc>
+                <a:spcPct val="115000"/>
+              </a:lnSpc>
+              <a:spcBef>
+                <a:spcPts val="0"/>
+              </a:spcBef>
+              <a:spcAft>
+                <a:spcPts val="200"/>
+              </a:spcAft>
+            </a:pPr>
+            <a:r>
+              <a:rPr sz="1800" b="0" i="0">
                 <a:solidFill>
                   <a:srgbClr val="1E2F38"/>
                 </a:solidFill>
@@ -5700,7 +6228,17 @@
           </a:bodyPr>
           <a:lstStyle/>
           <a:p>
-            <a:pPr algn="l"/>
+            <a:pPr algn="l">
+              <a:lnSpc>
+                <a:spcPct val="115000"/>
+              </a:lnSpc>
+              <a:spcBef>
+                <a:spcPts val="0"/>
+              </a:spcBef>
+              <a:spcAft>
+                <a:spcPts val="200"/>
+              </a:spcAft>
+            </a:pPr>
             <a:r>
               <a:rPr sz="900" b="0" i="0">
                 <a:solidFill>
@@ -5735,7 +6273,17 @@
           </a:bodyPr>
           <a:lstStyle/>
           <a:p>
-            <a:pPr algn="r"/>
+            <a:pPr algn="r">
+              <a:lnSpc>
+                <a:spcPct val="115000"/>
+              </a:lnSpc>
+              <a:spcBef>
+                <a:spcPts val="0"/>
+              </a:spcBef>
+              <a:spcAft>
+                <a:spcPts val="200"/>
+              </a:spcAft>
+            </a:pPr>
             <a:r>
               <a:rPr sz="900" b="0" i="0">
                 <a:solidFill>
@@ -5874,7 +6422,17 @@
           </a:bodyPr>
           <a:lstStyle/>
           <a:p>
-            <a:pPr algn="l"/>
+            <a:pPr algn="l">
+              <a:lnSpc>
+                <a:spcPct val="115000"/>
+              </a:lnSpc>
+              <a:spcBef>
+                <a:spcPts val="0"/>
+              </a:spcBef>
+              <a:spcAft>
+                <a:spcPts val="200"/>
+              </a:spcAft>
+            </a:pPr>
             <a:r>
               <a:rPr sz="1100" b="1" i="0">
                 <a:solidFill>
@@ -5909,7 +6467,17 @@
           </a:bodyPr>
           <a:lstStyle/>
           <a:p>
-            <a:pPr algn="l"/>
+            <a:pPr algn="l">
+              <a:lnSpc>
+                <a:spcPct val="115000"/>
+              </a:lnSpc>
+              <a:spcBef>
+                <a:spcPts val="0"/>
+              </a:spcBef>
+              <a:spcAft>
+                <a:spcPts val="200"/>
+              </a:spcAft>
+            </a:pPr>
             <a:r>
               <a:rPr sz="2400" b="1" i="0">
                 <a:solidFill>
@@ -5989,7 +6557,17 @@
           </a:bodyPr>
           <a:lstStyle/>
           <a:p>
-            <a:pPr algn="l"/>
+            <a:pPr algn="l">
+              <a:lnSpc>
+                <a:spcPct val="115000"/>
+              </a:lnSpc>
+              <a:spcBef>
+                <a:spcPts val="0"/>
+              </a:spcBef>
+              <a:spcAft>
+                <a:spcPts val="200"/>
+              </a:spcAft>
+            </a:pPr>
             <a:r>
               <a:rPr sz="1400" b="1" i="0">
                 <a:solidFill>
@@ -6024,7 +6602,17 @@
           </a:bodyPr>
           <a:lstStyle/>
           <a:p>
-            <a:pPr algn="l"/>
+            <a:pPr algn="l">
+              <a:lnSpc>
+                <a:spcPct val="115000"/>
+              </a:lnSpc>
+              <a:spcBef>
+                <a:spcPts val="0"/>
+              </a:spcBef>
+              <a:spcAft>
+                <a:spcPts val="200"/>
+              </a:spcAft>
+            </a:pPr>
             <a:r>
               <a:rPr sz="1300" b="0" i="0">
                 <a:solidFill>
@@ -6104,7 +6692,17 @@
           </a:bodyPr>
           <a:lstStyle/>
           <a:p>
-            <a:pPr algn="l"/>
+            <a:pPr algn="l">
+              <a:lnSpc>
+                <a:spcPct val="115000"/>
+              </a:lnSpc>
+              <a:spcBef>
+                <a:spcPts val="0"/>
+              </a:spcBef>
+              <a:spcAft>
+                <a:spcPts val="200"/>
+              </a:spcAft>
+            </a:pPr>
             <a:r>
               <a:rPr sz="1400" b="1" i="0">
                 <a:solidFill>
@@ -6139,7 +6737,17 @@
           </a:bodyPr>
           <a:lstStyle/>
           <a:p>
-            <a:pPr algn="l"/>
+            <a:pPr algn="l">
+              <a:lnSpc>
+                <a:spcPct val="115000"/>
+              </a:lnSpc>
+              <a:spcBef>
+                <a:spcPts val="0"/>
+              </a:spcBef>
+              <a:spcAft>
+                <a:spcPts val="200"/>
+              </a:spcAft>
+            </a:pPr>
             <a:r>
               <a:rPr sz="1300" b="0" i="0">
                 <a:solidFill>
@@ -6219,7 +6827,17 @@
           </a:bodyPr>
           <a:lstStyle/>
           <a:p>
-            <a:pPr algn="l"/>
+            <a:pPr algn="l">
+              <a:lnSpc>
+                <a:spcPct val="115000"/>
+              </a:lnSpc>
+              <a:spcBef>
+                <a:spcPts val="0"/>
+              </a:spcBef>
+              <a:spcAft>
+                <a:spcPts val="200"/>
+              </a:spcAft>
+            </a:pPr>
             <a:r>
               <a:rPr sz="1400" b="1" i="0">
                 <a:solidFill>
@@ -6254,7 +6872,17 @@
           </a:bodyPr>
           <a:lstStyle/>
           <a:p>
-            <a:pPr algn="l"/>
+            <a:pPr algn="l">
+              <a:lnSpc>
+                <a:spcPct val="115000"/>
+              </a:lnSpc>
+              <a:spcBef>
+                <a:spcPts val="0"/>
+              </a:spcBef>
+              <a:spcAft>
+                <a:spcPts val="200"/>
+              </a:spcAft>
+            </a:pPr>
             <a:r>
               <a:rPr sz="1300" b="0" i="0">
                 <a:solidFill>
@@ -6334,7 +6962,17 @@
           </a:bodyPr>
           <a:lstStyle/>
           <a:p>
-            <a:pPr algn="l"/>
+            <a:pPr algn="l">
+              <a:lnSpc>
+                <a:spcPct val="115000"/>
+              </a:lnSpc>
+              <a:spcBef>
+                <a:spcPts val="0"/>
+              </a:spcBef>
+              <a:spcAft>
+                <a:spcPts val="200"/>
+              </a:spcAft>
+            </a:pPr>
             <a:r>
               <a:rPr sz="1400" b="1" i="0">
                 <a:solidFill>
@@ -6369,7 +7007,17 @@
           </a:bodyPr>
           <a:lstStyle/>
           <a:p>
-            <a:pPr algn="l"/>
+            <a:pPr algn="l">
+              <a:lnSpc>
+                <a:spcPct val="115000"/>
+              </a:lnSpc>
+              <a:spcBef>
+                <a:spcPts val="0"/>
+              </a:spcBef>
+              <a:spcAft>
+                <a:spcPts val="200"/>
+              </a:spcAft>
+            </a:pPr>
             <a:r>
               <a:rPr sz="1300" b="0" i="0">
                 <a:solidFill>
@@ -6447,7 +7095,17 @@
           </a:bodyPr>
           <a:lstStyle/>
           <a:p>
-            <a:pPr algn="l"/>
+            <a:pPr algn="l">
+              <a:lnSpc>
+                <a:spcPct val="115000"/>
+              </a:lnSpc>
+              <a:spcBef>
+                <a:spcPts val="0"/>
+              </a:spcBef>
+              <a:spcAft>
+                <a:spcPts val="200"/>
+              </a:spcAft>
+            </a:pPr>
             <a:r>
               <a:rPr sz="900" b="0" i="0">
                 <a:solidFill>
@@ -6482,7 +7140,17 @@
           </a:bodyPr>
           <a:lstStyle/>
           <a:p>
-            <a:pPr algn="r"/>
+            <a:pPr algn="r">
+              <a:lnSpc>
+                <a:spcPct val="115000"/>
+              </a:lnSpc>
+              <a:spcBef>
+                <a:spcPts val="0"/>
+              </a:spcBef>
+              <a:spcAft>
+                <a:spcPts val="200"/>
+              </a:spcAft>
+            </a:pPr>
             <a:r>
               <a:rPr sz="900" b="0" i="0">
                 <a:solidFill>
@@ -6621,7 +7289,17 @@
           </a:bodyPr>
           <a:lstStyle/>
           <a:p>
-            <a:pPr algn="l"/>
+            <a:pPr algn="l">
+              <a:lnSpc>
+                <a:spcPct val="115000"/>
+              </a:lnSpc>
+              <a:spcBef>
+                <a:spcPts val="0"/>
+              </a:spcBef>
+              <a:spcAft>
+                <a:spcPts val="200"/>
+              </a:spcAft>
+            </a:pPr>
             <a:r>
               <a:rPr sz="1100" b="1" i="0">
                 <a:solidFill>
@@ -6656,7 +7334,17 @@
           </a:bodyPr>
           <a:lstStyle/>
           <a:p>
-            <a:pPr algn="l"/>
+            <a:pPr algn="l">
+              <a:lnSpc>
+                <a:spcPct val="115000"/>
+              </a:lnSpc>
+              <a:spcBef>
+                <a:spcPts val="0"/>
+              </a:spcBef>
+              <a:spcAft>
+                <a:spcPts val="200"/>
+              </a:spcAft>
+            </a:pPr>
             <a:r>
               <a:rPr sz="2400" b="1" i="0">
                 <a:solidFill>
@@ -6736,7 +7424,17 @@
           </a:bodyPr>
           <a:lstStyle/>
           <a:p>
-            <a:pPr algn="l"/>
+            <a:pPr algn="l">
+              <a:lnSpc>
+                <a:spcPct val="115000"/>
+              </a:lnSpc>
+              <a:spcBef>
+                <a:spcPts val="0"/>
+              </a:spcBef>
+              <a:spcAft>
+                <a:spcPts val="200"/>
+              </a:spcAft>
+            </a:pPr>
             <a:r>
               <a:rPr sz="1300" b="1" i="0">
                 <a:solidFill>
@@ -6771,7 +7469,17 @@
           </a:bodyPr>
           <a:lstStyle/>
           <a:p>
-            <a:pPr algn="l"/>
+            <a:pPr algn="l">
+              <a:lnSpc>
+                <a:spcPct val="115000"/>
+              </a:lnSpc>
+              <a:spcBef>
+                <a:spcPts val="0"/>
+              </a:spcBef>
+              <a:spcAft>
+                <a:spcPts val="200"/>
+              </a:spcAft>
+            </a:pPr>
             <a:r>
               <a:rPr sz="1300" b="0" i="0">
                 <a:solidFill>
@@ -6851,7 +7559,17 @@
           </a:bodyPr>
           <a:lstStyle/>
           <a:p>
-            <a:pPr algn="l"/>
+            <a:pPr algn="l">
+              <a:lnSpc>
+                <a:spcPct val="115000"/>
+              </a:lnSpc>
+              <a:spcBef>
+                <a:spcPts val="0"/>
+              </a:spcBef>
+              <a:spcAft>
+                <a:spcPts val="200"/>
+              </a:spcAft>
+            </a:pPr>
             <a:r>
               <a:rPr sz="1300" b="1" i="0">
                 <a:solidFill>
@@ -6886,7 +7604,17 @@
           </a:bodyPr>
           <a:lstStyle/>
           <a:p>
-            <a:pPr algn="l"/>
+            <a:pPr algn="l">
+              <a:lnSpc>
+                <a:spcPct val="115000"/>
+              </a:lnSpc>
+              <a:spcBef>
+                <a:spcPts val="0"/>
+              </a:spcBef>
+              <a:spcAft>
+                <a:spcPts val="200"/>
+              </a:spcAft>
+            </a:pPr>
             <a:r>
               <a:rPr sz="1300" b="0" i="0">
                 <a:solidFill>
@@ -6966,7 +7694,17 @@
           </a:bodyPr>
           <a:lstStyle/>
           <a:p>
-            <a:pPr algn="l"/>
+            <a:pPr algn="l">
+              <a:lnSpc>
+                <a:spcPct val="115000"/>
+              </a:lnSpc>
+              <a:spcBef>
+                <a:spcPts val="0"/>
+              </a:spcBef>
+              <a:spcAft>
+                <a:spcPts val="200"/>
+              </a:spcAft>
+            </a:pPr>
             <a:r>
               <a:rPr sz="1300" b="1" i="0">
                 <a:solidFill>
@@ -7001,7 +7739,17 @@
           </a:bodyPr>
           <a:lstStyle/>
           <a:p>
-            <a:pPr algn="l"/>
+            <a:pPr algn="l">
+              <a:lnSpc>
+                <a:spcPct val="115000"/>
+              </a:lnSpc>
+              <a:spcBef>
+                <a:spcPts val="0"/>
+              </a:spcBef>
+              <a:spcAft>
+                <a:spcPts val="200"/>
+              </a:spcAft>
+            </a:pPr>
             <a:r>
               <a:rPr sz="1300" b="0" i="0">
                 <a:solidFill>
@@ -7081,7 +7829,17 @@
           </a:bodyPr>
           <a:lstStyle/>
           <a:p>
-            <a:pPr algn="l"/>
+            <a:pPr algn="l">
+              <a:lnSpc>
+                <a:spcPct val="115000"/>
+              </a:lnSpc>
+              <a:spcBef>
+                <a:spcPts val="0"/>
+              </a:spcBef>
+              <a:spcAft>
+                <a:spcPts val="200"/>
+              </a:spcAft>
+            </a:pPr>
             <a:r>
               <a:rPr sz="1300" b="1" i="0">
                 <a:solidFill>
@@ -7116,7 +7874,17 @@
           </a:bodyPr>
           <a:lstStyle/>
           <a:p>
-            <a:pPr algn="l"/>
+            <a:pPr algn="l">
+              <a:lnSpc>
+                <a:spcPct val="115000"/>
+              </a:lnSpc>
+              <a:spcBef>
+                <a:spcPts val="0"/>
+              </a:spcBef>
+              <a:spcAft>
+                <a:spcPts val="200"/>
+              </a:spcAft>
+            </a:pPr>
             <a:r>
               <a:rPr sz="1300" b="0" i="0">
                 <a:solidFill>
@@ -7194,7 +7962,17 @@
           </a:bodyPr>
           <a:lstStyle/>
           <a:p>
-            <a:pPr algn="l"/>
+            <a:pPr algn="l">
+              <a:lnSpc>
+                <a:spcPct val="115000"/>
+              </a:lnSpc>
+              <a:spcBef>
+                <a:spcPts val="0"/>
+              </a:spcBef>
+              <a:spcAft>
+                <a:spcPts val="200"/>
+              </a:spcAft>
+            </a:pPr>
             <a:r>
               <a:rPr sz="900" b="0" i="0">
                 <a:solidFill>
@@ -7229,7 +8007,17 @@
           </a:bodyPr>
           <a:lstStyle/>
           <a:p>
-            <a:pPr algn="r"/>
+            <a:pPr algn="r">
+              <a:lnSpc>
+                <a:spcPct val="115000"/>
+              </a:lnSpc>
+              <a:spcBef>
+                <a:spcPts val="0"/>
+              </a:spcBef>
+              <a:spcAft>
+                <a:spcPts val="200"/>
+              </a:spcAft>
+            </a:pPr>
             <a:r>
               <a:rPr sz="900" b="0" i="0">
                 <a:solidFill>
@@ -7368,7 +8156,17 @@
           </a:bodyPr>
           <a:lstStyle/>
           <a:p>
-            <a:pPr algn="l"/>
+            <a:pPr algn="l">
+              <a:lnSpc>
+                <a:spcPct val="115000"/>
+              </a:lnSpc>
+              <a:spcBef>
+                <a:spcPts val="0"/>
+              </a:spcBef>
+              <a:spcAft>
+                <a:spcPts val="200"/>
+              </a:spcAft>
+            </a:pPr>
             <a:r>
               <a:rPr sz="1100" b="1" i="0">
                 <a:solidFill>
@@ -7403,7 +8201,17 @@
           </a:bodyPr>
           <a:lstStyle/>
           <a:p>
-            <a:pPr algn="l"/>
+            <a:pPr algn="l">
+              <a:lnSpc>
+                <a:spcPct val="115000"/>
+              </a:lnSpc>
+              <a:spcBef>
+                <a:spcPts val="0"/>
+              </a:spcBef>
+              <a:spcAft>
+                <a:spcPts val="200"/>
+              </a:spcAft>
+            </a:pPr>
             <a:r>
               <a:rPr sz="2400" b="1" i="0">
                 <a:solidFill>
@@ -7462,19 +8270,113 @@
           </a:bodyPr>
           <a:lstStyle/>
           <a:p>
-            <a:pPr algn="l"/>
-            <a:r>
-              <a:rPr sz="1600" b="0" i="0">
+            <a:pPr algn="l">
+              <a:lnSpc>
+                <a:spcPct val="128000"/>
+              </a:lnSpc>
+              <a:spcBef>
+                <a:spcPts val="0"/>
+              </a:spcBef>
+              <a:spcAft>
+                <a:spcPts val="1400"/>
+              </a:spcAft>
+            </a:pPr>
+            <a:r>
+              <a:rPr sz="2600" b="0" i="0">
                 <a:solidFill>
                   <a:srgbClr val="1E2F38"/>
                 </a:solidFill>
                 <a:latin typeface="Calibri"/>
               </a:rPr>
-              <a:t>• FairBanks Medical Centre + Community Reach
-• CHW/VHT networks in Kampala catchments
-• Maternal, child, chronic, and outreach programmes
-• FCHIP intelligence layer in development
-• Employer ready to host field placement</a:t>
+              <a:t>• FairBanks Medical Centre + Community Reach</a:t>
+            </a:r>
+          </a:p>
+          <a:p>
+            <a:pPr algn="l">
+              <a:lnSpc>
+                <a:spcPct val="128000"/>
+              </a:lnSpc>
+              <a:spcBef>
+                <a:spcPts val="0"/>
+              </a:spcBef>
+              <a:spcAft>
+                <a:spcPts val="1400"/>
+              </a:spcAft>
+            </a:pPr>
+            <a:r>
+              <a:rPr sz="2600" b="0" i="0">
+                <a:solidFill>
+                  <a:srgbClr val="1E2F38"/>
+                </a:solidFill>
+                <a:latin typeface="Calibri"/>
+              </a:rPr>
+              <a:t>• CHW/VHT networks in Kampala catchments</a:t>
+            </a:r>
+          </a:p>
+          <a:p>
+            <a:pPr algn="l">
+              <a:lnSpc>
+                <a:spcPct val="128000"/>
+              </a:lnSpc>
+              <a:spcBef>
+                <a:spcPts val="0"/>
+              </a:spcBef>
+              <a:spcAft>
+                <a:spcPts val="1400"/>
+              </a:spcAft>
+            </a:pPr>
+            <a:r>
+              <a:rPr sz="2600" b="0" i="0">
+                <a:solidFill>
+                  <a:srgbClr val="1E2F38"/>
+                </a:solidFill>
+                <a:latin typeface="Calibri"/>
+              </a:rPr>
+              <a:t>• Maternal, child, chronic, and outreach programmes</a:t>
+            </a:r>
+          </a:p>
+          <a:p>
+            <a:pPr algn="l">
+              <a:lnSpc>
+                <a:spcPct val="128000"/>
+              </a:lnSpc>
+              <a:spcBef>
+                <a:spcPts val="0"/>
+              </a:spcBef>
+              <a:spcAft>
+                <a:spcPts val="1400"/>
+              </a:spcAft>
+            </a:pPr>
+            <a:r>
+              <a:rPr sz="2600" b="0" i="0">
+                <a:solidFill>
+                  <a:srgbClr val="1E2F38"/>
+                </a:solidFill>
+                <a:latin typeface="Calibri"/>
+              </a:rPr>
+              <a:t>• FCHIP intelligence layer in development</a:t>
+            </a:r>
+          </a:p>
+          <a:p>
+            <a:pPr algn="l">
+              <a:lnSpc>
+                <a:spcPct val="128000"/>
+              </a:lnSpc>
+              <a:spcBef>
+                <a:spcPts val="0"/>
+              </a:spcBef>
+              <a:spcAft>
+                <a:spcPts val="200"/>
+              </a:spcAft>
+            </a:pPr>
+            <a:r>
+              <a:rPr sz="2600" b="0" i="0">
+                <a:solidFill>
+                  <a:srgbClr val="1E2F38"/>
+                </a:solidFill>
+                <a:latin typeface="Calibri"/>
+              </a:rPr>
+              <a:t>• Employer ready to host field placement</a:t>
             </a:r>
           </a:p>
         </p:txBody>
@@ -7544,7 +8446,17 @@
           </a:bodyPr>
           <a:lstStyle/>
           <a:p>
-            <a:pPr algn="l"/>
+            <a:pPr algn="l">
+              <a:lnSpc>
+                <a:spcPct val="115000"/>
+              </a:lnSpc>
+              <a:spcBef>
+                <a:spcPts val="0"/>
+              </a:spcBef>
+              <a:spcAft>
+                <a:spcPts val="200"/>
+              </a:spcAft>
+            </a:pPr>
             <a:r>
               <a:rPr sz="900" b="0" i="0">
                 <a:solidFill>
@@ -7579,7 +8491,17 @@
           </a:bodyPr>
           <a:lstStyle/>
           <a:p>
-            <a:pPr algn="r"/>
+            <a:pPr algn="r">
+              <a:lnSpc>
+                <a:spcPct val="115000"/>
+              </a:lnSpc>
+              <a:spcBef>
+                <a:spcPts val="0"/>
+              </a:spcBef>
+              <a:spcAft>
+                <a:spcPts val="200"/>
+              </a:spcAft>
+            </a:pPr>
             <a:r>
               <a:rPr sz="900" b="0" i="0">
                 <a:solidFill>

--- a/applications/africa-cdc/documents/africa-cdc_ppt.pptx
+++ b/applications/africa-cdc/documents/africa-cdc_ppt.pptx
@@ -3394,6 +3394,96 @@
   <p:clrMapOvr>
     <a:masterClrMapping/>
   </p:clrMapOvr>
+  <p:timing>
+    <p:tnLst>
+      <p:par>
+        <p:cTn id="1" dur="indefinite" restart="never" nodeType="tmRoot">
+          <p:childTnLst>
+            <p:seq concurrent="true" nextAc="seek">
+              <p:cTn id="2" dur="indefinite" nodeType="mainSeq">
+                <p:childTnLst>
+                  <p:par>
+                    <p:cTn id="9" fill="hold">
+                      <p:stCondLst>
+                        <p:cond delay="0"/>
+                      </p:stCondLst>
+                      <p:childTnLst>
+                        <p:par>
+                          <p:cTn id="3" presetID="10" presetClass="entr" presetSubtype="0" fill="hold" nodeType="withEffect">
+                            <p:stCondLst>
+                              <p:cond delay="0"/>
+                            </p:stCondLst>
+                            <p:childTnLst>
+                              <p:animEffect transition="in" filter="fade">
+                                <p:cBhvr>
+                                  <p:cTn id="4" dur="450"/>
+                                  <p:tgtEl>
+                                    <p:spTgt spid="2"/>
+                                  </p:tgtEl>
+                                </p:cBhvr>
+                              </p:animEffect>
+                            </p:childTnLst>
+                          </p:cTn>
+                        </p:par>
+                        <p:par>
+                          <p:cTn id="5" presetID="10" presetClass="entr" presetSubtype="0" fill="hold" nodeType="withEffect">
+                            <p:stCondLst>
+                              <p:cond delay="200"/>
+                            </p:stCondLst>
+                            <p:childTnLst>
+                              <p:animEffect transition="in" filter="fade">
+                                <p:cBhvr>
+                                  <p:cTn id="6" dur="450"/>
+                                  <p:tgtEl>
+                                    <p:spTgt spid="3"/>
+                                  </p:tgtEl>
+                                </p:cBhvr>
+                              </p:animEffect>
+                            </p:childTnLst>
+                          </p:cTn>
+                        </p:par>
+                        <p:par>
+                          <p:cTn id="7" presetID="10" presetClass="entr" presetSubtype="0" fill="hold" nodeType="withEffect">
+                            <p:stCondLst>
+                              <p:cond delay="200"/>
+                            </p:stCondLst>
+                            <p:childTnLst>
+                              <p:animEffect transition="in" filter="fade">
+                                <p:cBhvr>
+                                  <p:cTn id="8" dur="450"/>
+                                  <p:tgtEl>
+                                    <p:spTgt spid="4"/>
+                                  </p:tgtEl>
+                                </p:cBhvr>
+                              </p:animEffect>
+                            </p:childTnLst>
+                          </p:cTn>
+                        </p:par>
+                      </p:childTnLst>
+                    </p:cTn>
+                  </p:par>
+                </p:childTnLst>
+              </p:cTn>
+              <p:prevCondLst>
+                <p:cond evt="onPrev" delay="0">
+                  <p:tgtEl>
+                    <p:sldTgt/>
+                  </p:tgtEl>
+                </p:cond>
+              </p:prevCondLst>
+              <p:nextCondLst>
+                <p:cond evt="onNext" delay="0">
+                  <p:tgtEl>
+                    <p:sldTgt/>
+                  </p:tgtEl>
+                </p:cond>
+              </p:nextCondLst>
+            </p:seq>
+          </p:childTnLst>
+        </p:cTn>
+      </p:par>
+    </p:tnLst>
+  </p:timing>
 </p:sld>
 </file>
 
@@ -3614,6 +3704,96 @@
   <p:clrMapOvr>
     <a:masterClrMapping/>
   </p:clrMapOvr>
+  <p:timing>
+    <p:tnLst>
+      <p:par>
+        <p:cTn id="1" dur="indefinite" restart="never" nodeType="tmRoot">
+          <p:childTnLst>
+            <p:seq concurrent="true" nextAc="seek">
+              <p:cTn id="2" dur="indefinite" nodeType="mainSeq">
+                <p:childTnLst>
+                  <p:par>
+                    <p:cTn id="9" fill="hold">
+                      <p:stCondLst>
+                        <p:cond delay="0"/>
+                      </p:stCondLst>
+                      <p:childTnLst>
+                        <p:par>
+                          <p:cTn id="3" presetID="10" presetClass="entr" presetSubtype="0" fill="hold" nodeType="withEffect">
+                            <p:stCondLst>
+                              <p:cond delay="0"/>
+                            </p:stCondLst>
+                            <p:childTnLst>
+                              <p:animEffect transition="in" filter="fade">
+                                <p:cBhvr>
+                                  <p:cTn id="4" dur="450"/>
+                                  <p:tgtEl>
+                                    <p:spTgt spid="2"/>
+                                  </p:tgtEl>
+                                </p:cBhvr>
+                              </p:animEffect>
+                            </p:childTnLst>
+                          </p:cTn>
+                        </p:par>
+                        <p:par>
+                          <p:cTn id="5" presetID="10" presetClass="entr" presetSubtype="0" fill="hold" nodeType="withEffect">
+                            <p:stCondLst>
+                              <p:cond delay="200"/>
+                            </p:stCondLst>
+                            <p:childTnLst>
+                              <p:animEffect transition="in" filter="fade">
+                                <p:cBhvr>
+                                  <p:cTn id="6" dur="450"/>
+                                  <p:tgtEl>
+                                    <p:spTgt spid="3"/>
+                                  </p:tgtEl>
+                                </p:cBhvr>
+                              </p:animEffect>
+                            </p:childTnLst>
+                          </p:cTn>
+                        </p:par>
+                        <p:par>
+                          <p:cTn id="7" presetID="10" presetClass="entr" presetSubtype="0" fill="hold" nodeType="withEffect">
+                            <p:stCondLst>
+                              <p:cond delay="200"/>
+                            </p:stCondLst>
+                            <p:childTnLst>
+                              <p:animEffect transition="in" filter="fade">
+                                <p:cBhvr>
+                                  <p:cTn id="8" dur="450"/>
+                                  <p:tgtEl>
+                                    <p:spTgt spid="4"/>
+                                  </p:tgtEl>
+                                </p:cBhvr>
+                              </p:animEffect>
+                            </p:childTnLst>
+                          </p:cTn>
+                        </p:par>
+                      </p:childTnLst>
+                    </p:cTn>
+                  </p:par>
+                </p:childTnLst>
+              </p:cTn>
+              <p:prevCondLst>
+                <p:cond evt="onPrev" delay="0">
+                  <p:tgtEl>
+                    <p:sldTgt/>
+                  </p:tgtEl>
+                </p:cond>
+              </p:prevCondLst>
+              <p:nextCondLst>
+                <p:cond evt="onNext" delay="0">
+                  <p:tgtEl>
+                    <p:sldTgt/>
+                  </p:tgtEl>
+                </p:cond>
+              </p:nextCondLst>
+            </p:seq>
+          </p:childTnLst>
+        </p:cTn>
+      </p:par>
+    </p:tnLst>
+  </p:timing>
 </p:sld>
 </file>
 
@@ -4098,6 +4278,96 @@
   <p:clrMapOvr>
     <a:masterClrMapping/>
   </p:clrMapOvr>
+  <p:timing>
+    <p:tnLst>
+      <p:par>
+        <p:cTn id="1" dur="indefinite" restart="never" nodeType="tmRoot">
+          <p:childTnLst>
+            <p:seq concurrent="true" nextAc="seek">
+              <p:cTn id="2" dur="indefinite" nodeType="mainSeq">
+                <p:childTnLst>
+                  <p:par>
+                    <p:cTn id="9" fill="hold">
+                      <p:stCondLst>
+                        <p:cond delay="0"/>
+                      </p:stCondLst>
+                      <p:childTnLst>
+                        <p:par>
+                          <p:cTn id="3" presetID="10" presetClass="entr" presetSubtype="0" fill="hold" nodeType="withEffect">
+                            <p:stCondLst>
+                              <p:cond delay="0"/>
+                            </p:stCondLst>
+                            <p:childTnLst>
+                              <p:animEffect transition="in" filter="fade">
+                                <p:cBhvr>
+                                  <p:cTn id="4" dur="450"/>
+                                  <p:tgtEl>
+                                    <p:spTgt spid="2"/>
+                                  </p:tgtEl>
+                                </p:cBhvr>
+                              </p:animEffect>
+                            </p:childTnLst>
+                          </p:cTn>
+                        </p:par>
+                        <p:par>
+                          <p:cTn id="5" presetID="10" presetClass="entr" presetSubtype="0" fill="hold" nodeType="withEffect">
+                            <p:stCondLst>
+                              <p:cond delay="200"/>
+                            </p:stCondLst>
+                            <p:childTnLst>
+                              <p:animEffect transition="in" filter="fade">
+                                <p:cBhvr>
+                                  <p:cTn id="6" dur="450"/>
+                                  <p:tgtEl>
+                                    <p:spTgt spid="3"/>
+                                  </p:tgtEl>
+                                </p:cBhvr>
+                              </p:animEffect>
+                            </p:childTnLst>
+                          </p:cTn>
+                        </p:par>
+                        <p:par>
+                          <p:cTn id="7" presetID="10" presetClass="entr" presetSubtype="0" fill="hold" nodeType="withEffect">
+                            <p:stCondLst>
+                              <p:cond delay="200"/>
+                            </p:stCondLst>
+                            <p:childTnLst>
+                              <p:animEffect transition="in" filter="fade">
+                                <p:cBhvr>
+                                  <p:cTn id="8" dur="450"/>
+                                  <p:tgtEl>
+                                    <p:spTgt spid="4"/>
+                                  </p:tgtEl>
+                                </p:cBhvr>
+                              </p:animEffect>
+                            </p:childTnLst>
+                          </p:cTn>
+                        </p:par>
+                      </p:childTnLst>
+                    </p:cTn>
+                  </p:par>
+                </p:childTnLst>
+              </p:cTn>
+              <p:prevCondLst>
+                <p:cond evt="onPrev" delay="0">
+                  <p:tgtEl>
+                    <p:sldTgt/>
+                  </p:tgtEl>
+                </p:cond>
+              </p:prevCondLst>
+              <p:nextCondLst>
+                <p:cond evt="onNext" delay="0">
+                  <p:tgtEl>
+                    <p:sldTgt/>
+                  </p:tgtEl>
+                </p:cond>
+              </p:nextCondLst>
+            </p:seq>
+          </p:childTnLst>
+        </p:cTn>
+      </p:par>
+    </p:tnLst>
+  </p:timing>
 </p:sld>
 </file>
 
@@ -4516,6 +4786,96 @@
   <p:clrMapOvr>
     <a:masterClrMapping/>
   </p:clrMapOvr>
+  <p:timing>
+    <p:tnLst>
+      <p:par>
+        <p:cTn id="1" dur="indefinite" restart="never" nodeType="tmRoot">
+          <p:childTnLst>
+            <p:seq concurrent="true" nextAc="seek">
+              <p:cTn id="2" dur="indefinite" nodeType="mainSeq">
+                <p:childTnLst>
+                  <p:par>
+                    <p:cTn id="9" fill="hold">
+                      <p:stCondLst>
+                        <p:cond delay="0"/>
+                      </p:stCondLst>
+                      <p:childTnLst>
+                        <p:par>
+                          <p:cTn id="3" presetID="10" presetClass="entr" presetSubtype="0" fill="hold" nodeType="withEffect">
+                            <p:stCondLst>
+                              <p:cond delay="0"/>
+                            </p:stCondLst>
+                            <p:childTnLst>
+                              <p:animEffect transition="in" filter="fade">
+                                <p:cBhvr>
+                                  <p:cTn id="4" dur="450"/>
+                                  <p:tgtEl>
+                                    <p:spTgt spid="2"/>
+                                  </p:tgtEl>
+                                </p:cBhvr>
+                              </p:animEffect>
+                            </p:childTnLst>
+                          </p:cTn>
+                        </p:par>
+                        <p:par>
+                          <p:cTn id="5" presetID="10" presetClass="entr" presetSubtype="0" fill="hold" nodeType="withEffect">
+                            <p:stCondLst>
+                              <p:cond delay="200"/>
+                            </p:stCondLst>
+                            <p:childTnLst>
+                              <p:animEffect transition="in" filter="fade">
+                                <p:cBhvr>
+                                  <p:cTn id="6" dur="450"/>
+                                  <p:tgtEl>
+                                    <p:spTgt spid="3"/>
+                                  </p:tgtEl>
+                                </p:cBhvr>
+                              </p:animEffect>
+                            </p:childTnLst>
+                          </p:cTn>
+                        </p:par>
+                        <p:par>
+                          <p:cTn id="7" presetID="10" presetClass="entr" presetSubtype="0" fill="hold" nodeType="withEffect">
+                            <p:stCondLst>
+                              <p:cond delay="200"/>
+                            </p:stCondLst>
+                            <p:childTnLst>
+                              <p:animEffect transition="in" filter="fade">
+                                <p:cBhvr>
+                                  <p:cTn id="8" dur="450"/>
+                                  <p:tgtEl>
+                                    <p:spTgt spid="4"/>
+                                  </p:tgtEl>
+                                </p:cBhvr>
+                              </p:animEffect>
+                            </p:childTnLst>
+                          </p:cTn>
+                        </p:par>
+                      </p:childTnLst>
+                    </p:cTn>
+                  </p:par>
+                </p:childTnLst>
+              </p:cTn>
+              <p:prevCondLst>
+                <p:cond evt="onPrev" delay="0">
+                  <p:tgtEl>
+                    <p:sldTgt/>
+                  </p:tgtEl>
+                </p:cond>
+              </p:prevCondLst>
+              <p:nextCondLst>
+                <p:cond evt="onNext" delay="0">
+                  <p:tgtEl>
+                    <p:sldTgt/>
+                  </p:tgtEl>
+                </p:cond>
+              </p:nextCondLst>
+            </p:seq>
+          </p:childTnLst>
+        </p:cTn>
+      </p:par>
+    </p:tnLst>
+  </p:timing>
 </p:sld>
 </file>
 
@@ -4978,6 +5338,96 @@
   <p:clrMapOvr>
     <a:masterClrMapping/>
   </p:clrMapOvr>
+  <p:timing>
+    <p:tnLst>
+      <p:par>
+        <p:cTn id="1" dur="indefinite" restart="never" nodeType="tmRoot">
+          <p:childTnLst>
+            <p:seq concurrent="true" nextAc="seek">
+              <p:cTn id="2" dur="indefinite" nodeType="mainSeq">
+                <p:childTnLst>
+                  <p:par>
+                    <p:cTn id="9" fill="hold">
+                      <p:stCondLst>
+                        <p:cond delay="0"/>
+                      </p:stCondLst>
+                      <p:childTnLst>
+                        <p:par>
+                          <p:cTn id="3" presetID="10" presetClass="entr" presetSubtype="0" fill="hold" nodeType="withEffect">
+                            <p:stCondLst>
+                              <p:cond delay="0"/>
+                            </p:stCondLst>
+                            <p:childTnLst>
+                              <p:animEffect transition="in" filter="fade">
+                                <p:cBhvr>
+                                  <p:cTn id="4" dur="450"/>
+                                  <p:tgtEl>
+                                    <p:spTgt spid="2"/>
+                                  </p:tgtEl>
+                                </p:cBhvr>
+                              </p:animEffect>
+                            </p:childTnLst>
+                          </p:cTn>
+                        </p:par>
+                        <p:par>
+                          <p:cTn id="5" presetID="10" presetClass="entr" presetSubtype="0" fill="hold" nodeType="withEffect">
+                            <p:stCondLst>
+                              <p:cond delay="200"/>
+                            </p:stCondLst>
+                            <p:childTnLst>
+                              <p:animEffect transition="in" filter="fade">
+                                <p:cBhvr>
+                                  <p:cTn id="6" dur="450"/>
+                                  <p:tgtEl>
+                                    <p:spTgt spid="3"/>
+                                  </p:tgtEl>
+                                </p:cBhvr>
+                              </p:animEffect>
+                            </p:childTnLst>
+                          </p:cTn>
+                        </p:par>
+                        <p:par>
+                          <p:cTn id="7" presetID="10" presetClass="entr" presetSubtype="0" fill="hold" nodeType="withEffect">
+                            <p:stCondLst>
+                              <p:cond delay="200"/>
+                            </p:stCondLst>
+                            <p:childTnLst>
+                              <p:animEffect transition="in" filter="fade">
+                                <p:cBhvr>
+                                  <p:cTn id="8" dur="450"/>
+                                  <p:tgtEl>
+                                    <p:spTgt spid="4"/>
+                                  </p:tgtEl>
+                                </p:cBhvr>
+                              </p:animEffect>
+                            </p:childTnLst>
+                          </p:cTn>
+                        </p:par>
+                      </p:childTnLst>
+                    </p:cTn>
+                  </p:par>
+                </p:childTnLst>
+              </p:cTn>
+              <p:prevCondLst>
+                <p:cond evt="onPrev" delay="0">
+                  <p:tgtEl>
+                    <p:sldTgt/>
+                  </p:tgtEl>
+                </p:cond>
+              </p:prevCondLst>
+              <p:nextCondLst>
+                <p:cond evt="onNext" delay="0">
+                  <p:tgtEl>
+                    <p:sldTgt/>
+                  </p:tgtEl>
+                </p:cond>
+              </p:nextCondLst>
+            </p:seq>
+          </p:childTnLst>
+        </p:cTn>
+      </p:par>
+    </p:tnLst>
+  </p:timing>
 </p:sld>
 </file>
 
@@ -5575,6 +6025,96 @@
   <p:clrMapOvr>
     <a:masterClrMapping/>
   </p:clrMapOvr>
+  <p:timing>
+    <p:tnLst>
+      <p:par>
+        <p:cTn id="1" dur="indefinite" restart="never" nodeType="tmRoot">
+          <p:childTnLst>
+            <p:seq concurrent="true" nextAc="seek">
+              <p:cTn id="2" dur="indefinite" nodeType="mainSeq">
+                <p:childTnLst>
+                  <p:par>
+                    <p:cTn id="9" fill="hold">
+                      <p:stCondLst>
+                        <p:cond delay="0"/>
+                      </p:stCondLst>
+                      <p:childTnLst>
+                        <p:par>
+                          <p:cTn id="3" presetID="10" presetClass="entr" presetSubtype="0" fill="hold" nodeType="withEffect">
+                            <p:stCondLst>
+                              <p:cond delay="0"/>
+                            </p:stCondLst>
+                            <p:childTnLst>
+                              <p:animEffect transition="in" filter="fade">
+                                <p:cBhvr>
+                                  <p:cTn id="4" dur="450"/>
+                                  <p:tgtEl>
+                                    <p:spTgt spid="2"/>
+                                  </p:tgtEl>
+                                </p:cBhvr>
+                              </p:animEffect>
+                            </p:childTnLst>
+                          </p:cTn>
+                        </p:par>
+                        <p:par>
+                          <p:cTn id="5" presetID="10" presetClass="entr" presetSubtype="0" fill="hold" nodeType="withEffect">
+                            <p:stCondLst>
+                              <p:cond delay="200"/>
+                            </p:stCondLst>
+                            <p:childTnLst>
+                              <p:animEffect transition="in" filter="fade">
+                                <p:cBhvr>
+                                  <p:cTn id="6" dur="450"/>
+                                  <p:tgtEl>
+                                    <p:spTgt spid="3"/>
+                                  </p:tgtEl>
+                                </p:cBhvr>
+                              </p:animEffect>
+                            </p:childTnLst>
+                          </p:cTn>
+                        </p:par>
+                        <p:par>
+                          <p:cTn id="7" presetID="10" presetClass="entr" presetSubtype="0" fill="hold" nodeType="withEffect">
+                            <p:stCondLst>
+                              <p:cond delay="200"/>
+                            </p:stCondLst>
+                            <p:childTnLst>
+                              <p:animEffect transition="in" filter="fade">
+                                <p:cBhvr>
+                                  <p:cTn id="8" dur="450"/>
+                                  <p:tgtEl>
+                                    <p:spTgt spid="4"/>
+                                  </p:tgtEl>
+                                </p:cBhvr>
+                              </p:animEffect>
+                            </p:childTnLst>
+                          </p:cTn>
+                        </p:par>
+                      </p:childTnLst>
+                    </p:cTn>
+                  </p:par>
+                </p:childTnLst>
+              </p:cTn>
+              <p:prevCondLst>
+                <p:cond evt="onPrev" delay="0">
+                  <p:tgtEl>
+                    <p:sldTgt/>
+                  </p:tgtEl>
+                </p:cond>
+              </p:prevCondLst>
+              <p:nextCondLst>
+                <p:cond evt="onNext" delay="0">
+                  <p:tgtEl>
+                    <p:sldTgt/>
+                  </p:tgtEl>
+                </p:cond>
+              </p:nextCondLst>
+            </p:seq>
+          </p:childTnLst>
+        </p:cTn>
+      </p:par>
+    </p:tnLst>
+  </p:timing>
 </p:sld>
 </file>
 
@@ -6301,6 +6841,96 @@
   <p:clrMapOvr>
     <a:masterClrMapping/>
   </p:clrMapOvr>
+  <p:timing>
+    <p:tnLst>
+      <p:par>
+        <p:cTn id="1" dur="indefinite" restart="never" nodeType="tmRoot">
+          <p:childTnLst>
+            <p:seq concurrent="true" nextAc="seek">
+              <p:cTn id="2" dur="indefinite" nodeType="mainSeq">
+                <p:childTnLst>
+                  <p:par>
+                    <p:cTn id="9" fill="hold">
+                      <p:stCondLst>
+                        <p:cond delay="0"/>
+                      </p:stCondLst>
+                      <p:childTnLst>
+                        <p:par>
+                          <p:cTn id="3" presetID="10" presetClass="entr" presetSubtype="0" fill="hold" nodeType="withEffect">
+                            <p:stCondLst>
+                              <p:cond delay="0"/>
+                            </p:stCondLst>
+                            <p:childTnLst>
+                              <p:animEffect transition="in" filter="fade">
+                                <p:cBhvr>
+                                  <p:cTn id="4" dur="450"/>
+                                  <p:tgtEl>
+                                    <p:spTgt spid="2"/>
+                                  </p:tgtEl>
+                                </p:cBhvr>
+                              </p:animEffect>
+                            </p:childTnLst>
+                          </p:cTn>
+                        </p:par>
+                        <p:par>
+                          <p:cTn id="5" presetID="10" presetClass="entr" presetSubtype="0" fill="hold" nodeType="withEffect">
+                            <p:stCondLst>
+                              <p:cond delay="200"/>
+                            </p:stCondLst>
+                            <p:childTnLst>
+                              <p:animEffect transition="in" filter="fade">
+                                <p:cBhvr>
+                                  <p:cTn id="6" dur="450"/>
+                                  <p:tgtEl>
+                                    <p:spTgt spid="3"/>
+                                  </p:tgtEl>
+                                </p:cBhvr>
+                              </p:animEffect>
+                            </p:childTnLst>
+                          </p:cTn>
+                        </p:par>
+                        <p:par>
+                          <p:cTn id="7" presetID="10" presetClass="entr" presetSubtype="0" fill="hold" nodeType="withEffect">
+                            <p:stCondLst>
+                              <p:cond delay="200"/>
+                            </p:stCondLst>
+                            <p:childTnLst>
+                              <p:animEffect transition="in" filter="fade">
+                                <p:cBhvr>
+                                  <p:cTn id="8" dur="450"/>
+                                  <p:tgtEl>
+                                    <p:spTgt spid="4"/>
+                                  </p:tgtEl>
+                                </p:cBhvr>
+                              </p:animEffect>
+                            </p:childTnLst>
+                          </p:cTn>
+                        </p:par>
+                      </p:childTnLst>
+                    </p:cTn>
+                  </p:par>
+                </p:childTnLst>
+              </p:cTn>
+              <p:prevCondLst>
+                <p:cond evt="onPrev" delay="0">
+                  <p:tgtEl>
+                    <p:sldTgt/>
+                  </p:tgtEl>
+                </p:cond>
+              </p:prevCondLst>
+              <p:nextCondLst>
+                <p:cond evt="onNext" delay="0">
+                  <p:tgtEl>
+                    <p:sldTgt/>
+                  </p:tgtEl>
+                </p:cond>
+              </p:nextCondLst>
+            </p:seq>
+          </p:childTnLst>
+        </p:cTn>
+      </p:par>
+    </p:tnLst>
+  </p:timing>
 </p:sld>
 </file>
 
@@ -7168,6 +7798,96 @@
   <p:clrMapOvr>
     <a:masterClrMapping/>
   </p:clrMapOvr>
+  <p:timing>
+    <p:tnLst>
+      <p:par>
+        <p:cTn id="1" dur="indefinite" restart="never" nodeType="tmRoot">
+          <p:childTnLst>
+            <p:seq concurrent="true" nextAc="seek">
+              <p:cTn id="2" dur="indefinite" nodeType="mainSeq">
+                <p:childTnLst>
+                  <p:par>
+                    <p:cTn id="9" fill="hold">
+                      <p:stCondLst>
+                        <p:cond delay="0"/>
+                      </p:stCondLst>
+                      <p:childTnLst>
+                        <p:par>
+                          <p:cTn id="3" presetID="10" presetClass="entr" presetSubtype="0" fill="hold" nodeType="withEffect">
+                            <p:stCondLst>
+                              <p:cond delay="0"/>
+                            </p:stCondLst>
+                            <p:childTnLst>
+                              <p:animEffect transition="in" filter="fade">
+                                <p:cBhvr>
+                                  <p:cTn id="4" dur="450"/>
+                                  <p:tgtEl>
+                                    <p:spTgt spid="2"/>
+                                  </p:tgtEl>
+                                </p:cBhvr>
+                              </p:animEffect>
+                            </p:childTnLst>
+                          </p:cTn>
+                        </p:par>
+                        <p:par>
+                          <p:cTn id="5" presetID="10" presetClass="entr" presetSubtype="0" fill="hold" nodeType="withEffect">
+                            <p:stCondLst>
+                              <p:cond delay="200"/>
+                            </p:stCondLst>
+                            <p:childTnLst>
+                              <p:animEffect transition="in" filter="fade">
+                                <p:cBhvr>
+                                  <p:cTn id="6" dur="450"/>
+                                  <p:tgtEl>
+                                    <p:spTgt spid="3"/>
+                                  </p:tgtEl>
+                                </p:cBhvr>
+                              </p:animEffect>
+                            </p:childTnLst>
+                          </p:cTn>
+                        </p:par>
+                        <p:par>
+                          <p:cTn id="7" presetID="10" presetClass="entr" presetSubtype="0" fill="hold" nodeType="withEffect">
+                            <p:stCondLst>
+                              <p:cond delay="200"/>
+                            </p:stCondLst>
+                            <p:childTnLst>
+                              <p:animEffect transition="in" filter="fade">
+                                <p:cBhvr>
+                                  <p:cTn id="8" dur="450"/>
+                                  <p:tgtEl>
+                                    <p:spTgt spid="4"/>
+                                  </p:tgtEl>
+                                </p:cBhvr>
+                              </p:animEffect>
+                            </p:childTnLst>
+                          </p:cTn>
+                        </p:par>
+                      </p:childTnLst>
+                    </p:cTn>
+                  </p:par>
+                </p:childTnLst>
+              </p:cTn>
+              <p:prevCondLst>
+                <p:cond evt="onPrev" delay="0">
+                  <p:tgtEl>
+                    <p:sldTgt/>
+                  </p:tgtEl>
+                </p:cond>
+              </p:prevCondLst>
+              <p:nextCondLst>
+                <p:cond evt="onNext" delay="0">
+                  <p:tgtEl>
+                    <p:sldTgt/>
+                  </p:tgtEl>
+                </p:cond>
+              </p:nextCondLst>
+            </p:seq>
+          </p:childTnLst>
+        </p:cTn>
+      </p:par>
+    </p:tnLst>
+  </p:timing>
 </p:sld>
 </file>
 
@@ -8035,6 +8755,96 @@
   <p:clrMapOvr>
     <a:masterClrMapping/>
   </p:clrMapOvr>
+  <p:timing>
+    <p:tnLst>
+      <p:par>
+        <p:cTn id="1" dur="indefinite" restart="never" nodeType="tmRoot">
+          <p:childTnLst>
+            <p:seq concurrent="true" nextAc="seek">
+              <p:cTn id="2" dur="indefinite" nodeType="mainSeq">
+                <p:childTnLst>
+                  <p:par>
+                    <p:cTn id="9" fill="hold">
+                      <p:stCondLst>
+                        <p:cond delay="0"/>
+                      </p:stCondLst>
+                      <p:childTnLst>
+                        <p:par>
+                          <p:cTn id="3" presetID="10" presetClass="entr" presetSubtype="0" fill="hold" nodeType="withEffect">
+                            <p:stCondLst>
+                              <p:cond delay="0"/>
+                            </p:stCondLst>
+                            <p:childTnLst>
+                              <p:animEffect transition="in" filter="fade">
+                                <p:cBhvr>
+                                  <p:cTn id="4" dur="450"/>
+                                  <p:tgtEl>
+                                    <p:spTgt spid="2"/>
+                                  </p:tgtEl>
+                                </p:cBhvr>
+                              </p:animEffect>
+                            </p:childTnLst>
+                          </p:cTn>
+                        </p:par>
+                        <p:par>
+                          <p:cTn id="5" presetID="10" presetClass="entr" presetSubtype="0" fill="hold" nodeType="withEffect">
+                            <p:stCondLst>
+                              <p:cond delay="200"/>
+                            </p:stCondLst>
+                            <p:childTnLst>
+                              <p:animEffect transition="in" filter="fade">
+                                <p:cBhvr>
+                                  <p:cTn id="6" dur="450"/>
+                                  <p:tgtEl>
+                                    <p:spTgt spid="3"/>
+                                  </p:tgtEl>
+                                </p:cBhvr>
+                              </p:animEffect>
+                            </p:childTnLst>
+                          </p:cTn>
+                        </p:par>
+                        <p:par>
+                          <p:cTn id="7" presetID="10" presetClass="entr" presetSubtype="0" fill="hold" nodeType="withEffect">
+                            <p:stCondLst>
+                              <p:cond delay="200"/>
+                            </p:stCondLst>
+                            <p:childTnLst>
+                              <p:animEffect transition="in" filter="fade">
+                                <p:cBhvr>
+                                  <p:cTn id="8" dur="450"/>
+                                  <p:tgtEl>
+                                    <p:spTgt spid="4"/>
+                                  </p:tgtEl>
+                                </p:cBhvr>
+                              </p:animEffect>
+                            </p:childTnLst>
+                          </p:cTn>
+                        </p:par>
+                      </p:childTnLst>
+                    </p:cTn>
+                  </p:par>
+                </p:childTnLst>
+              </p:cTn>
+              <p:prevCondLst>
+                <p:cond evt="onPrev" delay="0">
+                  <p:tgtEl>
+                    <p:sldTgt/>
+                  </p:tgtEl>
+                </p:cond>
+              </p:prevCondLst>
+              <p:nextCondLst>
+                <p:cond evt="onNext" delay="0">
+                  <p:tgtEl>
+                    <p:sldTgt/>
+                  </p:tgtEl>
+                </p:cond>
+              </p:nextCondLst>
+            </p:seq>
+          </p:childTnLst>
+        </p:cTn>
+      </p:par>
+    </p:tnLst>
+  </p:timing>
 </p:sld>
 </file>
 
@@ -8519,6 +9329,96 @@
   <p:clrMapOvr>
     <a:masterClrMapping/>
   </p:clrMapOvr>
+  <p:timing>
+    <p:tnLst>
+      <p:par>
+        <p:cTn id="1" dur="indefinite" restart="never" nodeType="tmRoot">
+          <p:childTnLst>
+            <p:seq concurrent="true" nextAc="seek">
+              <p:cTn id="2" dur="indefinite" nodeType="mainSeq">
+                <p:childTnLst>
+                  <p:par>
+                    <p:cTn id="9" fill="hold">
+                      <p:stCondLst>
+                        <p:cond delay="0"/>
+                      </p:stCondLst>
+                      <p:childTnLst>
+                        <p:par>
+                          <p:cTn id="3" presetID="10" presetClass="entr" presetSubtype="0" fill="hold" nodeType="withEffect">
+                            <p:stCondLst>
+                              <p:cond delay="0"/>
+                            </p:stCondLst>
+                            <p:childTnLst>
+                              <p:animEffect transition="in" filter="fade">
+                                <p:cBhvr>
+                                  <p:cTn id="4" dur="450"/>
+                                  <p:tgtEl>
+                                    <p:spTgt spid="2"/>
+                                  </p:tgtEl>
+                                </p:cBhvr>
+                              </p:animEffect>
+                            </p:childTnLst>
+                          </p:cTn>
+                        </p:par>
+                        <p:par>
+                          <p:cTn id="5" presetID="10" presetClass="entr" presetSubtype="0" fill="hold" nodeType="withEffect">
+                            <p:stCondLst>
+                              <p:cond delay="200"/>
+                            </p:stCondLst>
+                            <p:childTnLst>
+                              <p:animEffect transition="in" filter="fade">
+                                <p:cBhvr>
+                                  <p:cTn id="6" dur="450"/>
+                                  <p:tgtEl>
+                                    <p:spTgt spid="3"/>
+                                  </p:tgtEl>
+                                </p:cBhvr>
+                              </p:animEffect>
+                            </p:childTnLst>
+                          </p:cTn>
+                        </p:par>
+                        <p:par>
+                          <p:cTn id="7" presetID="10" presetClass="entr" presetSubtype="0" fill="hold" nodeType="withEffect">
+                            <p:stCondLst>
+                              <p:cond delay="200"/>
+                            </p:stCondLst>
+                            <p:childTnLst>
+                              <p:animEffect transition="in" filter="fade">
+                                <p:cBhvr>
+                                  <p:cTn id="8" dur="450"/>
+                                  <p:tgtEl>
+                                    <p:spTgt spid="4"/>
+                                  </p:tgtEl>
+                                </p:cBhvr>
+                              </p:animEffect>
+                            </p:childTnLst>
+                          </p:cTn>
+                        </p:par>
+                      </p:childTnLst>
+                    </p:cTn>
+                  </p:par>
+                </p:childTnLst>
+              </p:cTn>
+              <p:prevCondLst>
+                <p:cond evt="onPrev" delay="0">
+                  <p:tgtEl>
+                    <p:sldTgt/>
+                  </p:tgtEl>
+                </p:cond>
+              </p:prevCondLst>
+              <p:nextCondLst>
+                <p:cond evt="onNext" delay="0">
+                  <p:tgtEl>
+                    <p:sldTgt/>
+                  </p:tgtEl>
+                </p:cond>
+              </p:nextCondLst>
+            </p:seq>
+          </p:childTnLst>
+        </p:cTn>
+      </p:par>
+    </p:tnLst>
+  </p:timing>
 </p:sld>
 </file>
 
